--- a/Vol.0/Vol-0.pptx
+++ b/Vol.0/Vol-0.pptx
@@ -7,8 +7,8 @@
   <p:sldIdLst>
     <p:sldId id="257" r:id="rId2"/>
     <p:sldId id="256" r:id="rId3"/>
-    <p:sldId id="259" r:id="rId4"/>
-    <p:sldId id="258" r:id="rId5"/>
+    <p:sldId id="261" r:id="rId4"/>
+    <p:sldId id="262" r:id="rId5"/>
     <p:sldId id="260" r:id="rId6"/>
   </p:sldIdLst>
   <p:sldSz cx="12192000" cy="6858000"/>
@@ -274,7 +274,7 @@
           <a:p>
             <a:fld id="{9B9FC74E-28ED-4569-8082-98A9E689FD93}" type="datetimeFigureOut">
               <a:rPr lang="zh-CN" altLang="en-US" smtClean="0"/>
-              <a:t>2025/7/19</a:t>
+              <a:t>2025/8/28</a:t>
             </a:fld>
             <a:endParaRPr lang="zh-CN" altLang="en-US"/>
           </a:p>
@@ -472,7 +472,7 @@
           <a:p>
             <a:fld id="{9B9FC74E-28ED-4569-8082-98A9E689FD93}" type="datetimeFigureOut">
               <a:rPr lang="zh-CN" altLang="en-US" smtClean="0"/>
-              <a:t>2025/7/19</a:t>
+              <a:t>2025/8/28</a:t>
             </a:fld>
             <a:endParaRPr lang="zh-CN" altLang="en-US"/>
           </a:p>
@@ -680,7 +680,7 @@
           <a:p>
             <a:fld id="{9B9FC74E-28ED-4569-8082-98A9E689FD93}" type="datetimeFigureOut">
               <a:rPr lang="zh-CN" altLang="en-US" smtClean="0"/>
-              <a:t>2025/7/19</a:t>
+              <a:t>2025/8/28</a:t>
             </a:fld>
             <a:endParaRPr lang="zh-CN" altLang="en-US"/>
           </a:p>
@@ -878,7 +878,7 @@
           <a:p>
             <a:fld id="{9B9FC74E-28ED-4569-8082-98A9E689FD93}" type="datetimeFigureOut">
               <a:rPr lang="zh-CN" altLang="en-US" smtClean="0"/>
-              <a:t>2025/7/19</a:t>
+              <a:t>2025/8/28</a:t>
             </a:fld>
             <a:endParaRPr lang="zh-CN" altLang="en-US"/>
           </a:p>
@@ -1153,7 +1153,7 @@
           <a:p>
             <a:fld id="{9B9FC74E-28ED-4569-8082-98A9E689FD93}" type="datetimeFigureOut">
               <a:rPr lang="zh-CN" altLang="en-US" smtClean="0"/>
-              <a:t>2025/7/19</a:t>
+              <a:t>2025/8/28</a:t>
             </a:fld>
             <a:endParaRPr lang="zh-CN" altLang="en-US"/>
           </a:p>
@@ -1418,7 +1418,7 @@
           <a:p>
             <a:fld id="{9B9FC74E-28ED-4569-8082-98A9E689FD93}" type="datetimeFigureOut">
               <a:rPr lang="zh-CN" altLang="en-US" smtClean="0"/>
-              <a:t>2025/7/19</a:t>
+              <a:t>2025/8/28</a:t>
             </a:fld>
             <a:endParaRPr lang="zh-CN" altLang="en-US"/>
           </a:p>
@@ -1830,7 +1830,7 @@
           <a:p>
             <a:fld id="{9B9FC74E-28ED-4569-8082-98A9E689FD93}" type="datetimeFigureOut">
               <a:rPr lang="zh-CN" altLang="en-US" smtClean="0"/>
-              <a:t>2025/7/19</a:t>
+              <a:t>2025/8/28</a:t>
             </a:fld>
             <a:endParaRPr lang="zh-CN" altLang="en-US"/>
           </a:p>
@@ -1971,7 +1971,7 @@
           <a:p>
             <a:fld id="{9B9FC74E-28ED-4569-8082-98A9E689FD93}" type="datetimeFigureOut">
               <a:rPr lang="zh-CN" altLang="en-US" smtClean="0"/>
-              <a:t>2025/7/19</a:t>
+              <a:t>2025/8/28</a:t>
             </a:fld>
             <a:endParaRPr lang="zh-CN" altLang="en-US"/>
           </a:p>
@@ -2084,7 +2084,7 @@
           <a:p>
             <a:fld id="{9B9FC74E-28ED-4569-8082-98A9E689FD93}" type="datetimeFigureOut">
               <a:rPr lang="zh-CN" altLang="en-US" smtClean="0"/>
-              <a:t>2025/7/19</a:t>
+              <a:t>2025/8/28</a:t>
             </a:fld>
             <a:endParaRPr lang="zh-CN" altLang="en-US"/>
           </a:p>
@@ -2395,7 +2395,7 @@
           <a:p>
             <a:fld id="{9B9FC74E-28ED-4569-8082-98A9E689FD93}" type="datetimeFigureOut">
               <a:rPr lang="zh-CN" altLang="en-US" smtClean="0"/>
-              <a:t>2025/7/19</a:t>
+              <a:t>2025/8/28</a:t>
             </a:fld>
             <a:endParaRPr lang="zh-CN" altLang="en-US"/>
           </a:p>
@@ -2683,7 +2683,7 @@
           <a:p>
             <a:fld id="{9B9FC74E-28ED-4569-8082-98A9E689FD93}" type="datetimeFigureOut">
               <a:rPr lang="zh-CN" altLang="en-US" smtClean="0"/>
-              <a:t>2025/7/19</a:t>
+              <a:t>2025/8/28</a:t>
             </a:fld>
             <a:endParaRPr lang="zh-CN" altLang="en-US"/>
           </a:p>
@@ -2938,7 +2938,7 @@
           <a:p>
             <a:fld id="{9B9FC74E-28ED-4569-8082-98A9E689FD93}" type="datetimeFigureOut">
               <a:rPr lang="zh-CN" altLang="en-US" smtClean="0"/>
-              <a:t>2025/7/19</a:t>
+              <a:t>2025/8/28</a:t>
             </a:fld>
             <a:endParaRPr lang="zh-CN" altLang="en-US"/>
           </a:p>
@@ -3355,12 +3355,2009 @@
           <a:chExt cx="0" cy="0"/>
         </a:xfrm>
       </p:grpSpPr>
+      <p:grpSp>
+        <p:nvGrpSpPr>
+          <p:cNvPr id="10" name="组合 9">
+            <a:extLst>
+              <a:ext uri="{FF2B5EF4-FFF2-40B4-BE49-F238E27FC236}">
+                <a16:creationId xmlns:a16="http://schemas.microsoft.com/office/drawing/2014/main" id="{46365F1C-2C69-E4DA-4444-6FFF6A4743CB}"/>
+              </a:ext>
+            </a:extLst>
+          </p:cNvPr>
+          <p:cNvGrpSpPr/>
+          <p:nvPr/>
+        </p:nvGrpSpPr>
+        <p:grpSpPr>
+          <a:xfrm>
+            <a:off x="3075214" y="245610"/>
+            <a:ext cx="6041572" cy="6020030"/>
+            <a:chOff x="6096000" y="359229"/>
+            <a:chExt cx="6041572" cy="6020030"/>
+          </a:xfrm>
+        </p:grpSpPr>
+        <p:sp>
+          <p:nvSpPr>
+            <p:cNvPr id="5" name="矩形: 圆角 4">
+              <a:extLst>
+                <a:ext uri="{FF2B5EF4-FFF2-40B4-BE49-F238E27FC236}">
+                  <a16:creationId xmlns:a16="http://schemas.microsoft.com/office/drawing/2014/main" id="{B2D83A27-FA42-A1F2-73BA-EC8824832EAF}"/>
+                </a:ext>
+              </a:extLst>
+            </p:cNvPr>
+            <p:cNvSpPr/>
+            <p:nvPr/>
+          </p:nvSpPr>
+          <p:spPr>
+            <a:xfrm>
+              <a:off x="6096000" y="359229"/>
+              <a:ext cx="6041572" cy="6020030"/>
+            </a:xfrm>
+            <a:prstGeom prst="roundRect">
+              <a:avLst/>
+            </a:prstGeom>
+            <a:solidFill>
+              <a:schemeClr val="tx1">
+                <a:lumMod val="85000"/>
+                <a:lumOff val="15000"/>
+              </a:schemeClr>
+            </a:solidFill>
+            <a:ln w="47625">
+              <a:solidFill>
+                <a:schemeClr val="tx1">
+                  <a:lumMod val="65000"/>
+                  <a:lumOff val="35000"/>
+                  <a:alpha val="99000"/>
+                </a:schemeClr>
+              </a:solidFill>
+              <a:prstDash val="lgDashDot"/>
+            </a:ln>
+          </p:spPr>
+          <p:style>
+            <a:lnRef idx="2">
+              <a:schemeClr val="accent1">
+                <a:shade val="15000"/>
+              </a:schemeClr>
+            </a:lnRef>
+            <a:fillRef idx="1">
+              <a:schemeClr val="accent1"/>
+            </a:fillRef>
+            <a:effectRef idx="0">
+              <a:schemeClr val="accent1"/>
+            </a:effectRef>
+            <a:fontRef idx="minor">
+              <a:schemeClr val="lt1"/>
+            </a:fontRef>
+          </p:style>
+          <p:txBody>
+            <a:bodyPr rtlCol="0" anchor="ctr"/>
+            <a:lstStyle/>
+            <a:p>
+              <a:pPr algn="ctr"/>
+              <a:endParaRPr lang="zh-CN" altLang="en-US" dirty="0"/>
+            </a:p>
+          </p:txBody>
+        </p:sp>
+        <p:sp>
+          <p:nvSpPr>
+            <p:cNvPr id="7" name="文本框 6">
+              <a:extLst>
+                <a:ext uri="{FF2B5EF4-FFF2-40B4-BE49-F238E27FC236}">
+                  <a16:creationId xmlns:a16="http://schemas.microsoft.com/office/drawing/2014/main" id="{7EB9DD0A-D24D-2F8D-AE40-FA43E712F2BE}"/>
+                </a:ext>
+              </a:extLst>
+            </p:cNvPr>
+            <p:cNvSpPr txBox="1"/>
+            <p:nvPr/>
+          </p:nvSpPr>
+          <p:spPr>
+            <a:xfrm>
+              <a:off x="6587566" y="922420"/>
+              <a:ext cx="3884672" cy="4974944"/>
+            </a:xfrm>
+            <a:prstGeom prst="rect">
+              <a:avLst/>
+            </a:prstGeom>
+            <a:noFill/>
+          </p:spPr>
+          <p:txBody>
+            <a:bodyPr wrap="square">
+              <a:spAutoFit/>
+            </a:bodyPr>
+            <a:lstStyle/>
+            <a:p>
+              <a:r>
+                <a:rPr lang="en-US" altLang="zh-CN" sz="2400" b="0" i="0" dirty="0">
+                  <a:solidFill>
+                    <a:srgbClr val="C578DD"/>
+                  </a:solidFill>
+                  <a:effectLst/>
+                  <a:latin typeface="FiraMono Nerd Font Medium" panose="020B0609050000020004" pitchFamily="49" charset="0"/>
+                  <a:ea typeface="FiraMono Nerd Font Medium" panose="020B0609050000020004" pitchFamily="49" charset="0"/>
+                </a:rPr>
+                <a:t>fn</a:t>
+              </a:r>
+              <a:r>
+                <a:rPr lang="en-US" altLang="zh-CN" sz="2400" b="0" i="0" dirty="0">
+                  <a:solidFill>
+                    <a:srgbClr val="AAB1BF"/>
+                  </a:solidFill>
+                  <a:effectLst/>
+                  <a:latin typeface="FiraMono Nerd Font Medium" panose="020B0609050000020004" pitchFamily="49" charset="0"/>
+                  <a:ea typeface="FiraMono Nerd Font Medium" panose="020B0609050000020004" pitchFamily="49" charset="0"/>
+                </a:rPr>
+                <a:t> </a:t>
+              </a:r>
+              <a:r>
+                <a:rPr lang="en-US" altLang="zh-CN" sz="2400" b="0" i="0" dirty="0">
+                  <a:solidFill>
+                    <a:srgbClr val="61AFEF"/>
+                  </a:solidFill>
+                  <a:effectLst/>
+                  <a:latin typeface="FiraMono Nerd Font Medium" panose="020B0609050000020004" pitchFamily="49" charset="0"/>
+                  <a:ea typeface="FiraMono Nerd Font Medium" panose="020B0609050000020004" pitchFamily="49" charset="0"/>
+                </a:rPr>
+                <a:t>fibonacci</a:t>
+              </a:r>
+              <a:r>
+                <a:rPr lang="en-US" altLang="zh-CN" sz="2400" b="0" i="0" dirty="0">
+                  <a:solidFill>
+                    <a:srgbClr val="AAB1BF"/>
+                  </a:solidFill>
+                  <a:effectLst/>
+                  <a:latin typeface="FiraMono Nerd Font Medium" panose="020B0609050000020004" pitchFamily="49" charset="0"/>
+                  <a:ea typeface="FiraMono Nerd Font Medium" panose="020B0609050000020004" pitchFamily="49" charset="0"/>
+                </a:rPr>
+                <a:t>(n: </a:t>
+              </a:r>
+              <a:r>
+                <a:rPr lang="en-US" altLang="zh-CN" sz="2400" b="0" i="0" dirty="0">
+                  <a:solidFill>
+                    <a:srgbClr val="C578DD"/>
+                  </a:solidFill>
+                  <a:effectLst/>
+                  <a:latin typeface="FiraMono Nerd Font Medium" panose="020B0609050000020004" pitchFamily="49" charset="0"/>
+                  <a:ea typeface="FiraMono Nerd Font Medium" panose="020B0609050000020004" pitchFamily="49" charset="0"/>
+                </a:rPr>
+                <a:t>u32</a:t>
+              </a:r>
+              <a:r>
+                <a:rPr lang="en-US" altLang="zh-CN" sz="2400" b="0" i="0" dirty="0">
+                  <a:solidFill>
+                    <a:srgbClr val="AAB1BF"/>
+                  </a:solidFill>
+                  <a:effectLst/>
+                  <a:latin typeface="FiraMono Nerd Font Medium" panose="020B0609050000020004" pitchFamily="49" charset="0"/>
+                  <a:ea typeface="FiraMono Nerd Font Medium" panose="020B0609050000020004" pitchFamily="49" charset="0"/>
+                </a:rPr>
+                <a:t>) -&gt; </a:t>
+              </a:r>
+              <a:r>
+                <a:rPr lang="en-US" altLang="zh-CN" sz="2400" b="0" i="0" dirty="0">
+                  <a:solidFill>
+                    <a:srgbClr val="C578DD"/>
+                  </a:solidFill>
+                  <a:effectLst/>
+                  <a:latin typeface="FiraMono Nerd Font Medium" panose="020B0609050000020004" pitchFamily="49" charset="0"/>
+                  <a:ea typeface="FiraMono Nerd Font Medium" panose="020B0609050000020004" pitchFamily="49" charset="0"/>
+                </a:rPr>
+                <a:t>u64</a:t>
+              </a:r>
+              <a:r>
+                <a:rPr lang="en-US" altLang="zh-CN" sz="2400" b="0" i="0" dirty="0">
+                  <a:solidFill>
+                    <a:srgbClr val="AAB1BF"/>
+                  </a:solidFill>
+                  <a:effectLst/>
+                  <a:latin typeface="FiraMono Nerd Font Medium" panose="020B0609050000020004" pitchFamily="49" charset="0"/>
+                  <a:ea typeface="FiraMono Nerd Font Medium" panose="020B0609050000020004" pitchFamily="49" charset="0"/>
+                </a:rPr>
+                <a:t> {</a:t>
+              </a:r>
+              <a:br>
+                <a:rPr lang="en-US" altLang="zh-CN" sz="2400" dirty="0">
+                  <a:latin typeface="FiraMono Nerd Font Medium" panose="020B0609050000020004" pitchFamily="49" charset="0"/>
+                  <a:ea typeface="FiraMono Nerd Font Medium" panose="020B0609050000020004" pitchFamily="49" charset="0"/>
+                </a:rPr>
+              </a:br>
+              <a:r>
+                <a:rPr lang="en-US" altLang="zh-CN" sz="2400" b="0" i="0" dirty="0">
+                  <a:solidFill>
+                    <a:srgbClr val="AAB1BF"/>
+                  </a:solidFill>
+                  <a:effectLst/>
+                  <a:latin typeface="FiraMono Nerd Font Medium" panose="020B0609050000020004" pitchFamily="49" charset="0"/>
+                  <a:ea typeface="FiraMono Nerd Font Medium" panose="020B0609050000020004" pitchFamily="49" charset="0"/>
+                </a:rPr>
+                <a:t>    </a:t>
+              </a:r>
+              <a:r>
+                <a:rPr lang="en-US" altLang="zh-CN" sz="2400" b="0" i="0" dirty="0">
+                  <a:solidFill>
+                    <a:srgbClr val="C578DD"/>
+                  </a:solidFill>
+                  <a:effectLst/>
+                  <a:latin typeface="FiraMono Nerd Font Medium" panose="020B0609050000020004" pitchFamily="49" charset="0"/>
+                  <a:ea typeface="FiraMono Nerd Font Medium" panose="020B0609050000020004" pitchFamily="49" charset="0"/>
+                </a:rPr>
+                <a:t>if</a:t>
+              </a:r>
+              <a:r>
+                <a:rPr lang="en-US" altLang="zh-CN" sz="2400" b="0" i="0" dirty="0">
+                  <a:solidFill>
+                    <a:srgbClr val="AAB1BF"/>
+                  </a:solidFill>
+                  <a:effectLst/>
+                  <a:latin typeface="FiraMono Nerd Font Medium" panose="020B0609050000020004" pitchFamily="49" charset="0"/>
+                  <a:ea typeface="FiraMono Nerd Font Medium" panose="020B0609050000020004" pitchFamily="49" charset="0"/>
+                </a:rPr>
+                <a:t> n </a:t>
+              </a:r>
+              <a:r>
+                <a:rPr lang="en-US" altLang="zh-CN" sz="2400" b="0" i="0" dirty="0">
+                  <a:solidFill>
+                    <a:srgbClr val="61AFEF"/>
+                  </a:solidFill>
+                  <a:effectLst/>
+                  <a:latin typeface="FiraMono Nerd Font Medium" panose="020B0609050000020004" pitchFamily="49" charset="0"/>
+                  <a:ea typeface="FiraMono Nerd Font Medium" panose="020B0609050000020004" pitchFamily="49" charset="0"/>
+                </a:rPr>
+                <a:t>&lt;=</a:t>
+              </a:r>
+              <a:r>
+                <a:rPr lang="en-US" altLang="zh-CN" sz="2400" b="0" i="0" dirty="0">
+                  <a:solidFill>
+                    <a:srgbClr val="AAB1BF"/>
+                  </a:solidFill>
+                  <a:effectLst/>
+                  <a:latin typeface="FiraMono Nerd Font Medium" panose="020B0609050000020004" pitchFamily="49" charset="0"/>
+                  <a:ea typeface="FiraMono Nerd Font Medium" panose="020B0609050000020004" pitchFamily="49" charset="0"/>
+                </a:rPr>
+                <a:t> </a:t>
+              </a:r>
+              <a:r>
+                <a:rPr lang="en-US" altLang="zh-CN" sz="2400" b="0" i="0" dirty="0">
+                  <a:solidFill>
+                    <a:srgbClr val="D19965"/>
+                  </a:solidFill>
+                  <a:effectLst/>
+                  <a:latin typeface="FiraMono Nerd Font Medium" panose="020B0609050000020004" pitchFamily="49" charset="0"/>
+                  <a:ea typeface="FiraMono Nerd Font Medium" panose="020B0609050000020004" pitchFamily="49" charset="0"/>
+                </a:rPr>
+                <a:t>1</a:t>
+              </a:r>
+              <a:r>
+                <a:rPr lang="en-US" altLang="zh-CN" sz="2400" b="0" i="0" dirty="0">
+                  <a:solidFill>
+                    <a:srgbClr val="AAB1BF"/>
+                  </a:solidFill>
+                  <a:effectLst/>
+                  <a:latin typeface="FiraMono Nerd Font Medium" panose="020B0609050000020004" pitchFamily="49" charset="0"/>
+                  <a:ea typeface="FiraMono Nerd Font Medium" panose="020B0609050000020004" pitchFamily="49" charset="0"/>
+                </a:rPr>
+                <a:t> {</a:t>
+              </a:r>
+              <a:br>
+                <a:rPr lang="en-US" altLang="zh-CN" sz="2400" dirty="0">
+                  <a:latin typeface="FiraMono Nerd Font Medium" panose="020B0609050000020004" pitchFamily="49" charset="0"/>
+                  <a:ea typeface="FiraMono Nerd Font Medium" panose="020B0609050000020004" pitchFamily="49" charset="0"/>
+                </a:rPr>
+              </a:br>
+              <a:r>
+                <a:rPr lang="en-US" altLang="zh-CN" sz="2400" b="0" i="0" dirty="0">
+                  <a:solidFill>
+                    <a:srgbClr val="AAB1BF"/>
+                  </a:solidFill>
+                  <a:effectLst/>
+                  <a:latin typeface="FiraMono Nerd Font Medium" panose="020B0609050000020004" pitchFamily="49" charset="0"/>
+                  <a:ea typeface="FiraMono Nerd Font Medium" panose="020B0609050000020004" pitchFamily="49" charset="0"/>
+                </a:rPr>
+                <a:t>        </a:t>
+              </a:r>
+              <a:r>
+                <a:rPr lang="en-US" altLang="zh-CN" sz="2400" b="0" i="0" dirty="0">
+                  <a:solidFill>
+                    <a:srgbClr val="C578DD"/>
+                  </a:solidFill>
+                  <a:effectLst/>
+                  <a:latin typeface="FiraMono Nerd Font Medium" panose="020B0609050000020004" pitchFamily="49" charset="0"/>
+                  <a:ea typeface="FiraMono Nerd Font Medium" panose="020B0609050000020004" pitchFamily="49" charset="0"/>
+                </a:rPr>
+                <a:t>return</a:t>
+              </a:r>
+              <a:r>
+                <a:rPr lang="en-US" altLang="zh-CN" sz="2400" b="0" i="0" dirty="0">
+                  <a:solidFill>
+                    <a:srgbClr val="AAB1BF"/>
+                  </a:solidFill>
+                  <a:effectLst/>
+                  <a:latin typeface="FiraMono Nerd Font Medium" panose="020B0609050000020004" pitchFamily="49" charset="0"/>
+                  <a:ea typeface="FiraMono Nerd Font Medium" panose="020B0609050000020004" pitchFamily="49" charset="0"/>
+                </a:rPr>
+                <a:t> n </a:t>
+              </a:r>
+              <a:r>
+                <a:rPr lang="en-US" altLang="zh-CN" sz="2400" b="0" i="0" dirty="0">
+                  <a:solidFill>
+                    <a:srgbClr val="C578DD"/>
+                  </a:solidFill>
+                  <a:effectLst/>
+                  <a:latin typeface="FiraMono Nerd Font Medium" panose="020B0609050000020004" pitchFamily="49" charset="0"/>
+                  <a:ea typeface="FiraMono Nerd Font Medium" panose="020B0609050000020004" pitchFamily="49" charset="0"/>
+                </a:rPr>
+                <a:t>as</a:t>
+              </a:r>
+              <a:r>
+                <a:rPr lang="en-US" altLang="zh-CN" sz="2400" b="0" i="0" dirty="0">
+                  <a:solidFill>
+                    <a:srgbClr val="AAB1BF"/>
+                  </a:solidFill>
+                  <a:effectLst/>
+                  <a:latin typeface="FiraMono Nerd Font Medium" panose="020B0609050000020004" pitchFamily="49" charset="0"/>
+                  <a:ea typeface="FiraMono Nerd Font Medium" panose="020B0609050000020004" pitchFamily="49" charset="0"/>
+                </a:rPr>
+                <a:t> </a:t>
+              </a:r>
+              <a:r>
+                <a:rPr lang="en-US" altLang="zh-CN" sz="2400" b="0" i="0" dirty="0">
+                  <a:solidFill>
+                    <a:srgbClr val="C578DD"/>
+                  </a:solidFill>
+                  <a:effectLst/>
+                  <a:latin typeface="FiraMono Nerd Font Medium" panose="020B0609050000020004" pitchFamily="49" charset="0"/>
+                  <a:ea typeface="FiraMono Nerd Font Medium" panose="020B0609050000020004" pitchFamily="49" charset="0"/>
+                </a:rPr>
+                <a:t>u64</a:t>
+              </a:r>
+              <a:r>
+                <a:rPr lang="en-US" altLang="zh-CN" sz="2400" b="0" i="0" dirty="0">
+                  <a:solidFill>
+                    <a:srgbClr val="AAB1BF"/>
+                  </a:solidFill>
+                  <a:effectLst/>
+                  <a:latin typeface="FiraMono Nerd Font Medium" panose="020B0609050000020004" pitchFamily="49" charset="0"/>
+                  <a:ea typeface="FiraMono Nerd Font Medium" panose="020B0609050000020004" pitchFamily="49" charset="0"/>
+                </a:rPr>
+                <a:t>;</a:t>
+              </a:r>
+              <a:br>
+                <a:rPr lang="en-US" altLang="zh-CN" sz="2400" dirty="0">
+                  <a:latin typeface="FiraMono Nerd Font Medium" panose="020B0609050000020004" pitchFamily="49" charset="0"/>
+                  <a:ea typeface="FiraMono Nerd Font Medium" panose="020B0609050000020004" pitchFamily="49" charset="0"/>
+                </a:rPr>
+              </a:br>
+              <a:r>
+                <a:rPr lang="en-US" altLang="zh-CN" sz="2400" b="0" i="0" dirty="0">
+                  <a:solidFill>
+                    <a:srgbClr val="AAB1BF"/>
+                  </a:solidFill>
+                  <a:effectLst/>
+                  <a:latin typeface="FiraMono Nerd Font Medium" panose="020B0609050000020004" pitchFamily="49" charset="0"/>
+                  <a:ea typeface="FiraMono Nerd Font Medium" panose="020B0609050000020004" pitchFamily="49" charset="0"/>
+                </a:rPr>
+                <a:t>    }</a:t>
+              </a:r>
+              <a:br>
+                <a:rPr lang="en-US" altLang="zh-CN" sz="2400" dirty="0">
+                  <a:latin typeface="FiraMono Nerd Font Medium" panose="020B0609050000020004" pitchFamily="49" charset="0"/>
+                  <a:ea typeface="FiraMono Nerd Font Medium" panose="020B0609050000020004" pitchFamily="49" charset="0"/>
+                </a:rPr>
+              </a:br>
+              <a:r>
+                <a:rPr lang="en-US" altLang="zh-CN" sz="2400" b="0" i="0" dirty="0">
+                  <a:solidFill>
+                    <a:srgbClr val="AAB1BF"/>
+                  </a:solidFill>
+                  <a:effectLst/>
+                  <a:latin typeface="FiraMono Nerd Font Medium" panose="020B0609050000020004" pitchFamily="49" charset="0"/>
+                  <a:ea typeface="FiraMono Nerd Font Medium" panose="020B0609050000020004" pitchFamily="49" charset="0"/>
+                </a:rPr>
+                <a:t>    </a:t>
+              </a:r>
+              <a:r>
+                <a:rPr lang="en-US" altLang="zh-CN" sz="2400" b="0" i="0" dirty="0">
+                  <a:solidFill>
+                    <a:srgbClr val="C578DD"/>
+                  </a:solidFill>
+                  <a:effectLst/>
+                  <a:latin typeface="FiraMono Nerd Font Medium" panose="020B0609050000020004" pitchFamily="49" charset="0"/>
+                  <a:ea typeface="FiraMono Nerd Font Medium" panose="020B0609050000020004" pitchFamily="49" charset="0"/>
+                </a:rPr>
+                <a:t>let</a:t>
+              </a:r>
+              <a:r>
+                <a:rPr lang="en-US" altLang="zh-CN" sz="2400" b="0" i="0" dirty="0">
+                  <a:solidFill>
+                    <a:srgbClr val="AAB1BF"/>
+                  </a:solidFill>
+                  <a:effectLst/>
+                  <a:latin typeface="FiraMono Nerd Font Medium" panose="020B0609050000020004" pitchFamily="49" charset="0"/>
+                  <a:ea typeface="FiraMono Nerd Font Medium" panose="020B0609050000020004" pitchFamily="49" charset="0"/>
+                </a:rPr>
+                <a:t> </a:t>
+              </a:r>
+              <a:r>
+                <a:rPr lang="en-US" altLang="zh-CN" sz="2400" b="0" i="0" dirty="0">
+                  <a:solidFill>
+                    <a:srgbClr val="C578DD"/>
+                  </a:solidFill>
+                  <a:effectLst/>
+                  <a:latin typeface="FiraMono Nerd Font Medium" panose="020B0609050000020004" pitchFamily="49" charset="0"/>
+                  <a:ea typeface="FiraMono Nerd Font Medium" panose="020B0609050000020004" pitchFamily="49" charset="0"/>
+                </a:rPr>
+                <a:t>mut</a:t>
+              </a:r>
+              <a:r>
+                <a:rPr lang="en-US" altLang="zh-CN" sz="2400" b="0" i="0" dirty="0">
+                  <a:solidFill>
+                    <a:srgbClr val="AAB1BF"/>
+                  </a:solidFill>
+                  <a:effectLst/>
+                  <a:latin typeface="FiraMono Nerd Font Medium" panose="020B0609050000020004" pitchFamily="49" charset="0"/>
+                  <a:ea typeface="FiraMono Nerd Font Medium" panose="020B0609050000020004" pitchFamily="49" charset="0"/>
+                </a:rPr>
+                <a:t> a </a:t>
+              </a:r>
+              <a:r>
+                <a:rPr lang="en-US" altLang="zh-CN" sz="2400" b="0" i="0" dirty="0">
+                  <a:solidFill>
+                    <a:srgbClr val="61AFEF"/>
+                  </a:solidFill>
+                  <a:effectLst/>
+                  <a:latin typeface="FiraMono Nerd Font Medium" panose="020B0609050000020004" pitchFamily="49" charset="0"/>
+                  <a:ea typeface="FiraMono Nerd Font Medium" panose="020B0609050000020004" pitchFamily="49" charset="0"/>
+                </a:rPr>
+                <a:t>=</a:t>
+              </a:r>
+              <a:r>
+                <a:rPr lang="en-US" altLang="zh-CN" sz="2400" b="0" i="0" dirty="0">
+                  <a:solidFill>
+                    <a:srgbClr val="AAB1BF"/>
+                  </a:solidFill>
+                  <a:effectLst/>
+                  <a:latin typeface="FiraMono Nerd Font Medium" panose="020B0609050000020004" pitchFamily="49" charset="0"/>
+                  <a:ea typeface="FiraMono Nerd Font Medium" panose="020B0609050000020004" pitchFamily="49" charset="0"/>
+                </a:rPr>
+                <a:t> </a:t>
+              </a:r>
+              <a:r>
+                <a:rPr lang="en-US" altLang="zh-CN" sz="2400" b="0" i="0" dirty="0">
+                  <a:solidFill>
+                    <a:srgbClr val="D19965"/>
+                  </a:solidFill>
+                  <a:effectLst/>
+                  <a:latin typeface="FiraMono Nerd Font Medium" panose="020B0609050000020004" pitchFamily="49" charset="0"/>
+                  <a:ea typeface="FiraMono Nerd Font Medium" panose="020B0609050000020004" pitchFamily="49" charset="0"/>
+                </a:rPr>
+                <a:t>0</a:t>
+              </a:r>
+              <a:r>
+                <a:rPr lang="en-US" altLang="zh-CN" sz="2400" b="0" i="0" dirty="0">
+                  <a:solidFill>
+                    <a:srgbClr val="AAB1BF"/>
+                  </a:solidFill>
+                  <a:effectLst/>
+                  <a:latin typeface="FiraMono Nerd Font Medium" panose="020B0609050000020004" pitchFamily="49" charset="0"/>
+                  <a:ea typeface="FiraMono Nerd Font Medium" panose="020B0609050000020004" pitchFamily="49" charset="0"/>
+                </a:rPr>
+                <a:t>;</a:t>
+              </a:r>
+              <a:br>
+                <a:rPr lang="en-US" altLang="zh-CN" sz="2400" dirty="0">
+                  <a:latin typeface="FiraMono Nerd Font Medium" panose="020B0609050000020004" pitchFamily="49" charset="0"/>
+                  <a:ea typeface="FiraMono Nerd Font Medium" panose="020B0609050000020004" pitchFamily="49" charset="0"/>
+                </a:rPr>
+              </a:br>
+              <a:r>
+                <a:rPr lang="en-US" altLang="zh-CN" sz="2400" b="0" i="0" dirty="0">
+                  <a:solidFill>
+                    <a:srgbClr val="AAB1BF"/>
+                  </a:solidFill>
+                  <a:effectLst/>
+                  <a:latin typeface="FiraMono Nerd Font Medium" panose="020B0609050000020004" pitchFamily="49" charset="0"/>
+                  <a:ea typeface="FiraMono Nerd Font Medium" panose="020B0609050000020004" pitchFamily="49" charset="0"/>
+                </a:rPr>
+                <a:t>    </a:t>
+              </a:r>
+              <a:r>
+                <a:rPr lang="en-US" altLang="zh-CN" sz="2400" b="0" i="0" dirty="0">
+                  <a:solidFill>
+                    <a:srgbClr val="C578DD"/>
+                  </a:solidFill>
+                  <a:effectLst/>
+                  <a:latin typeface="FiraMono Nerd Font Medium" panose="020B0609050000020004" pitchFamily="49" charset="0"/>
+                  <a:ea typeface="FiraMono Nerd Font Medium" panose="020B0609050000020004" pitchFamily="49" charset="0"/>
+                </a:rPr>
+                <a:t>let</a:t>
+              </a:r>
+              <a:r>
+                <a:rPr lang="en-US" altLang="zh-CN" sz="2400" b="0" i="0" dirty="0">
+                  <a:solidFill>
+                    <a:srgbClr val="AAB1BF"/>
+                  </a:solidFill>
+                  <a:effectLst/>
+                  <a:latin typeface="FiraMono Nerd Font Medium" panose="020B0609050000020004" pitchFamily="49" charset="0"/>
+                  <a:ea typeface="FiraMono Nerd Font Medium" panose="020B0609050000020004" pitchFamily="49" charset="0"/>
+                </a:rPr>
+                <a:t> </a:t>
+              </a:r>
+              <a:r>
+                <a:rPr lang="en-US" altLang="zh-CN" sz="2400" b="0" i="0" dirty="0">
+                  <a:solidFill>
+                    <a:srgbClr val="C578DD"/>
+                  </a:solidFill>
+                  <a:effectLst/>
+                  <a:latin typeface="FiraMono Nerd Font Medium" panose="020B0609050000020004" pitchFamily="49" charset="0"/>
+                  <a:ea typeface="FiraMono Nerd Font Medium" panose="020B0609050000020004" pitchFamily="49" charset="0"/>
+                </a:rPr>
+                <a:t>mut</a:t>
+              </a:r>
+              <a:r>
+                <a:rPr lang="en-US" altLang="zh-CN" sz="2400" b="0" i="0" dirty="0">
+                  <a:solidFill>
+                    <a:srgbClr val="AAB1BF"/>
+                  </a:solidFill>
+                  <a:effectLst/>
+                  <a:latin typeface="FiraMono Nerd Font Medium" panose="020B0609050000020004" pitchFamily="49" charset="0"/>
+                  <a:ea typeface="FiraMono Nerd Font Medium" panose="020B0609050000020004" pitchFamily="49" charset="0"/>
+                </a:rPr>
+                <a:t> b </a:t>
+              </a:r>
+              <a:r>
+                <a:rPr lang="en-US" altLang="zh-CN" sz="2400" b="0" i="0" dirty="0">
+                  <a:solidFill>
+                    <a:srgbClr val="61AFEF"/>
+                  </a:solidFill>
+                  <a:effectLst/>
+                  <a:latin typeface="FiraMono Nerd Font Medium" panose="020B0609050000020004" pitchFamily="49" charset="0"/>
+                  <a:ea typeface="FiraMono Nerd Font Medium" panose="020B0609050000020004" pitchFamily="49" charset="0"/>
+                </a:rPr>
+                <a:t>=</a:t>
+              </a:r>
+              <a:r>
+                <a:rPr lang="en-US" altLang="zh-CN" sz="2400" b="0" i="0" dirty="0">
+                  <a:solidFill>
+                    <a:srgbClr val="AAB1BF"/>
+                  </a:solidFill>
+                  <a:effectLst/>
+                  <a:latin typeface="FiraMono Nerd Font Medium" panose="020B0609050000020004" pitchFamily="49" charset="0"/>
+                  <a:ea typeface="FiraMono Nerd Font Medium" panose="020B0609050000020004" pitchFamily="49" charset="0"/>
+                </a:rPr>
+                <a:t> </a:t>
+              </a:r>
+              <a:r>
+                <a:rPr lang="en-US" altLang="zh-CN" sz="2400" b="0" i="0" dirty="0">
+                  <a:solidFill>
+                    <a:srgbClr val="D19965"/>
+                  </a:solidFill>
+                  <a:effectLst/>
+                  <a:latin typeface="FiraMono Nerd Font Medium" panose="020B0609050000020004" pitchFamily="49" charset="0"/>
+                  <a:ea typeface="FiraMono Nerd Font Medium" panose="020B0609050000020004" pitchFamily="49" charset="0"/>
+                </a:rPr>
+                <a:t>1</a:t>
+              </a:r>
+              <a:r>
+                <a:rPr lang="en-US" altLang="zh-CN" sz="2400" b="0" i="0" dirty="0">
+                  <a:solidFill>
+                    <a:srgbClr val="AAB1BF"/>
+                  </a:solidFill>
+                  <a:effectLst/>
+                  <a:latin typeface="FiraMono Nerd Font Medium" panose="020B0609050000020004" pitchFamily="49" charset="0"/>
+                  <a:ea typeface="FiraMono Nerd Font Medium" panose="020B0609050000020004" pitchFamily="49" charset="0"/>
+                </a:rPr>
+                <a:t>;</a:t>
+              </a:r>
+              <a:br>
+                <a:rPr lang="en-US" altLang="zh-CN" sz="2400" dirty="0">
+                  <a:latin typeface="FiraMono Nerd Font Medium" panose="020B0609050000020004" pitchFamily="49" charset="0"/>
+                  <a:ea typeface="FiraMono Nerd Font Medium" panose="020B0609050000020004" pitchFamily="49" charset="0"/>
+                </a:rPr>
+              </a:br>
+              <a:r>
+                <a:rPr lang="en-US" altLang="zh-CN" sz="2400" b="0" i="0" dirty="0">
+                  <a:solidFill>
+                    <a:srgbClr val="AAB1BF"/>
+                  </a:solidFill>
+                  <a:effectLst/>
+                  <a:latin typeface="FiraMono Nerd Font Medium" panose="020B0609050000020004" pitchFamily="49" charset="0"/>
+                  <a:ea typeface="FiraMono Nerd Font Medium" panose="020B0609050000020004" pitchFamily="49" charset="0"/>
+                </a:rPr>
+                <a:t>    </a:t>
+              </a:r>
+              <a:r>
+                <a:rPr lang="en-US" altLang="zh-CN" sz="2400" b="0" i="0" dirty="0">
+                  <a:solidFill>
+                    <a:srgbClr val="C578DD"/>
+                  </a:solidFill>
+                  <a:effectLst/>
+                  <a:latin typeface="FiraMono Nerd Font Medium" panose="020B0609050000020004" pitchFamily="49" charset="0"/>
+                  <a:ea typeface="FiraMono Nerd Font Medium" panose="020B0609050000020004" pitchFamily="49" charset="0"/>
+                </a:rPr>
+                <a:t>for</a:t>
+              </a:r>
+              <a:r>
+                <a:rPr lang="en-US" altLang="zh-CN" sz="2400" b="0" i="0" dirty="0">
+                  <a:solidFill>
+                    <a:srgbClr val="AAB1BF"/>
+                  </a:solidFill>
+                  <a:effectLst/>
+                  <a:latin typeface="FiraMono Nerd Font Medium" panose="020B0609050000020004" pitchFamily="49" charset="0"/>
+                  <a:ea typeface="FiraMono Nerd Font Medium" panose="020B0609050000020004" pitchFamily="49" charset="0"/>
+                </a:rPr>
+                <a:t> _ </a:t>
+              </a:r>
+              <a:r>
+                <a:rPr lang="en-US" altLang="zh-CN" sz="2400" b="0" i="0" dirty="0">
+                  <a:solidFill>
+                    <a:srgbClr val="C578DD"/>
+                  </a:solidFill>
+                  <a:effectLst/>
+                  <a:latin typeface="FiraMono Nerd Font Medium" panose="020B0609050000020004" pitchFamily="49" charset="0"/>
+                  <a:ea typeface="FiraMono Nerd Font Medium" panose="020B0609050000020004" pitchFamily="49" charset="0"/>
+                </a:rPr>
+                <a:t>in</a:t>
+              </a:r>
+              <a:r>
+                <a:rPr lang="en-US" altLang="zh-CN" sz="2400" b="0" i="0" dirty="0">
+                  <a:solidFill>
+                    <a:srgbClr val="AAB1BF"/>
+                  </a:solidFill>
+                  <a:effectLst/>
+                  <a:latin typeface="FiraMono Nerd Font Medium" panose="020B0609050000020004" pitchFamily="49" charset="0"/>
+                  <a:ea typeface="FiraMono Nerd Font Medium" panose="020B0609050000020004" pitchFamily="49" charset="0"/>
+                </a:rPr>
+                <a:t> </a:t>
+              </a:r>
+              <a:r>
+                <a:rPr lang="en-US" altLang="zh-CN" sz="2400" b="0" i="0" dirty="0">
+                  <a:solidFill>
+                    <a:srgbClr val="D19965"/>
+                  </a:solidFill>
+                  <a:effectLst/>
+                  <a:latin typeface="FiraMono Nerd Font Medium" panose="020B0609050000020004" pitchFamily="49" charset="0"/>
+                  <a:ea typeface="FiraMono Nerd Font Medium" panose="020B0609050000020004" pitchFamily="49" charset="0"/>
+                </a:rPr>
+                <a:t>2</a:t>
+              </a:r>
+              <a:r>
+                <a:rPr lang="en-US" altLang="zh-CN" sz="2400" b="0" i="0" dirty="0">
+                  <a:solidFill>
+                    <a:srgbClr val="AAB1BF"/>
+                  </a:solidFill>
+                  <a:effectLst/>
+                  <a:latin typeface="FiraMono Nerd Font Medium" panose="020B0609050000020004" pitchFamily="49" charset="0"/>
+                  <a:ea typeface="FiraMono Nerd Font Medium" panose="020B0609050000020004" pitchFamily="49" charset="0"/>
+                </a:rPr>
+                <a:t>..=n {</a:t>
+              </a:r>
+              <a:br>
+                <a:rPr lang="en-US" altLang="zh-CN" sz="2400" dirty="0">
+                  <a:latin typeface="FiraMono Nerd Font Medium" panose="020B0609050000020004" pitchFamily="49" charset="0"/>
+                  <a:ea typeface="FiraMono Nerd Font Medium" panose="020B0609050000020004" pitchFamily="49" charset="0"/>
+                </a:rPr>
+              </a:br>
+              <a:r>
+                <a:rPr lang="en-US" altLang="zh-CN" sz="2400" b="0" i="0" dirty="0">
+                  <a:solidFill>
+                    <a:srgbClr val="AAB1BF"/>
+                  </a:solidFill>
+                  <a:effectLst/>
+                  <a:latin typeface="FiraMono Nerd Font Medium" panose="020B0609050000020004" pitchFamily="49" charset="0"/>
+                  <a:ea typeface="FiraMono Nerd Font Medium" panose="020B0609050000020004" pitchFamily="49" charset="0"/>
+                </a:rPr>
+                <a:t>        </a:t>
+              </a:r>
+              <a:r>
+                <a:rPr lang="en-US" altLang="zh-CN" sz="2400" b="0" i="0" dirty="0">
+                  <a:solidFill>
+                    <a:srgbClr val="C578DD"/>
+                  </a:solidFill>
+                  <a:effectLst/>
+                  <a:latin typeface="FiraMono Nerd Font Medium" panose="020B0609050000020004" pitchFamily="49" charset="0"/>
+                  <a:ea typeface="FiraMono Nerd Font Medium" panose="020B0609050000020004" pitchFamily="49" charset="0"/>
+                </a:rPr>
+                <a:t>let</a:t>
+              </a:r>
+              <a:r>
+                <a:rPr lang="en-US" altLang="zh-CN" sz="2400" b="0" i="0" dirty="0">
+                  <a:solidFill>
+                    <a:srgbClr val="AAB1BF"/>
+                  </a:solidFill>
+                  <a:effectLst/>
+                  <a:latin typeface="FiraMono Nerd Font Medium" panose="020B0609050000020004" pitchFamily="49" charset="0"/>
+                  <a:ea typeface="FiraMono Nerd Font Medium" panose="020B0609050000020004" pitchFamily="49" charset="0"/>
+                </a:rPr>
+                <a:t> next </a:t>
+              </a:r>
+              <a:r>
+                <a:rPr lang="en-US" altLang="zh-CN" sz="2400" b="0" i="0" dirty="0">
+                  <a:solidFill>
+                    <a:srgbClr val="61AFEF"/>
+                  </a:solidFill>
+                  <a:effectLst/>
+                  <a:latin typeface="FiraMono Nerd Font Medium" panose="020B0609050000020004" pitchFamily="49" charset="0"/>
+                  <a:ea typeface="FiraMono Nerd Font Medium" panose="020B0609050000020004" pitchFamily="49" charset="0"/>
+                </a:rPr>
+                <a:t>=</a:t>
+              </a:r>
+              <a:r>
+                <a:rPr lang="en-US" altLang="zh-CN" sz="2400" b="0" i="0" dirty="0">
+                  <a:solidFill>
+                    <a:srgbClr val="AAB1BF"/>
+                  </a:solidFill>
+                  <a:effectLst/>
+                  <a:latin typeface="FiraMono Nerd Font Medium" panose="020B0609050000020004" pitchFamily="49" charset="0"/>
+                  <a:ea typeface="FiraMono Nerd Font Medium" panose="020B0609050000020004" pitchFamily="49" charset="0"/>
+                </a:rPr>
+                <a:t> a </a:t>
+              </a:r>
+              <a:r>
+                <a:rPr lang="en-US" altLang="zh-CN" sz="2400" b="0" i="0" dirty="0">
+                  <a:solidFill>
+                    <a:srgbClr val="61AFEF"/>
+                  </a:solidFill>
+                  <a:effectLst/>
+                  <a:latin typeface="FiraMono Nerd Font Medium" panose="020B0609050000020004" pitchFamily="49" charset="0"/>
+                  <a:ea typeface="FiraMono Nerd Font Medium" panose="020B0609050000020004" pitchFamily="49" charset="0"/>
+                </a:rPr>
+                <a:t>+</a:t>
+              </a:r>
+              <a:r>
+                <a:rPr lang="en-US" altLang="zh-CN" sz="2400" b="0" i="0" dirty="0">
+                  <a:solidFill>
+                    <a:srgbClr val="AAB1BF"/>
+                  </a:solidFill>
+                  <a:effectLst/>
+                  <a:latin typeface="FiraMono Nerd Font Medium" panose="020B0609050000020004" pitchFamily="49" charset="0"/>
+                  <a:ea typeface="FiraMono Nerd Font Medium" panose="020B0609050000020004" pitchFamily="49" charset="0"/>
+                </a:rPr>
+                <a:t> b;</a:t>
+              </a:r>
+              <a:br>
+                <a:rPr lang="en-US" altLang="zh-CN" sz="2400" dirty="0">
+                  <a:latin typeface="FiraMono Nerd Font Medium" panose="020B0609050000020004" pitchFamily="49" charset="0"/>
+                  <a:ea typeface="FiraMono Nerd Font Medium" panose="020B0609050000020004" pitchFamily="49" charset="0"/>
+                </a:rPr>
+              </a:br>
+              <a:r>
+                <a:rPr lang="en-US" altLang="zh-CN" sz="2400" b="0" i="0" dirty="0">
+                  <a:solidFill>
+                    <a:srgbClr val="AAB1BF"/>
+                  </a:solidFill>
+                  <a:effectLst/>
+                  <a:latin typeface="FiraMono Nerd Font Medium" panose="020B0609050000020004" pitchFamily="49" charset="0"/>
+                  <a:ea typeface="FiraMono Nerd Font Medium" panose="020B0609050000020004" pitchFamily="49" charset="0"/>
+                </a:rPr>
+                <a:t>        a </a:t>
+              </a:r>
+              <a:r>
+                <a:rPr lang="en-US" altLang="zh-CN" sz="2400" b="0" i="0" dirty="0">
+                  <a:solidFill>
+                    <a:srgbClr val="61AFEF"/>
+                  </a:solidFill>
+                  <a:effectLst/>
+                  <a:latin typeface="FiraMono Nerd Font Medium" panose="020B0609050000020004" pitchFamily="49" charset="0"/>
+                  <a:ea typeface="FiraMono Nerd Font Medium" panose="020B0609050000020004" pitchFamily="49" charset="0"/>
+                </a:rPr>
+                <a:t>=</a:t>
+              </a:r>
+              <a:r>
+                <a:rPr lang="en-US" altLang="zh-CN" sz="2400" b="0" i="0" dirty="0">
+                  <a:solidFill>
+                    <a:srgbClr val="AAB1BF"/>
+                  </a:solidFill>
+                  <a:effectLst/>
+                  <a:latin typeface="FiraMono Nerd Font Medium" panose="020B0609050000020004" pitchFamily="49" charset="0"/>
+                  <a:ea typeface="FiraMono Nerd Font Medium" panose="020B0609050000020004" pitchFamily="49" charset="0"/>
+                </a:rPr>
+                <a:t> b;</a:t>
+              </a:r>
+              <a:br>
+                <a:rPr lang="en-US" altLang="zh-CN" sz="2400" dirty="0">
+                  <a:latin typeface="FiraMono Nerd Font Medium" panose="020B0609050000020004" pitchFamily="49" charset="0"/>
+                  <a:ea typeface="FiraMono Nerd Font Medium" panose="020B0609050000020004" pitchFamily="49" charset="0"/>
+                </a:rPr>
+              </a:br>
+              <a:r>
+                <a:rPr lang="en-US" altLang="zh-CN" sz="2400" b="0" i="0" dirty="0">
+                  <a:solidFill>
+                    <a:srgbClr val="AAB1BF"/>
+                  </a:solidFill>
+                  <a:effectLst/>
+                  <a:latin typeface="FiraMono Nerd Font Medium" panose="020B0609050000020004" pitchFamily="49" charset="0"/>
+                  <a:ea typeface="FiraMono Nerd Font Medium" panose="020B0609050000020004" pitchFamily="49" charset="0"/>
+                </a:rPr>
+                <a:t>        b </a:t>
+              </a:r>
+              <a:r>
+                <a:rPr lang="en-US" altLang="zh-CN" sz="2400" b="0" i="0" dirty="0">
+                  <a:solidFill>
+                    <a:srgbClr val="61AFEF"/>
+                  </a:solidFill>
+                  <a:effectLst/>
+                  <a:latin typeface="FiraMono Nerd Font Medium" panose="020B0609050000020004" pitchFamily="49" charset="0"/>
+                  <a:ea typeface="FiraMono Nerd Font Medium" panose="020B0609050000020004" pitchFamily="49" charset="0"/>
+                </a:rPr>
+                <a:t>=</a:t>
+              </a:r>
+              <a:r>
+                <a:rPr lang="en-US" altLang="zh-CN" sz="2400" b="0" i="0" dirty="0">
+                  <a:solidFill>
+                    <a:srgbClr val="AAB1BF"/>
+                  </a:solidFill>
+                  <a:effectLst/>
+                  <a:latin typeface="FiraMono Nerd Font Medium" panose="020B0609050000020004" pitchFamily="49" charset="0"/>
+                  <a:ea typeface="FiraMono Nerd Font Medium" panose="020B0609050000020004" pitchFamily="49" charset="0"/>
+                </a:rPr>
+                <a:t> next;</a:t>
+              </a:r>
+              <a:br>
+                <a:rPr lang="en-US" altLang="zh-CN" sz="2400" dirty="0">
+                  <a:latin typeface="FiraMono Nerd Font Medium" panose="020B0609050000020004" pitchFamily="49" charset="0"/>
+                  <a:ea typeface="FiraMono Nerd Font Medium" panose="020B0609050000020004" pitchFamily="49" charset="0"/>
+                </a:rPr>
+              </a:br>
+              <a:r>
+                <a:rPr lang="en-US" altLang="zh-CN" sz="2400" b="0" i="0" dirty="0">
+                  <a:solidFill>
+                    <a:srgbClr val="AAB1BF"/>
+                  </a:solidFill>
+                  <a:effectLst/>
+                  <a:latin typeface="FiraMono Nerd Font Medium" panose="020B0609050000020004" pitchFamily="49" charset="0"/>
+                  <a:ea typeface="FiraMono Nerd Font Medium" panose="020B0609050000020004" pitchFamily="49" charset="0"/>
+                </a:rPr>
+                <a:t>    }</a:t>
+              </a:r>
+              <a:br>
+                <a:rPr lang="en-US" altLang="zh-CN" sz="2400" dirty="0">
+                  <a:latin typeface="FiraMono Nerd Font Medium" panose="020B0609050000020004" pitchFamily="49" charset="0"/>
+                  <a:ea typeface="FiraMono Nerd Font Medium" panose="020B0609050000020004" pitchFamily="49" charset="0"/>
+                </a:rPr>
+              </a:br>
+              <a:r>
+                <a:rPr lang="en-US" altLang="zh-CN" sz="2400" b="0" i="0" dirty="0">
+                  <a:solidFill>
+                    <a:srgbClr val="AAB1BF"/>
+                  </a:solidFill>
+                  <a:effectLst/>
+                  <a:latin typeface="FiraMono Nerd Font Medium" panose="020B0609050000020004" pitchFamily="49" charset="0"/>
+                  <a:ea typeface="FiraMono Nerd Font Medium" panose="020B0609050000020004" pitchFamily="49" charset="0"/>
+                </a:rPr>
+                <a:t>    b</a:t>
+              </a:r>
+              <a:br>
+                <a:rPr lang="en-US" altLang="zh-CN" sz="2400" dirty="0">
+                  <a:latin typeface="FiraMono Nerd Font Medium" panose="020B0609050000020004" pitchFamily="49" charset="0"/>
+                  <a:ea typeface="FiraMono Nerd Font Medium" panose="020B0609050000020004" pitchFamily="49" charset="0"/>
+                </a:rPr>
+              </a:br>
+              <a:r>
+                <a:rPr lang="en-US" altLang="zh-CN" sz="2400" b="0" i="0" dirty="0">
+                  <a:solidFill>
+                    <a:srgbClr val="AAB1BF"/>
+                  </a:solidFill>
+                  <a:effectLst/>
+                  <a:latin typeface="FiraMono Nerd Font Medium" panose="020B0609050000020004" pitchFamily="49" charset="0"/>
+                  <a:ea typeface="FiraMono Nerd Font Medium" panose="020B0609050000020004" pitchFamily="49" charset="0"/>
+                </a:rPr>
+                <a:t>}</a:t>
+              </a:r>
+              <a:endParaRPr lang="zh-CN" altLang="en-US" sz="2400" dirty="0">
+                <a:latin typeface="FiraMono Nerd Font Medium" panose="020B0609050000020004" pitchFamily="49" charset="0"/>
+              </a:endParaRPr>
+            </a:p>
+          </p:txBody>
+        </p:sp>
+        <p:pic>
+          <p:nvPicPr>
+            <p:cNvPr id="13" name="图片 12">
+              <a:extLst>
+                <a:ext uri="{FF2B5EF4-FFF2-40B4-BE49-F238E27FC236}">
+                  <a16:creationId xmlns:a16="http://schemas.microsoft.com/office/drawing/2014/main" id="{FCC0DA18-7001-959F-93B0-2F66ABC076FC}"/>
+                </a:ext>
+              </a:extLst>
+            </p:cNvPr>
+            <p:cNvPicPr>
+              <a:picLocks noChangeAspect="1"/>
+            </p:cNvPicPr>
+            <p:nvPr/>
+          </p:nvPicPr>
+          <p:blipFill>
+            <a:blip r:embed="rId3"/>
+            <a:stretch>
+              <a:fillRect/>
+            </a:stretch>
+          </p:blipFill>
+          <p:spPr>
+            <a:xfrm>
+              <a:off x="10695709" y="5287764"/>
+              <a:ext cx="609600" cy="609600"/>
+            </a:xfrm>
+            <a:prstGeom prst="rect">
+              <a:avLst/>
+            </a:prstGeom>
+          </p:spPr>
+        </p:pic>
+        <p:sp>
+          <p:nvSpPr>
+            <p:cNvPr id="17" name="文本框 16">
+              <a:extLst>
+                <a:ext uri="{FF2B5EF4-FFF2-40B4-BE49-F238E27FC236}">
+                  <a16:creationId xmlns:a16="http://schemas.microsoft.com/office/drawing/2014/main" id="{E707A838-F526-98E9-A1E2-17D47ECE072A}"/>
+                </a:ext>
+              </a:extLst>
+            </p:cNvPr>
+            <p:cNvSpPr txBox="1"/>
+            <p:nvPr/>
+          </p:nvSpPr>
+          <p:spPr>
+            <a:xfrm>
+              <a:off x="11207519" y="5287764"/>
+              <a:ext cx="500562" cy="297517"/>
+            </a:xfrm>
+            <a:prstGeom prst="rect">
+              <a:avLst/>
+            </a:prstGeom>
+            <a:noFill/>
+          </p:spPr>
+          <p:txBody>
+            <a:bodyPr wrap="square" rtlCol="0">
+              <a:spAutoFit/>
+            </a:bodyPr>
+            <a:lstStyle/>
+            <a:p>
+              <a:r>
+                <a:rPr lang="en-US" altLang="zh-CN" sz="2000" baseline="30000" dirty="0">
+                  <a:solidFill>
+                    <a:schemeClr val="bg1">
+                      <a:lumMod val="95000"/>
+                    </a:schemeClr>
+                  </a:solidFill>
+                  <a:latin typeface="得意黑" pitchFamily="50" charset="-122"/>
+                  <a:ea typeface="得意黑" pitchFamily="50" charset="-122"/>
+                </a:rPr>
+                <a:t>[2]</a:t>
+              </a:r>
+              <a:endParaRPr lang="zh-CN" altLang="en-US" sz="2000" baseline="30000" dirty="0">
+                <a:solidFill>
+                  <a:schemeClr val="bg1">
+                    <a:lumMod val="95000"/>
+                  </a:schemeClr>
+                </a:solidFill>
+                <a:latin typeface="得意黑" pitchFamily="50" charset="-122"/>
+                <a:ea typeface="得意黑" pitchFamily="50" charset="-122"/>
+              </a:endParaRPr>
+            </a:p>
+          </p:txBody>
+        </p:sp>
+      </p:grpSp>
+      <p:grpSp>
+        <p:nvGrpSpPr>
+          <p:cNvPr id="2" name="组合 1">
+            <a:extLst>
+              <a:ext uri="{FF2B5EF4-FFF2-40B4-BE49-F238E27FC236}">
+                <a16:creationId xmlns:a16="http://schemas.microsoft.com/office/drawing/2014/main" id="{1189B65A-6A0B-1292-1290-6F19C30FD012}"/>
+              </a:ext>
+            </a:extLst>
+          </p:cNvPr>
+          <p:cNvGrpSpPr/>
+          <p:nvPr/>
+        </p:nvGrpSpPr>
+        <p:grpSpPr>
+          <a:xfrm>
+            <a:off x="3314700" y="1806908"/>
+            <a:ext cx="5562600" cy="2677656"/>
+            <a:chOff x="402771" y="468085"/>
+            <a:chExt cx="5562600" cy="2677656"/>
+          </a:xfrm>
+        </p:grpSpPr>
+        <p:sp>
+          <p:nvSpPr>
+            <p:cNvPr id="4" name="矩形: 圆角 3">
+              <a:extLst>
+                <a:ext uri="{FF2B5EF4-FFF2-40B4-BE49-F238E27FC236}">
+                  <a16:creationId xmlns:a16="http://schemas.microsoft.com/office/drawing/2014/main" id="{B3A092DC-B74B-7095-53AD-5BFF826CD2EF}"/>
+                </a:ext>
+              </a:extLst>
+            </p:cNvPr>
+            <p:cNvSpPr/>
+            <p:nvPr/>
+          </p:nvSpPr>
+          <p:spPr>
+            <a:xfrm>
+              <a:off x="402771" y="468086"/>
+              <a:ext cx="5431973" cy="2667000"/>
+            </a:xfrm>
+            <a:prstGeom prst="roundRect">
+              <a:avLst/>
+            </a:prstGeom>
+            <a:solidFill>
+              <a:schemeClr val="tx1">
+                <a:lumMod val="85000"/>
+                <a:lumOff val="15000"/>
+              </a:schemeClr>
+            </a:solidFill>
+            <a:ln w="47625">
+              <a:solidFill>
+                <a:schemeClr val="tx1">
+                  <a:lumMod val="65000"/>
+                  <a:lumOff val="35000"/>
+                  <a:alpha val="99000"/>
+                </a:schemeClr>
+              </a:solidFill>
+              <a:prstDash val="lgDashDot"/>
+            </a:ln>
+          </p:spPr>
+          <p:style>
+            <a:lnRef idx="2">
+              <a:schemeClr val="accent1">
+                <a:shade val="15000"/>
+              </a:schemeClr>
+            </a:lnRef>
+            <a:fillRef idx="1">
+              <a:schemeClr val="accent1"/>
+            </a:fillRef>
+            <a:effectRef idx="0">
+              <a:schemeClr val="accent1"/>
+            </a:effectRef>
+            <a:fontRef idx="minor">
+              <a:schemeClr val="lt1"/>
+            </a:fontRef>
+          </p:style>
+          <p:txBody>
+            <a:bodyPr rtlCol="0" anchor="ctr"/>
+            <a:lstStyle/>
+            <a:p>
+              <a:pPr algn="ctr"/>
+              <a:endParaRPr lang="zh-CN" altLang="en-US" dirty="0"/>
+            </a:p>
+          </p:txBody>
+        </p:sp>
+        <p:pic>
+          <p:nvPicPr>
+            <p:cNvPr id="6" name="图片 5">
+              <a:extLst>
+                <a:ext uri="{FF2B5EF4-FFF2-40B4-BE49-F238E27FC236}">
+                  <a16:creationId xmlns:a16="http://schemas.microsoft.com/office/drawing/2014/main" id="{B3789878-43FF-01EF-5AC5-8588E59BE2CE}"/>
+                </a:ext>
+              </a:extLst>
+            </p:cNvPr>
+            <p:cNvPicPr>
+              <a:picLocks noChangeAspect="1"/>
+            </p:cNvPicPr>
+            <p:nvPr/>
+          </p:nvPicPr>
+          <p:blipFill>
+            <a:blip r:embed="rId4"/>
+            <a:stretch>
+              <a:fillRect/>
+            </a:stretch>
+          </p:blipFill>
+          <p:spPr>
+            <a:xfrm>
+              <a:off x="4416878" y="960636"/>
+              <a:ext cx="609600" cy="609600"/>
+            </a:xfrm>
+            <a:prstGeom prst="rect">
+              <a:avLst/>
+            </a:prstGeom>
+          </p:spPr>
+        </p:pic>
+        <p:sp>
+          <p:nvSpPr>
+            <p:cNvPr id="3" name="文本框 2">
+              <a:extLst>
+                <a:ext uri="{FF2B5EF4-FFF2-40B4-BE49-F238E27FC236}">
+                  <a16:creationId xmlns:a16="http://schemas.microsoft.com/office/drawing/2014/main" id="{B15181D3-FF31-A968-330B-3507EF94B3D0}"/>
+                </a:ext>
+              </a:extLst>
+            </p:cNvPr>
+            <p:cNvSpPr txBox="1"/>
+            <p:nvPr/>
+          </p:nvSpPr>
+          <p:spPr>
+            <a:xfrm>
+              <a:off x="457200" y="468085"/>
+              <a:ext cx="5508171" cy="2677656"/>
+            </a:xfrm>
+            <a:prstGeom prst="rect">
+              <a:avLst/>
+            </a:prstGeom>
+            <a:noFill/>
+            <a:ln>
+              <a:noFill/>
+            </a:ln>
+          </p:spPr>
+          <p:txBody>
+            <a:bodyPr wrap="square">
+              <a:spAutoFit/>
+            </a:bodyPr>
+            <a:lstStyle/>
+            <a:p>
+              <a:r>
+                <a:rPr lang="en-US" altLang="zh-CN" sz="2400" b="0" i="0" dirty="0">
+                  <a:solidFill>
+                    <a:srgbClr val="C578DD"/>
+                  </a:solidFill>
+                  <a:effectLst/>
+                  <a:latin typeface="FiraMono Nerd Font Medium" panose="020B0609050000020004" pitchFamily="49" charset="0"/>
+                  <a:ea typeface="FiraMono Nerd Font Medium" panose="020B0609050000020004" pitchFamily="49" charset="0"/>
+                </a:rPr>
+                <a:t>def</a:t>
+              </a:r>
+              <a:r>
+                <a:rPr lang="en-US" altLang="zh-CN" sz="2400" b="0" i="0" dirty="0">
+                  <a:solidFill>
+                    <a:srgbClr val="AAB1BF"/>
+                  </a:solidFill>
+                  <a:effectLst/>
+                  <a:latin typeface="FiraMono Nerd Font Medium" panose="020B0609050000020004" pitchFamily="49" charset="0"/>
+                  <a:ea typeface="FiraMono Nerd Font Medium" panose="020B0609050000020004" pitchFamily="49" charset="0"/>
+                </a:rPr>
+                <a:t> </a:t>
+              </a:r>
+              <a:r>
+                <a:rPr lang="en-US" altLang="zh-CN" sz="2400" b="0" i="0" dirty="0">
+                  <a:solidFill>
+                    <a:srgbClr val="61AFEF"/>
+                  </a:solidFill>
+                  <a:effectLst/>
+                  <a:latin typeface="FiraMono Nerd Font Medium" panose="020B0609050000020004" pitchFamily="49" charset="0"/>
+                  <a:ea typeface="FiraMono Nerd Font Medium" panose="020B0609050000020004" pitchFamily="49" charset="0"/>
+                </a:rPr>
+                <a:t>fibonacci</a:t>
+              </a:r>
+              <a:r>
+                <a:rPr lang="en-US" altLang="zh-CN" sz="2400" b="0" i="0" dirty="0">
+                  <a:solidFill>
+                    <a:srgbClr val="AAB1BF"/>
+                  </a:solidFill>
+                  <a:effectLst/>
+                  <a:latin typeface="FiraMono Nerd Font Medium" panose="020B0609050000020004" pitchFamily="49" charset="0"/>
+                  <a:ea typeface="FiraMono Nerd Font Medium" panose="020B0609050000020004" pitchFamily="49" charset="0"/>
+                </a:rPr>
+                <a:t>(n):</a:t>
+              </a:r>
+              <a:br>
+                <a:rPr lang="en-US" altLang="zh-CN" sz="2400" dirty="0">
+                  <a:latin typeface="FiraMono Nerd Font Medium" panose="020B0609050000020004" pitchFamily="49" charset="0"/>
+                  <a:ea typeface="FiraMono Nerd Font Medium" panose="020B0609050000020004" pitchFamily="49" charset="0"/>
+                </a:rPr>
+              </a:br>
+              <a:r>
+                <a:rPr lang="en-US" altLang="zh-CN" sz="2400" b="0" i="0" dirty="0">
+                  <a:solidFill>
+                    <a:srgbClr val="AAB1BF"/>
+                  </a:solidFill>
+                  <a:effectLst/>
+                  <a:latin typeface="FiraMono Nerd Font Medium" panose="020B0609050000020004" pitchFamily="49" charset="0"/>
+                  <a:ea typeface="FiraMono Nerd Font Medium" panose="020B0609050000020004" pitchFamily="49" charset="0"/>
+                </a:rPr>
+                <a:t>    </a:t>
+              </a:r>
+              <a:r>
+                <a:rPr lang="en-US" altLang="zh-CN" sz="2400" b="0" i="0" dirty="0">
+                  <a:solidFill>
+                    <a:srgbClr val="C578DD"/>
+                  </a:solidFill>
+                  <a:effectLst/>
+                  <a:latin typeface="FiraMono Nerd Font Medium" panose="020B0609050000020004" pitchFamily="49" charset="0"/>
+                  <a:ea typeface="FiraMono Nerd Font Medium" panose="020B0609050000020004" pitchFamily="49" charset="0"/>
+                </a:rPr>
+                <a:t>if</a:t>
+              </a:r>
+              <a:r>
+                <a:rPr lang="en-US" altLang="zh-CN" sz="2400" b="0" i="0" dirty="0">
+                  <a:solidFill>
+                    <a:srgbClr val="AAB1BF"/>
+                  </a:solidFill>
+                  <a:effectLst/>
+                  <a:latin typeface="FiraMono Nerd Font Medium" panose="020B0609050000020004" pitchFamily="49" charset="0"/>
+                  <a:ea typeface="FiraMono Nerd Font Medium" panose="020B0609050000020004" pitchFamily="49" charset="0"/>
+                </a:rPr>
+                <a:t> n </a:t>
+              </a:r>
+              <a:r>
+                <a:rPr lang="en-US" altLang="zh-CN" sz="2400" b="0" i="0" dirty="0">
+                  <a:solidFill>
+                    <a:srgbClr val="61AFEF"/>
+                  </a:solidFill>
+                  <a:effectLst/>
+                  <a:latin typeface="FiraMono Nerd Font Medium" panose="020B0609050000020004" pitchFamily="49" charset="0"/>
+                  <a:ea typeface="FiraMono Nerd Font Medium" panose="020B0609050000020004" pitchFamily="49" charset="0"/>
+                </a:rPr>
+                <a:t>&lt;=</a:t>
+              </a:r>
+              <a:r>
+                <a:rPr lang="en-US" altLang="zh-CN" sz="2400" b="0" i="0" dirty="0">
+                  <a:solidFill>
+                    <a:srgbClr val="AAB1BF"/>
+                  </a:solidFill>
+                  <a:effectLst/>
+                  <a:latin typeface="FiraMono Nerd Font Medium" panose="020B0609050000020004" pitchFamily="49" charset="0"/>
+                  <a:ea typeface="FiraMono Nerd Font Medium" panose="020B0609050000020004" pitchFamily="49" charset="0"/>
+                </a:rPr>
+                <a:t> </a:t>
+              </a:r>
+              <a:r>
+                <a:rPr lang="en-US" altLang="zh-CN" sz="2400" b="0" i="0" dirty="0">
+                  <a:solidFill>
+                    <a:srgbClr val="D19965"/>
+                  </a:solidFill>
+                  <a:effectLst/>
+                  <a:latin typeface="FiraMono Nerd Font Medium" panose="020B0609050000020004" pitchFamily="49" charset="0"/>
+                  <a:ea typeface="FiraMono Nerd Font Medium" panose="020B0609050000020004" pitchFamily="49" charset="0"/>
+                </a:rPr>
+                <a:t>1</a:t>
+              </a:r>
+              <a:r>
+                <a:rPr lang="en-US" altLang="zh-CN" sz="2400" b="0" i="0" dirty="0">
+                  <a:solidFill>
+                    <a:srgbClr val="AAB1BF"/>
+                  </a:solidFill>
+                  <a:effectLst/>
+                  <a:latin typeface="FiraMono Nerd Font Medium" panose="020B0609050000020004" pitchFamily="49" charset="0"/>
+                  <a:ea typeface="FiraMono Nerd Font Medium" panose="020B0609050000020004" pitchFamily="49" charset="0"/>
+                </a:rPr>
+                <a:t>:</a:t>
+              </a:r>
+              <a:br>
+                <a:rPr lang="en-US" altLang="zh-CN" sz="2400" dirty="0">
+                  <a:latin typeface="FiraMono Nerd Font Medium" panose="020B0609050000020004" pitchFamily="49" charset="0"/>
+                  <a:ea typeface="FiraMono Nerd Font Medium" panose="020B0609050000020004" pitchFamily="49" charset="0"/>
+                </a:rPr>
+              </a:br>
+              <a:r>
+                <a:rPr lang="en-US" altLang="zh-CN" sz="2400" b="0" i="0" dirty="0">
+                  <a:solidFill>
+                    <a:srgbClr val="AAB1BF"/>
+                  </a:solidFill>
+                  <a:effectLst/>
+                  <a:latin typeface="FiraMono Nerd Font Medium" panose="020B0609050000020004" pitchFamily="49" charset="0"/>
+                  <a:ea typeface="FiraMono Nerd Font Medium" panose="020B0609050000020004" pitchFamily="49" charset="0"/>
+                </a:rPr>
+                <a:t>        </a:t>
+              </a:r>
+              <a:r>
+                <a:rPr lang="en-US" altLang="zh-CN" sz="2400" b="0" i="0" dirty="0">
+                  <a:solidFill>
+                    <a:srgbClr val="C578DD"/>
+                  </a:solidFill>
+                  <a:effectLst/>
+                  <a:latin typeface="FiraMono Nerd Font Medium" panose="020B0609050000020004" pitchFamily="49" charset="0"/>
+                  <a:ea typeface="FiraMono Nerd Font Medium" panose="020B0609050000020004" pitchFamily="49" charset="0"/>
+                </a:rPr>
+                <a:t>return</a:t>
+              </a:r>
+              <a:r>
+                <a:rPr lang="en-US" altLang="zh-CN" sz="2400" b="0" i="0" dirty="0">
+                  <a:solidFill>
+                    <a:srgbClr val="AAB1BF"/>
+                  </a:solidFill>
+                  <a:effectLst/>
+                  <a:latin typeface="FiraMono Nerd Font Medium" panose="020B0609050000020004" pitchFamily="49" charset="0"/>
+                  <a:ea typeface="FiraMono Nerd Font Medium" panose="020B0609050000020004" pitchFamily="49" charset="0"/>
+                </a:rPr>
+                <a:t> n</a:t>
+              </a:r>
+              <a:br>
+                <a:rPr lang="en-US" altLang="zh-CN" sz="2400" dirty="0">
+                  <a:latin typeface="FiraMono Nerd Font Medium" panose="020B0609050000020004" pitchFamily="49" charset="0"/>
+                  <a:ea typeface="FiraMono Nerd Font Medium" panose="020B0609050000020004" pitchFamily="49" charset="0"/>
+                </a:rPr>
+              </a:br>
+              <a:r>
+                <a:rPr lang="en-US" altLang="zh-CN" sz="2400" b="0" i="0" dirty="0">
+                  <a:solidFill>
+                    <a:srgbClr val="AAB1BF"/>
+                  </a:solidFill>
+                  <a:effectLst/>
+                  <a:latin typeface="FiraMono Nerd Font Medium" panose="020B0609050000020004" pitchFamily="49" charset="0"/>
+                  <a:ea typeface="FiraMono Nerd Font Medium" panose="020B0609050000020004" pitchFamily="49" charset="0"/>
+                </a:rPr>
+                <a:t>    a, b </a:t>
+              </a:r>
+              <a:r>
+                <a:rPr lang="en-US" altLang="zh-CN" sz="2400" b="0" i="0" dirty="0">
+                  <a:solidFill>
+                    <a:srgbClr val="61AFEF"/>
+                  </a:solidFill>
+                  <a:effectLst/>
+                  <a:latin typeface="FiraMono Nerd Font Medium" panose="020B0609050000020004" pitchFamily="49" charset="0"/>
+                  <a:ea typeface="FiraMono Nerd Font Medium" panose="020B0609050000020004" pitchFamily="49" charset="0"/>
+                </a:rPr>
+                <a:t>=</a:t>
+              </a:r>
+              <a:r>
+                <a:rPr lang="en-US" altLang="zh-CN" sz="2400" b="0" i="0" dirty="0">
+                  <a:solidFill>
+                    <a:srgbClr val="AAB1BF"/>
+                  </a:solidFill>
+                  <a:effectLst/>
+                  <a:latin typeface="FiraMono Nerd Font Medium" panose="020B0609050000020004" pitchFamily="49" charset="0"/>
+                  <a:ea typeface="FiraMono Nerd Font Medium" panose="020B0609050000020004" pitchFamily="49" charset="0"/>
+                </a:rPr>
+                <a:t> </a:t>
+              </a:r>
+              <a:r>
+                <a:rPr lang="en-US" altLang="zh-CN" sz="2400" b="0" i="0" dirty="0">
+                  <a:solidFill>
+                    <a:srgbClr val="D19965"/>
+                  </a:solidFill>
+                  <a:effectLst/>
+                  <a:latin typeface="FiraMono Nerd Font Medium" panose="020B0609050000020004" pitchFamily="49" charset="0"/>
+                  <a:ea typeface="FiraMono Nerd Font Medium" panose="020B0609050000020004" pitchFamily="49" charset="0"/>
+                </a:rPr>
+                <a:t>0</a:t>
+              </a:r>
+              <a:r>
+                <a:rPr lang="en-US" altLang="zh-CN" sz="2400" b="0" i="0" dirty="0">
+                  <a:solidFill>
+                    <a:srgbClr val="AAB1BF"/>
+                  </a:solidFill>
+                  <a:effectLst/>
+                  <a:latin typeface="FiraMono Nerd Font Medium" panose="020B0609050000020004" pitchFamily="49" charset="0"/>
+                  <a:ea typeface="FiraMono Nerd Font Medium" panose="020B0609050000020004" pitchFamily="49" charset="0"/>
+                </a:rPr>
+                <a:t>, </a:t>
+              </a:r>
+              <a:r>
+                <a:rPr lang="en-US" altLang="zh-CN" sz="2400" b="0" i="0" dirty="0">
+                  <a:solidFill>
+                    <a:srgbClr val="D19965"/>
+                  </a:solidFill>
+                  <a:effectLst/>
+                  <a:latin typeface="FiraMono Nerd Font Medium" panose="020B0609050000020004" pitchFamily="49" charset="0"/>
+                  <a:ea typeface="FiraMono Nerd Font Medium" panose="020B0609050000020004" pitchFamily="49" charset="0"/>
+                </a:rPr>
+                <a:t>1</a:t>
+              </a:r>
+              <a:br>
+                <a:rPr lang="en-US" altLang="zh-CN" sz="2400" dirty="0">
+                  <a:latin typeface="FiraMono Nerd Font Medium" panose="020B0609050000020004" pitchFamily="49" charset="0"/>
+                  <a:ea typeface="FiraMono Nerd Font Medium" panose="020B0609050000020004" pitchFamily="49" charset="0"/>
+                </a:rPr>
+              </a:br>
+              <a:r>
+                <a:rPr lang="en-US" altLang="zh-CN" sz="2400" b="0" i="0" dirty="0">
+                  <a:solidFill>
+                    <a:srgbClr val="AAB1BF"/>
+                  </a:solidFill>
+                  <a:effectLst/>
+                  <a:latin typeface="FiraMono Nerd Font Medium" panose="020B0609050000020004" pitchFamily="49" charset="0"/>
+                  <a:ea typeface="FiraMono Nerd Font Medium" panose="020B0609050000020004" pitchFamily="49" charset="0"/>
+                </a:rPr>
+                <a:t>    </a:t>
+              </a:r>
+              <a:r>
+                <a:rPr lang="en-US" altLang="zh-CN" sz="2400" b="0" i="0" dirty="0">
+                  <a:solidFill>
+                    <a:srgbClr val="C578DD"/>
+                  </a:solidFill>
+                  <a:effectLst/>
+                  <a:latin typeface="FiraMono Nerd Font Medium" panose="020B0609050000020004" pitchFamily="49" charset="0"/>
+                  <a:ea typeface="FiraMono Nerd Font Medium" panose="020B0609050000020004" pitchFamily="49" charset="0"/>
+                </a:rPr>
+                <a:t>for</a:t>
+              </a:r>
+              <a:r>
+                <a:rPr lang="en-US" altLang="zh-CN" sz="2400" b="0" i="0" dirty="0">
+                  <a:solidFill>
+                    <a:srgbClr val="AAB1BF"/>
+                  </a:solidFill>
+                  <a:effectLst/>
+                  <a:latin typeface="FiraMono Nerd Font Medium" panose="020B0609050000020004" pitchFamily="49" charset="0"/>
+                  <a:ea typeface="FiraMono Nerd Font Medium" panose="020B0609050000020004" pitchFamily="49" charset="0"/>
+                </a:rPr>
+                <a:t> _ </a:t>
+              </a:r>
+              <a:r>
+                <a:rPr lang="en-US" altLang="zh-CN" sz="2400" b="0" i="0" dirty="0">
+                  <a:solidFill>
+                    <a:srgbClr val="C578DD"/>
+                  </a:solidFill>
+                  <a:effectLst/>
+                  <a:latin typeface="FiraMono Nerd Font Medium" panose="020B0609050000020004" pitchFamily="49" charset="0"/>
+                  <a:ea typeface="FiraMono Nerd Font Medium" panose="020B0609050000020004" pitchFamily="49" charset="0"/>
+                </a:rPr>
+                <a:t>in</a:t>
+              </a:r>
+              <a:r>
+                <a:rPr lang="en-US" altLang="zh-CN" sz="2400" b="0" i="0" dirty="0">
+                  <a:solidFill>
+                    <a:srgbClr val="AAB1BF"/>
+                  </a:solidFill>
+                  <a:effectLst/>
+                  <a:latin typeface="FiraMono Nerd Font Medium" panose="020B0609050000020004" pitchFamily="49" charset="0"/>
+                  <a:ea typeface="FiraMono Nerd Font Medium" panose="020B0609050000020004" pitchFamily="49" charset="0"/>
+                </a:rPr>
+                <a:t> </a:t>
+              </a:r>
+              <a:r>
+                <a:rPr lang="en-US" altLang="zh-CN" sz="2400" b="0" i="0" dirty="0">
+                  <a:solidFill>
+                    <a:srgbClr val="97C279"/>
+                  </a:solidFill>
+                  <a:effectLst/>
+                  <a:latin typeface="FiraMono Nerd Font Medium" panose="020B0609050000020004" pitchFamily="49" charset="0"/>
+                  <a:ea typeface="FiraMono Nerd Font Medium" panose="020B0609050000020004" pitchFamily="49" charset="0"/>
+                </a:rPr>
+                <a:t>range</a:t>
+              </a:r>
+              <a:r>
+                <a:rPr lang="en-US" altLang="zh-CN" sz="2400" b="0" i="0" dirty="0">
+                  <a:solidFill>
+                    <a:srgbClr val="AAB1BF"/>
+                  </a:solidFill>
+                  <a:effectLst/>
+                  <a:latin typeface="FiraMono Nerd Font Medium" panose="020B0609050000020004" pitchFamily="49" charset="0"/>
+                  <a:ea typeface="FiraMono Nerd Font Medium" panose="020B0609050000020004" pitchFamily="49" charset="0"/>
+                </a:rPr>
+                <a:t>(</a:t>
+              </a:r>
+              <a:r>
+                <a:rPr lang="en-US" altLang="zh-CN" sz="2400" b="0" i="0" dirty="0">
+                  <a:solidFill>
+                    <a:srgbClr val="D19965"/>
+                  </a:solidFill>
+                  <a:effectLst/>
+                  <a:latin typeface="FiraMono Nerd Font Medium" panose="020B0609050000020004" pitchFamily="49" charset="0"/>
+                  <a:ea typeface="FiraMono Nerd Font Medium" panose="020B0609050000020004" pitchFamily="49" charset="0"/>
+                </a:rPr>
+                <a:t>2</a:t>
+              </a:r>
+              <a:r>
+                <a:rPr lang="en-US" altLang="zh-CN" sz="2400" b="0" i="0" dirty="0">
+                  <a:solidFill>
+                    <a:srgbClr val="AAB1BF"/>
+                  </a:solidFill>
+                  <a:effectLst/>
+                  <a:latin typeface="FiraMono Nerd Font Medium" panose="020B0609050000020004" pitchFamily="49" charset="0"/>
+                  <a:ea typeface="FiraMono Nerd Font Medium" panose="020B0609050000020004" pitchFamily="49" charset="0"/>
+                </a:rPr>
+                <a:t>, n </a:t>
+              </a:r>
+              <a:r>
+                <a:rPr lang="en-US" altLang="zh-CN" sz="2400" b="0" i="0" dirty="0">
+                  <a:solidFill>
+                    <a:srgbClr val="61AFEF"/>
+                  </a:solidFill>
+                  <a:effectLst/>
+                  <a:latin typeface="FiraMono Nerd Font Medium" panose="020B0609050000020004" pitchFamily="49" charset="0"/>
+                  <a:ea typeface="FiraMono Nerd Font Medium" panose="020B0609050000020004" pitchFamily="49" charset="0"/>
+                </a:rPr>
+                <a:t>+</a:t>
+              </a:r>
+              <a:r>
+                <a:rPr lang="en-US" altLang="zh-CN" sz="2400" b="0" i="0" dirty="0">
+                  <a:solidFill>
+                    <a:srgbClr val="AAB1BF"/>
+                  </a:solidFill>
+                  <a:effectLst/>
+                  <a:latin typeface="FiraMono Nerd Font Medium" panose="020B0609050000020004" pitchFamily="49" charset="0"/>
+                  <a:ea typeface="FiraMono Nerd Font Medium" panose="020B0609050000020004" pitchFamily="49" charset="0"/>
+                </a:rPr>
+                <a:t> </a:t>
+              </a:r>
+              <a:r>
+                <a:rPr lang="en-US" altLang="zh-CN" sz="2400" b="0" i="0" dirty="0">
+                  <a:solidFill>
+                    <a:srgbClr val="D19965"/>
+                  </a:solidFill>
+                  <a:effectLst/>
+                  <a:latin typeface="FiraMono Nerd Font Medium" panose="020B0609050000020004" pitchFamily="49" charset="0"/>
+                  <a:ea typeface="FiraMono Nerd Font Medium" panose="020B0609050000020004" pitchFamily="49" charset="0"/>
+                </a:rPr>
+                <a:t>1</a:t>
+              </a:r>
+              <a:r>
+                <a:rPr lang="en-US" altLang="zh-CN" sz="2400" b="0" i="0" dirty="0">
+                  <a:solidFill>
+                    <a:srgbClr val="AAB1BF"/>
+                  </a:solidFill>
+                  <a:effectLst/>
+                  <a:latin typeface="FiraMono Nerd Font Medium" panose="020B0609050000020004" pitchFamily="49" charset="0"/>
+                  <a:ea typeface="FiraMono Nerd Font Medium" panose="020B0609050000020004" pitchFamily="49" charset="0"/>
+                </a:rPr>
+                <a:t>):</a:t>
+              </a:r>
+              <a:br>
+                <a:rPr lang="en-US" altLang="zh-CN" sz="2400" dirty="0">
+                  <a:latin typeface="FiraMono Nerd Font Medium" panose="020B0609050000020004" pitchFamily="49" charset="0"/>
+                  <a:ea typeface="FiraMono Nerd Font Medium" panose="020B0609050000020004" pitchFamily="49" charset="0"/>
+                </a:rPr>
+              </a:br>
+              <a:r>
+                <a:rPr lang="en-US" altLang="zh-CN" sz="2400" b="0" i="0" dirty="0">
+                  <a:solidFill>
+                    <a:srgbClr val="AAB1BF"/>
+                  </a:solidFill>
+                  <a:effectLst/>
+                  <a:latin typeface="FiraMono Nerd Font Medium" panose="020B0609050000020004" pitchFamily="49" charset="0"/>
+                  <a:ea typeface="FiraMono Nerd Font Medium" panose="020B0609050000020004" pitchFamily="49" charset="0"/>
+                </a:rPr>
+                <a:t>        a, b </a:t>
+              </a:r>
+              <a:r>
+                <a:rPr lang="en-US" altLang="zh-CN" sz="2400" b="0" i="0" dirty="0">
+                  <a:solidFill>
+                    <a:srgbClr val="61AFEF"/>
+                  </a:solidFill>
+                  <a:effectLst/>
+                  <a:latin typeface="FiraMono Nerd Font Medium" panose="020B0609050000020004" pitchFamily="49" charset="0"/>
+                  <a:ea typeface="FiraMono Nerd Font Medium" panose="020B0609050000020004" pitchFamily="49" charset="0"/>
+                </a:rPr>
+                <a:t>=</a:t>
+              </a:r>
+              <a:r>
+                <a:rPr lang="en-US" altLang="zh-CN" sz="2400" b="0" i="0" dirty="0">
+                  <a:solidFill>
+                    <a:srgbClr val="AAB1BF"/>
+                  </a:solidFill>
+                  <a:effectLst/>
+                  <a:latin typeface="FiraMono Nerd Font Medium" panose="020B0609050000020004" pitchFamily="49" charset="0"/>
+                  <a:ea typeface="FiraMono Nerd Font Medium" panose="020B0609050000020004" pitchFamily="49" charset="0"/>
+                </a:rPr>
+                <a:t> b, a </a:t>
+              </a:r>
+              <a:r>
+                <a:rPr lang="en-US" altLang="zh-CN" sz="2400" b="0" i="0" dirty="0">
+                  <a:solidFill>
+                    <a:srgbClr val="61AFEF"/>
+                  </a:solidFill>
+                  <a:effectLst/>
+                  <a:latin typeface="FiraMono Nerd Font Medium" panose="020B0609050000020004" pitchFamily="49" charset="0"/>
+                  <a:ea typeface="FiraMono Nerd Font Medium" panose="020B0609050000020004" pitchFamily="49" charset="0"/>
+                </a:rPr>
+                <a:t>+</a:t>
+              </a:r>
+              <a:r>
+                <a:rPr lang="en-US" altLang="zh-CN" sz="2400" b="0" i="0" dirty="0">
+                  <a:solidFill>
+                    <a:srgbClr val="AAB1BF"/>
+                  </a:solidFill>
+                  <a:effectLst/>
+                  <a:latin typeface="FiraMono Nerd Font Medium" panose="020B0609050000020004" pitchFamily="49" charset="0"/>
+                  <a:ea typeface="FiraMono Nerd Font Medium" panose="020B0609050000020004" pitchFamily="49" charset="0"/>
+                </a:rPr>
+                <a:t> b</a:t>
+              </a:r>
+              <a:br>
+                <a:rPr lang="en-US" altLang="zh-CN" sz="2400" dirty="0">
+                  <a:latin typeface="FiraMono Nerd Font Medium" panose="020B0609050000020004" pitchFamily="49" charset="0"/>
+                  <a:ea typeface="FiraMono Nerd Font Medium" panose="020B0609050000020004" pitchFamily="49" charset="0"/>
+                </a:rPr>
+              </a:br>
+              <a:r>
+                <a:rPr lang="en-US" altLang="zh-CN" sz="2400" b="0" i="0" dirty="0">
+                  <a:solidFill>
+                    <a:srgbClr val="AAB1BF"/>
+                  </a:solidFill>
+                  <a:effectLst/>
+                  <a:latin typeface="FiraMono Nerd Font Medium" panose="020B0609050000020004" pitchFamily="49" charset="0"/>
+                  <a:ea typeface="FiraMono Nerd Font Medium" panose="020B0609050000020004" pitchFamily="49" charset="0"/>
+                </a:rPr>
+                <a:t>    </a:t>
+              </a:r>
+              <a:r>
+                <a:rPr lang="en-US" altLang="zh-CN" sz="2400" b="0" i="0" dirty="0">
+                  <a:solidFill>
+                    <a:srgbClr val="C578DD"/>
+                  </a:solidFill>
+                  <a:effectLst/>
+                  <a:latin typeface="FiraMono Nerd Font Medium" panose="020B0609050000020004" pitchFamily="49" charset="0"/>
+                  <a:ea typeface="FiraMono Nerd Font Medium" panose="020B0609050000020004" pitchFamily="49" charset="0"/>
+                </a:rPr>
+                <a:t>return</a:t>
+              </a:r>
+              <a:r>
+                <a:rPr lang="en-US" altLang="zh-CN" sz="2400" b="0" i="0" dirty="0">
+                  <a:solidFill>
+                    <a:srgbClr val="AAB1BF"/>
+                  </a:solidFill>
+                  <a:effectLst/>
+                  <a:latin typeface="FiraMono Nerd Font Medium" panose="020B0609050000020004" pitchFamily="49" charset="0"/>
+                  <a:ea typeface="FiraMono Nerd Font Medium" panose="020B0609050000020004" pitchFamily="49" charset="0"/>
+                </a:rPr>
+                <a:t> b</a:t>
+              </a:r>
+              <a:endParaRPr lang="zh-CN" altLang="en-US" sz="2400" dirty="0">
+                <a:latin typeface="FiraMono Nerd Font Medium" panose="020B0609050000020004" pitchFamily="49" charset="0"/>
+              </a:endParaRPr>
+            </a:p>
+          </p:txBody>
+        </p:sp>
+        <p:sp>
+          <p:nvSpPr>
+            <p:cNvPr id="14" name="文本框 13">
+              <a:extLst>
+                <a:ext uri="{FF2B5EF4-FFF2-40B4-BE49-F238E27FC236}">
+                  <a16:creationId xmlns:a16="http://schemas.microsoft.com/office/drawing/2014/main" id="{2CCB7684-A656-6143-E00B-609FBE5F51F2}"/>
+                </a:ext>
+              </a:extLst>
+            </p:cNvPr>
+            <p:cNvSpPr txBox="1"/>
+            <p:nvPr/>
+          </p:nvSpPr>
+          <p:spPr>
+            <a:xfrm>
+              <a:off x="4833438" y="823023"/>
+              <a:ext cx="386080" cy="297517"/>
+            </a:xfrm>
+            <a:prstGeom prst="rect">
+              <a:avLst/>
+            </a:prstGeom>
+            <a:noFill/>
+          </p:spPr>
+          <p:txBody>
+            <a:bodyPr wrap="square" rtlCol="0">
+              <a:spAutoFit/>
+            </a:bodyPr>
+            <a:lstStyle/>
+            <a:p>
+              <a:r>
+                <a:rPr lang="en-US" altLang="zh-CN" sz="2000" baseline="30000" dirty="0">
+                  <a:solidFill>
+                    <a:schemeClr val="bg1">
+                      <a:lumMod val="95000"/>
+                    </a:schemeClr>
+                  </a:solidFill>
+                  <a:latin typeface="得意黑" pitchFamily="50" charset="-122"/>
+                  <a:ea typeface="得意黑" pitchFamily="50" charset="-122"/>
+                </a:rPr>
+                <a:t>[1]</a:t>
+              </a:r>
+              <a:endParaRPr lang="zh-CN" altLang="en-US" sz="2000" baseline="30000" dirty="0">
+                <a:solidFill>
+                  <a:schemeClr val="bg1">
+                    <a:lumMod val="95000"/>
+                  </a:schemeClr>
+                </a:solidFill>
+                <a:latin typeface="得意黑" pitchFamily="50" charset="-122"/>
+                <a:ea typeface="得意黑" pitchFamily="50" charset="-122"/>
+              </a:endParaRPr>
+            </a:p>
+          </p:txBody>
+        </p:sp>
+      </p:grpSp>
+      <p:grpSp>
+        <p:nvGrpSpPr>
+          <p:cNvPr id="18" name="组合 17">
+            <a:extLst>
+              <a:ext uri="{FF2B5EF4-FFF2-40B4-BE49-F238E27FC236}">
+                <a16:creationId xmlns:a16="http://schemas.microsoft.com/office/drawing/2014/main" id="{5C0D391C-F10B-2678-8AAD-D13F4CF03672}"/>
+              </a:ext>
+            </a:extLst>
+          </p:cNvPr>
+          <p:cNvGrpSpPr/>
+          <p:nvPr/>
+        </p:nvGrpSpPr>
+        <p:grpSpPr>
+          <a:xfrm>
+            <a:off x="5403214" y="2060409"/>
+            <a:ext cx="1440000" cy="2160000"/>
+            <a:chOff x="945717" y="4157223"/>
+            <a:chExt cx="1440000" cy="2160000"/>
+          </a:xfrm>
+        </p:grpSpPr>
+        <p:sp>
+          <p:nvSpPr>
+            <p:cNvPr id="12" name="矩形: 折角 11">
+              <a:extLst>
+                <a:ext uri="{FF2B5EF4-FFF2-40B4-BE49-F238E27FC236}">
+                  <a16:creationId xmlns:a16="http://schemas.microsoft.com/office/drawing/2014/main" id="{0B06B291-1C98-F899-86BE-C09E438CB9FA}"/>
+                </a:ext>
+              </a:extLst>
+            </p:cNvPr>
+            <p:cNvSpPr/>
+            <p:nvPr/>
+          </p:nvSpPr>
+          <p:spPr>
+            <a:xfrm rot="10800000" flipH="1">
+              <a:off x="945717" y="4157223"/>
+              <a:ext cx="1440000" cy="2160000"/>
+            </a:xfrm>
+            <a:prstGeom prst="foldedCorner">
+              <a:avLst>
+                <a:gd name="adj" fmla="val 37469"/>
+              </a:avLst>
+            </a:prstGeom>
+            <a:solidFill>
+              <a:schemeClr val="bg1">
+                <a:lumMod val="75000"/>
+              </a:schemeClr>
+            </a:solidFill>
+          </p:spPr>
+          <p:style>
+            <a:lnRef idx="2">
+              <a:schemeClr val="accent1">
+                <a:shade val="15000"/>
+              </a:schemeClr>
+            </a:lnRef>
+            <a:fillRef idx="1">
+              <a:schemeClr val="accent1"/>
+            </a:fillRef>
+            <a:effectRef idx="0">
+              <a:schemeClr val="accent1"/>
+            </a:effectRef>
+            <a:fontRef idx="minor">
+              <a:schemeClr val="lt1"/>
+            </a:fontRef>
+          </p:style>
+          <p:txBody>
+            <a:bodyPr rtlCol="0" anchor="ctr"/>
+            <a:lstStyle/>
+            <a:p>
+              <a:pPr algn="ctr"/>
+              <a:endParaRPr lang="zh-CN" altLang="en-US" dirty="0"/>
+            </a:p>
+          </p:txBody>
+        </p:sp>
+        <p:pic>
+          <p:nvPicPr>
+            <p:cNvPr id="15" name="图片 14">
+              <a:extLst>
+                <a:ext uri="{FF2B5EF4-FFF2-40B4-BE49-F238E27FC236}">
+                  <a16:creationId xmlns:a16="http://schemas.microsoft.com/office/drawing/2014/main" id="{850C8B86-7619-FDB0-BB1D-AE50042DBF6B}"/>
+                </a:ext>
+              </a:extLst>
+            </p:cNvPr>
+            <p:cNvPicPr>
+              <a:picLocks noChangeAspect="1"/>
+            </p:cNvPicPr>
+            <p:nvPr/>
+          </p:nvPicPr>
+          <p:blipFill>
+            <a:blip r:embed="rId4"/>
+            <a:stretch>
+              <a:fillRect/>
+            </a:stretch>
+          </p:blipFill>
+          <p:spPr>
+            <a:xfrm>
+              <a:off x="1360917" y="5047639"/>
+              <a:ext cx="609600" cy="609600"/>
+            </a:xfrm>
+            <a:prstGeom prst="rect">
+              <a:avLst/>
+            </a:prstGeom>
+          </p:spPr>
+        </p:pic>
+        <p:sp>
+          <p:nvSpPr>
+            <p:cNvPr id="16" name="文本框 15">
+              <a:extLst>
+                <a:ext uri="{FF2B5EF4-FFF2-40B4-BE49-F238E27FC236}">
+                  <a16:creationId xmlns:a16="http://schemas.microsoft.com/office/drawing/2014/main" id="{CA7A5AD7-C793-6A64-596E-D467DF8A8347}"/>
+                </a:ext>
+              </a:extLst>
+            </p:cNvPr>
+            <p:cNvSpPr txBox="1"/>
+            <p:nvPr/>
+          </p:nvSpPr>
+          <p:spPr>
+            <a:xfrm>
+              <a:off x="1696173" y="4939706"/>
+              <a:ext cx="386080" cy="297517"/>
+            </a:xfrm>
+            <a:prstGeom prst="rect">
+              <a:avLst/>
+            </a:prstGeom>
+            <a:noFill/>
+          </p:spPr>
+          <p:txBody>
+            <a:bodyPr wrap="square" rtlCol="0">
+              <a:spAutoFit/>
+            </a:bodyPr>
+            <a:lstStyle/>
+            <a:p>
+              <a:r>
+                <a:rPr lang="en-US" altLang="zh-CN" sz="2000" baseline="30000" dirty="0">
+                  <a:solidFill>
+                    <a:schemeClr val="bg1">
+                      <a:lumMod val="95000"/>
+                    </a:schemeClr>
+                  </a:solidFill>
+                  <a:latin typeface="得意黑" pitchFamily="50" charset="-122"/>
+                  <a:ea typeface="得意黑" pitchFamily="50" charset="-122"/>
+                </a:rPr>
+                <a:t>[1]</a:t>
+              </a:r>
+              <a:endParaRPr lang="zh-CN" altLang="en-US" sz="2000" baseline="30000" dirty="0">
+                <a:solidFill>
+                  <a:schemeClr val="bg1">
+                    <a:lumMod val="95000"/>
+                  </a:schemeClr>
+                </a:solidFill>
+                <a:latin typeface="得意黑" pitchFamily="50" charset="-122"/>
+                <a:ea typeface="得意黑" pitchFamily="50" charset="-122"/>
+              </a:endParaRPr>
+            </a:p>
+          </p:txBody>
+        </p:sp>
+      </p:grpSp>
+      <p:grpSp>
+        <p:nvGrpSpPr>
+          <p:cNvPr id="24" name="组合 23">
+            <a:extLst>
+              <a:ext uri="{FF2B5EF4-FFF2-40B4-BE49-F238E27FC236}">
+                <a16:creationId xmlns:a16="http://schemas.microsoft.com/office/drawing/2014/main" id="{D3070AB0-5ED0-EED0-F053-097AABD085A0}"/>
+              </a:ext>
+            </a:extLst>
+          </p:cNvPr>
+          <p:cNvGrpSpPr/>
+          <p:nvPr/>
+        </p:nvGrpSpPr>
+        <p:grpSpPr>
+          <a:xfrm>
+            <a:off x="5411195" y="2060409"/>
+            <a:ext cx="1440000" cy="2160000"/>
+            <a:chOff x="9034961" y="2349000"/>
+            <a:chExt cx="1440000" cy="2160000"/>
+          </a:xfrm>
+        </p:grpSpPr>
+        <p:sp>
+          <p:nvSpPr>
+            <p:cNvPr id="23" name="矩形: 折角 22">
+              <a:extLst>
+                <a:ext uri="{FF2B5EF4-FFF2-40B4-BE49-F238E27FC236}">
+                  <a16:creationId xmlns:a16="http://schemas.microsoft.com/office/drawing/2014/main" id="{23697180-359F-6168-5CC6-01B758C72D84}"/>
+                </a:ext>
+              </a:extLst>
+            </p:cNvPr>
+            <p:cNvSpPr/>
+            <p:nvPr/>
+          </p:nvSpPr>
+          <p:spPr>
+            <a:xfrm rot="10800000" flipH="1">
+              <a:off x="9034961" y="2349000"/>
+              <a:ext cx="1440000" cy="2160000"/>
+            </a:xfrm>
+            <a:prstGeom prst="foldedCorner">
+              <a:avLst>
+                <a:gd name="adj" fmla="val 37469"/>
+              </a:avLst>
+            </a:prstGeom>
+            <a:solidFill>
+              <a:schemeClr val="bg1">
+                <a:lumMod val="75000"/>
+              </a:schemeClr>
+            </a:solidFill>
+          </p:spPr>
+          <p:style>
+            <a:lnRef idx="2">
+              <a:schemeClr val="accent1">
+                <a:shade val="15000"/>
+              </a:schemeClr>
+            </a:lnRef>
+            <a:fillRef idx="1">
+              <a:schemeClr val="accent1"/>
+            </a:fillRef>
+            <a:effectRef idx="0">
+              <a:schemeClr val="accent1"/>
+            </a:effectRef>
+            <a:fontRef idx="minor">
+              <a:schemeClr val="lt1"/>
+            </a:fontRef>
+          </p:style>
+          <p:txBody>
+            <a:bodyPr rtlCol="0" anchor="ctr"/>
+            <a:lstStyle/>
+            <a:p>
+              <a:pPr algn="ctr"/>
+              <a:endParaRPr lang="zh-CN" altLang="en-US"/>
+            </a:p>
+          </p:txBody>
+        </p:sp>
+        <p:grpSp>
+          <p:nvGrpSpPr>
+            <p:cNvPr id="22" name="组合 21">
+              <a:extLst>
+                <a:ext uri="{FF2B5EF4-FFF2-40B4-BE49-F238E27FC236}">
+                  <a16:creationId xmlns:a16="http://schemas.microsoft.com/office/drawing/2014/main" id="{234AA552-3DCF-412C-7F2B-4E8583347214}"/>
+                </a:ext>
+              </a:extLst>
+            </p:cNvPr>
+            <p:cNvGrpSpPr/>
+            <p:nvPr/>
+          </p:nvGrpSpPr>
+          <p:grpSpPr>
+            <a:xfrm>
+              <a:off x="9418722" y="3255625"/>
+              <a:ext cx="1012372" cy="609600"/>
+              <a:chOff x="8441873" y="5203681"/>
+              <a:chExt cx="1012372" cy="609600"/>
+            </a:xfrm>
+          </p:grpSpPr>
+          <p:pic>
+            <p:nvPicPr>
+              <p:cNvPr id="20" name="图片 19">
+                <a:extLst>
+                  <a:ext uri="{FF2B5EF4-FFF2-40B4-BE49-F238E27FC236}">
+                    <a16:creationId xmlns:a16="http://schemas.microsoft.com/office/drawing/2014/main" id="{9ACE6A15-1F35-AF2E-A709-9D2E4FD53C81}"/>
+                  </a:ext>
+                </a:extLst>
+              </p:cNvPr>
+              <p:cNvPicPr>
+                <a:picLocks noChangeAspect="1"/>
+              </p:cNvPicPr>
+              <p:nvPr/>
+            </p:nvPicPr>
+            <p:blipFill>
+              <a:blip r:embed="rId3"/>
+              <a:stretch>
+                <a:fillRect/>
+              </a:stretch>
+            </p:blipFill>
+            <p:spPr>
+              <a:xfrm>
+                <a:off x="8441873" y="5203681"/>
+                <a:ext cx="609600" cy="609600"/>
+              </a:xfrm>
+              <a:prstGeom prst="rect">
+                <a:avLst/>
+              </a:prstGeom>
+            </p:spPr>
+          </p:pic>
+          <p:sp>
+            <p:nvSpPr>
+              <p:cNvPr id="21" name="文本框 20">
+                <a:extLst>
+                  <a:ext uri="{FF2B5EF4-FFF2-40B4-BE49-F238E27FC236}">
+                    <a16:creationId xmlns:a16="http://schemas.microsoft.com/office/drawing/2014/main" id="{A3015791-6A18-44D4-1EE9-44C27689D9D6}"/>
+                  </a:ext>
+                </a:extLst>
+              </p:cNvPr>
+              <p:cNvSpPr txBox="1"/>
+              <p:nvPr/>
+            </p:nvSpPr>
+            <p:spPr>
+              <a:xfrm>
+                <a:off x="8953683" y="5203681"/>
+                <a:ext cx="500562" cy="297517"/>
+              </a:xfrm>
+              <a:prstGeom prst="rect">
+                <a:avLst/>
+              </a:prstGeom>
+              <a:noFill/>
+            </p:spPr>
+            <p:txBody>
+              <a:bodyPr wrap="square" rtlCol="0">
+                <a:spAutoFit/>
+              </a:bodyPr>
+              <a:lstStyle/>
+              <a:p>
+                <a:r>
+                  <a:rPr lang="en-US" altLang="zh-CN" sz="2000" baseline="30000" dirty="0">
+                    <a:solidFill>
+                      <a:schemeClr val="bg1">
+                        <a:lumMod val="95000"/>
+                      </a:schemeClr>
+                    </a:solidFill>
+                    <a:latin typeface="得意黑" pitchFamily="50" charset="-122"/>
+                    <a:ea typeface="得意黑" pitchFamily="50" charset="-122"/>
+                  </a:rPr>
+                  <a:t>[2]</a:t>
+                </a:r>
+                <a:endParaRPr lang="zh-CN" altLang="en-US" sz="2000" baseline="30000" dirty="0">
+                  <a:solidFill>
+                    <a:schemeClr val="bg1">
+                      <a:lumMod val="95000"/>
+                    </a:schemeClr>
+                  </a:solidFill>
+                  <a:latin typeface="得意黑" pitchFamily="50" charset="-122"/>
+                  <a:ea typeface="得意黑" pitchFamily="50" charset="-122"/>
+                </a:endParaRPr>
+              </a:p>
+            </p:txBody>
+          </p:sp>
+        </p:grpSp>
+      </p:grpSp>
       <p:sp>
         <p:nvSpPr>
-          <p:cNvPr id="4" name="矩形: 圆角 3">
+          <p:cNvPr id="25" name="矩形: 圆角 24">
             <a:extLst>
               <a:ext uri="{FF2B5EF4-FFF2-40B4-BE49-F238E27FC236}">
-                <a16:creationId xmlns:a16="http://schemas.microsoft.com/office/drawing/2014/main" id="{B3A092DC-B74B-7095-53AD-5BFF826CD2EF}"/>
+                <a16:creationId xmlns:a16="http://schemas.microsoft.com/office/drawing/2014/main" id="{82779825-AD8C-7BA8-6B11-457D9BA9B177}"/>
               </a:ext>
             </a:extLst>
           </p:cNvPr>
@@ -3369,28 +5366,17 @@
         </p:nvSpPr>
         <p:spPr>
           <a:xfrm>
-            <a:off x="402771" y="468086"/>
-            <a:ext cx="5431973" cy="2667000"/>
+            <a:off x="5016000" y="2071982"/>
+            <a:ext cx="2160000" cy="2160000"/>
           </a:xfrm>
           <a:prstGeom prst="roundRect">
             <a:avLst/>
           </a:prstGeom>
           <a:solidFill>
-            <a:schemeClr val="tx1">
-              <a:lumMod val="85000"/>
-              <a:lumOff val="15000"/>
+            <a:schemeClr val="bg2">
+              <a:lumMod val="50000"/>
             </a:schemeClr>
           </a:solidFill>
-          <a:ln w="47625">
-            <a:solidFill>
-              <a:schemeClr val="tx1">
-                <a:lumMod val="65000"/>
-                <a:lumOff val="35000"/>
-                <a:alpha val="99000"/>
-              </a:schemeClr>
-            </a:solidFill>
-            <a:prstDash val="lgDashDot"/>
-          </a:ln>
         </p:spPr>
         <p:style>
           <a:lnRef idx="2">
@@ -3413,1436 +5399,8 @@
           <a:lstStyle/>
           <a:p>
             <a:pPr algn="ctr"/>
-            <a:endParaRPr lang="zh-CN" altLang="en-US" dirty="0"/>
-          </a:p>
-        </p:txBody>
-      </p:sp>
-      <p:sp>
-        <p:nvSpPr>
-          <p:cNvPr id="3" name="文本框 2">
-            <a:extLst>
-              <a:ext uri="{FF2B5EF4-FFF2-40B4-BE49-F238E27FC236}">
-                <a16:creationId xmlns:a16="http://schemas.microsoft.com/office/drawing/2014/main" id="{B15181D3-FF31-A968-330B-3507EF94B3D0}"/>
-              </a:ext>
-            </a:extLst>
-          </p:cNvPr>
-          <p:cNvSpPr txBox="1"/>
-          <p:nvPr/>
-        </p:nvSpPr>
-        <p:spPr>
-          <a:xfrm>
-            <a:off x="457200" y="468085"/>
-            <a:ext cx="5508171" cy="2677656"/>
-          </a:xfrm>
-          <a:prstGeom prst="rect">
-            <a:avLst/>
-          </a:prstGeom>
-          <a:noFill/>
-          <a:ln>
-            <a:noFill/>
-          </a:ln>
-        </p:spPr>
-        <p:txBody>
-          <a:bodyPr wrap="square">
-            <a:spAutoFit/>
-          </a:bodyPr>
-          <a:lstStyle/>
-          <a:p>
             <a:r>
-              <a:rPr lang="en-US" altLang="zh-CN" sz="2400" b="0" i="0" dirty="0">
-                <a:solidFill>
-                  <a:srgbClr val="C578DD"/>
-                </a:solidFill>
-                <a:effectLst/>
-                <a:latin typeface="FiraMono Nerd Font Medium" panose="020B0609050000020004" pitchFamily="49" charset="0"/>
-                <a:ea typeface="FiraMono Nerd Font Medium" panose="020B0609050000020004" pitchFamily="49" charset="0"/>
-              </a:rPr>
-              <a:t>def</a:t>
-            </a:r>
-            <a:r>
-              <a:rPr lang="en-US" altLang="zh-CN" sz="2400" b="0" i="0" dirty="0">
-                <a:solidFill>
-                  <a:srgbClr val="AAB1BF"/>
-                </a:solidFill>
-                <a:effectLst/>
-                <a:latin typeface="FiraMono Nerd Font Medium" panose="020B0609050000020004" pitchFamily="49" charset="0"/>
-                <a:ea typeface="FiraMono Nerd Font Medium" panose="020B0609050000020004" pitchFamily="49" charset="0"/>
-              </a:rPr>
-              <a:t> </a:t>
-            </a:r>
-            <a:r>
-              <a:rPr lang="en-US" altLang="zh-CN" sz="2400" b="0" i="0" dirty="0">
-                <a:solidFill>
-                  <a:srgbClr val="61AFEF"/>
-                </a:solidFill>
-                <a:effectLst/>
-                <a:latin typeface="FiraMono Nerd Font Medium" panose="020B0609050000020004" pitchFamily="49" charset="0"/>
-                <a:ea typeface="FiraMono Nerd Font Medium" panose="020B0609050000020004" pitchFamily="49" charset="0"/>
-              </a:rPr>
-              <a:t>fibonacci</a:t>
-            </a:r>
-            <a:r>
-              <a:rPr lang="en-US" altLang="zh-CN" sz="2400" b="0" i="0" dirty="0">
-                <a:solidFill>
-                  <a:srgbClr val="AAB1BF"/>
-                </a:solidFill>
-                <a:effectLst/>
-                <a:latin typeface="FiraMono Nerd Font Medium" panose="020B0609050000020004" pitchFamily="49" charset="0"/>
-                <a:ea typeface="FiraMono Nerd Font Medium" panose="020B0609050000020004" pitchFamily="49" charset="0"/>
-              </a:rPr>
-              <a:t>(n):</a:t>
-            </a:r>
-            <a:br>
-              <a:rPr lang="en-US" altLang="zh-CN" sz="2400" dirty="0">
-                <a:latin typeface="FiraMono Nerd Font Medium" panose="020B0609050000020004" pitchFamily="49" charset="0"/>
-                <a:ea typeface="FiraMono Nerd Font Medium" panose="020B0609050000020004" pitchFamily="49" charset="0"/>
-              </a:rPr>
-            </a:br>
-            <a:r>
-              <a:rPr lang="en-US" altLang="zh-CN" sz="2400" b="0" i="0" dirty="0">
-                <a:solidFill>
-                  <a:srgbClr val="AAB1BF"/>
-                </a:solidFill>
-                <a:effectLst/>
-                <a:latin typeface="FiraMono Nerd Font Medium" panose="020B0609050000020004" pitchFamily="49" charset="0"/>
-                <a:ea typeface="FiraMono Nerd Font Medium" panose="020B0609050000020004" pitchFamily="49" charset="0"/>
-              </a:rPr>
-              <a:t>    </a:t>
-            </a:r>
-            <a:r>
-              <a:rPr lang="en-US" altLang="zh-CN" sz="2400" b="0" i="0" dirty="0">
-                <a:solidFill>
-                  <a:srgbClr val="C578DD"/>
-                </a:solidFill>
-                <a:effectLst/>
-                <a:latin typeface="FiraMono Nerd Font Medium" panose="020B0609050000020004" pitchFamily="49" charset="0"/>
-                <a:ea typeface="FiraMono Nerd Font Medium" panose="020B0609050000020004" pitchFamily="49" charset="0"/>
-              </a:rPr>
-              <a:t>if</a:t>
-            </a:r>
-            <a:r>
-              <a:rPr lang="en-US" altLang="zh-CN" sz="2400" b="0" i="0" dirty="0">
-                <a:solidFill>
-                  <a:srgbClr val="AAB1BF"/>
-                </a:solidFill>
-                <a:effectLst/>
-                <a:latin typeface="FiraMono Nerd Font Medium" panose="020B0609050000020004" pitchFamily="49" charset="0"/>
-                <a:ea typeface="FiraMono Nerd Font Medium" panose="020B0609050000020004" pitchFamily="49" charset="0"/>
-              </a:rPr>
-              <a:t> n </a:t>
-            </a:r>
-            <a:r>
-              <a:rPr lang="en-US" altLang="zh-CN" sz="2400" b="0" i="0" dirty="0">
-                <a:solidFill>
-                  <a:srgbClr val="61AFEF"/>
-                </a:solidFill>
-                <a:effectLst/>
-                <a:latin typeface="FiraMono Nerd Font Medium" panose="020B0609050000020004" pitchFamily="49" charset="0"/>
-                <a:ea typeface="FiraMono Nerd Font Medium" panose="020B0609050000020004" pitchFamily="49" charset="0"/>
-              </a:rPr>
-              <a:t>&lt;=</a:t>
-            </a:r>
-            <a:r>
-              <a:rPr lang="en-US" altLang="zh-CN" sz="2400" b="0" i="0" dirty="0">
-                <a:solidFill>
-                  <a:srgbClr val="AAB1BF"/>
-                </a:solidFill>
-                <a:effectLst/>
-                <a:latin typeface="FiraMono Nerd Font Medium" panose="020B0609050000020004" pitchFamily="49" charset="0"/>
-                <a:ea typeface="FiraMono Nerd Font Medium" panose="020B0609050000020004" pitchFamily="49" charset="0"/>
-              </a:rPr>
-              <a:t> </a:t>
-            </a:r>
-            <a:r>
-              <a:rPr lang="en-US" altLang="zh-CN" sz="2400" b="0" i="0" dirty="0">
-                <a:solidFill>
-                  <a:srgbClr val="D19965"/>
-                </a:solidFill>
-                <a:effectLst/>
-                <a:latin typeface="FiraMono Nerd Font Medium" panose="020B0609050000020004" pitchFamily="49" charset="0"/>
-                <a:ea typeface="FiraMono Nerd Font Medium" panose="020B0609050000020004" pitchFamily="49" charset="0"/>
-              </a:rPr>
-              <a:t>1</a:t>
-            </a:r>
-            <a:r>
-              <a:rPr lang="en-US" altLang="zh-CN" sz="2400" b="0" i="0" dirty="0">
-                <a:solidFill>
-                  <a:srgbClr val="AAB1BF"/>
-                </a:solidFill>
-                <a:effectLst/>
-                <a:latin typeface="FiraMono Nerd Font Medium" panose="020B0609050000020004" pitchFamily="49" charset="0"/>
-                <a:ea typeface="FiraMono Nerd Font Medium" panose="020B0609050000020004" pitchFamily="49" charset="0"/>
-              </a:rPr>
-              <a:t>:</a:t>
-            </a:r>
-            <a:br>
-              <a:rPr lang="en-US" altLang="zh-CN" sz="2400" dirty="0">
-                <a:latin typeface="FiraMono Nerd Font Medium" panose="020B0609050000020004" pitchFamily="49" charset="0"/>
-                <a:ea typeface="FiraMono Nerd Font Medium" panose="020B0609050000020004" pitchFamily="49" charset="0"/>
-              </a:rPr>
-            </a:br>
-            <a:r>
-              <a:rPr lang="en-US" altLang="zh-CN" sz="2400" b="0" i="0" dirty="0">
-                <a:solidFill>
-                  <a:srgbClr val="AAB1BF"/>
-                </a:solidFill>
-                <a:effectLst/>
-                <a:latin typeface="FiraMono Nerd Font Medium" panose="020B0609050000020004" pitchFamily="49" charset="0"/>
-                <a:ea typeface="FiraMono Nerd Font Medium" panose="020B0609050000020004" pitchFamily="49" charset="0"/>
-              </a:rPr>
-              <a:t>        </a:t>
-            </a:r>
-            <a:r>
-              <a:rPr lang="en-US" altLang="zh-CN" sz="2400" b="0" i="0" dirty="0">
-                <a:solidFill>
-                  <a:srgbClr val="C578DD"/>
-                </a:solidFill>
-                <a:effectLst/>
-                <a:latin typeface="FiraMono Nerd Font Medium" panose="020B0609050000020004" pitchFamily="49" charset="0"/>
-                <a:ea typeface="FiraMono Nerd Font Medium" panose="020B0609050000020004" pitchFamily="49" charset="0"/>
-              </a:rPr>
-              <a:t>return</a:t>
-            </a:r>
-            <a:r>
-              <a:rPr lang="en-US" altLang="zh-CN" sz="2400" b="0" i="0" dirty="0">
-                <a:solidFill>
-                  <a:srgbClr val="AAB1BF"/>
-                </a:solidFill>
-                <a:effectLst/>
-                <a:latin typeface="FiraMono Nerd Font Medium" panose="020B0609050000020004" pitchFamily="49" charset="0"/>
-                <a:ea typeface="FiraMono Nerd Font Medium" panose="020B0609050000020004" pitchFamily="49" charset="0"/>
-              </a:rPr>
-              <a:t> n</a:t>
-            </a:r>
-            <a:br>
-              <a:rPr lang="en-US" altLang="zh-CN" sz="2400" dirty="0">
-                <a:latin typeface="FiraMono Nerd Font Medium" panose="020B0609050000020004" pitchFamily="49" charset="0"/>
-                <a:ea typeface="FiraMono Nerd Font Medium" panose="020B0609050000020004" pitchFamily="49" charset="0"/>
-              </a:rPr>
-            </a:br>
-            <a:r>
-              <a:rPr lang="en-US" altLang="zh-CN" sz="2400" b="0" i="0" dirty="0">
-                <a:solidFill>
-                  <a:srgbClr val="AAB1BF"/>
-                </a:solidFill>
-                <a:effectLst/>
-                <a:latin typeface="FiraMono Nerd Font Medium" panose="020B0609050000020004" pitchFamily="49" charset="0"/>
-                <a:ea typeface="FiraMono Nerd Font Medium" panose="020B0609050000020004" pitchFamily="49" charset="0"/>
-              </a:rPr>
-              <a:t>    a, b </a:t>
-            </a:r>
-            <a:r>
-              <a:rPr lang="en-US" altLang="zh-CN" sz="2400" b="0" i="0" dirty="0">
-                <a:solidFill>
-                  <a:srgbClr val="61AFEF"/>
-                </a:solidFill>
-                <a:effectLst/>
-                <a:latin typeface="FiraMono Nerd Font Medium" panose="020B0609050000020004" pitchFamily="49" charset="0"/>
-                <a:ea typeface="FiraMono Nerd Font Medium" panose="020B0609050000020004" pitchFamily="49" charset="0"/>
-              </a:rPr>
-              <a:t>=</a:t>
-            </a:r>
-            <a:r>
-              <a:rPr lang="en-US" altLang="zh-CN" sz="2400" b="0" i="0" dirty="0">
-                <a:solidFill>
-                  <a:srgbClr val="AAB1BF"/>
-                </a:solidFill>
-                <a:effectLst/>
-                <a:latin typeface="FiraMono Nerd Font Medium" panose="020B0609050000020004" pitchFamily="49" charset="0"/>
-                <a:ea typeface="FiraMono Nerd Font Medium" panose="020B0609050000020004" pitchFamily="49" charset="0"/>
-              </a:rPr>
-              <a:t> </a:t>
-            </a:r>
-            <a:r>
-              <a:rPr lang="en-US" altLang="zh-CN" sz="2400" b="0" i="0" dirty="0">
-                <a:solidFill>
-                  <a:srgbClr val="D19965"/>
-                </a:solidFill>
-                <a:effectLst/>
-                <a:latin typeface="FiraMono Nerd Font Medium" panose="020B0609050000020004" pitchFamily="49" charset="0"/>
-                <a:ea typeface="FiraMono Nerd Font Medium" panose="020B0609050000020004" pitchFamily="49" charset="0"/>
-              </a:rPr>
-              <a:t>0</a:t>
-            </a:r>
-            <a:r>
-              <a:rPr lang="en-US" altLang="zh-CN" sz="2400" b="0" i="0" dirty="0">
-                <a:solidFill>
-                  <a:srgbClr val="AAB1BF"/>
-                </a:solidFill>
-                <a:effectLst/>
-                <a:latin typeface="FiraMono Nerd Font Medium" panose="020B0609050000020004" pitchFamily="49" charset="0"/>
-                <a:ea typeface="FiraMono Nerd Font Medium" panose="020B0609050000020004" pitchFamily="49" charset="0"/>
-              </a:rPr>
-              <a:t>, </a:t>
-            </a:r>
-            <a:r>
-              <a:rPr lang="en-US" altLang="zh-CN" sz="2400" b="0" i="0" dirty="0">
-                <a:solidFill>
-                  <a:srgbClr val="D19965"/>
-                </a:solidFill>
-                <a:effectLst/>
-                <a:latin typeface="FiraMono Nerd Font Medium" panose="020B0609050000020004" pitchFamily="49" charset="0"/>
-                <a:ea typeface="FiraMono Nerd Font Medium" panose="020B0609050000020004" pitchFamily="49" charset="0"/>
-              </a:rPr>
-              <a:t>1</a:t>
-            </a:r>
-            <a:br>
-              <a:rPr lang="en-US" altLang="zh-CN" sz="2400" dirty="0">
-                <a:latin typeface="FiraMono Nerd Font Medium" panose="020B0609050000020004" pitchFamily="49" charset="0"/>
-                <a:ea typeface="FiraMono Nerd Font Medium" panose="020B0609050000020004" pitchFamily="49" charset="0"/>
-              </a:rPr>
-            </a:br>
-            <a:r>
-              <a:rPr lang="en-US" altLang="zh-CN" sz="2400" b="0" i="0" dirty="0">
-                <a:solidFill>
-                  <a:srgbClr val="AAB1BF"/>
-                </a:solidFill>
-                <a:effectLst/>
-                <a:latin typeface="FiraMono Nerd Font Medium" panose="020B0609050000020004" pitchFamily="49" charset="0"/>
-                <a:ea typeface="FiraMono Nerd Font Medium" panose="020B0609050000020004" pitchFamily="49" charset="0"/>
-              </a:rPr>
-              <a:t>    </a:t>
-            </a:r>
-            <a:r>
-              <a:rPr lang="en-US" altLang="zh-CN" sz="2400" b="0" i="0" dirty="0">
-                <a:solidFill>
-                  <a:srgbClr val="C578DD"/>
-                </a:solidFill>
-                <a:effectLst/>
-                <a:latin typeface="FiraMono Nerd Font Medium" panose="020B0609050000020004" pitchFamily="49" charset="0"/>
-                <a:ea typeface="FiraMono Nerd Font Medium" panose="020B0609050000020004" pitchFamily="49" charset="0"/>
-              </a:rPr>
-              <a:t>for</a:t>
-            </a:r>
-            <a:r>
-              <a:rPr lang="en-US" altLang="zh-CN" sz="2400" b="0" i="0" dirty="0">
-                <a:solidFill>
-                  <a:srgbClr val="AAB1BF"/>
-                </a:solidFill>
-                <a:effectLst/>
-                <a:latin typeface="FiraMono Nerd Font Medium" panose="020B0609050000020004" pitchFamily="49" charset="0"/>
-                <a:ea typeface="FiraMono Nerd Font Medium" panose="020B0609050000020004" pitchFamily="49" charset="0"/>
-              </a:rPr>
-              <a:t> _ </a:t>
-            </a:r>
-            <a:r>
-              <a:rPr lang="en-US" altLang="zh-CN" sz="2400" b="0" i="0" dirty="0">
-                <a:solidFill>
-                  <a:srgbClr val="C578DD"/>
-                </a:solidFill>
-                <a:effectLst/>
-                <a:latin typeface="FiraMono Nerd Font Medium" panose="020B0609050000020004" pitchFamily="49" charset="0"/>
-                <a:ea typeface="FiraMono Nerd Font Medium" panose="020B0609050000020004" pitchFamily="49" charset="0"/>
-              </a:rPr>
-              <a:t>in</a:t>
-            </a:r>
-            <a:r>
-              <a:rPr lang="en-US" altLang="zh-CN" sz="2400" b="0" i="0" dirty="0">
-                <a:solidFill>
-                  <a:srgbClr val="AAB1BF"/>
-                </a:solidFill>
-                <a:effectLst/>
-                <a:latin typeface="FiraMono Nerd Font Medium" panose="020B0609050000020004" pitchFamily="49" charset="0"/>
-                <a:ea typeface="FiraMono Nerd Font Medium" panose="020B0609050000020004" pitchFamily="49" charset="0"/>
-              </a:rPr>
-              <a:t> </a:t>
-            </a:r>
-            <a:r>
-              <a:rPr lang="en-US" altLang="zh-CN" sz="2400" b="0" i="0" dirty="0">
-                <a:solidFill>
-                  <a:srgbClr val="97C279"/>
-                </a:solidFill>
-                <a:effectLst/>
-                <a:latin typeface="FiraMono Nerd Font Medium" panose="020B0609050000020004" pitchFamily="49" charset="0"/>
-                <a:ea typeface="FiraMono Nerd Font Medium" panose="020B0609050000020004" pitchFamily="49" charset="0"/>
-              </a:rPr>
-              <a:t>range</a:t>
-            </a:r>
-            <a:r>
-              <a:rPr lang="en-US" altLang="zh-CN" sz="2400" b="0" i="0" dirty="0">
-                <a:solidFill>
-                  <a:srgbClr val="AAB1BF"/>
-                </a:solidFill>
-                <a:effectLst/>
-                <a:latin typeface="FiraMono Nerd Font Medium" panose="020B0609050000020004" pitchFamily="49" charset="0"/>
-                <a:ea typeface="FiraMono Nerd Font Medium" panose="020B0609050000020004" pitchFamily="49" charset="0"/>
-              </a:rPr>
-              <a:t>(</a:t>
-            </a:r>
-            <a:r>
-              <a:rPr lang="en-US" altLang="zh-CN" sz="2400" b="0" i="0" dirty="0">
-                <a:solidFill>
-                  <a:srgbClr val="D19965"/>
-                </a:solidFill>
-                <a:effectLst/>
-                <a:latin typeface="FiraMono Nerd Font Medium" panose="020B0609050000020004" pitchFamily="49" charset="0"/>
-                <a:ea typeface="FiraMono Nerd Font Medium" panose="020B0609050000020004" pitchFamily="49" charset="0"/>
-              </a:rPr>
-              <a:t>2</a:t>
-            </a:r>
-            <a:r>
-              <a:rPr lang="en-US" altLang="zh-CN" sz="2400" b="0" i="0" dirty="0">
-                <a:solidFill>
-                  <a:srgbClr val="AAB1BF"/>
-                </a:solidFill>
-                <a:effectLst/>
-                <a:latin typeface="FiraMono Nerd Font Medium" panose="020B0609050000020004" pitchFamily="49" charset="0"/>
-                <a:ea typeface="FiraMono Nerd Font Medium" panose="020B0609050000020004" pitchFamily="49" charset="0"/>
-              </a:rPr>
-              <a:t>, n </a:t>
-            </a:r>
-            <a:r>
-              <a:rPr lang="en-US" altLang="zh-CN" sz="2400" b="0" i="0" dirty="0">
-                <a:solidFill>
-                  <a:srgbClr val="61AFEF"/>
-                </a:solidFill>
-                <a:effectLst/>
-                <a:latin typeface="FiraMono Nerd Font Medium" panose="020B0609050000020004" pitchFamily="49" charset="0"/>
-                <a:ea typeface="FiraMono Nerd Font Medium" panose="020B0609050000020004" pitchFamily="49" charset="0"/>
-              </a:rPr>
-              <a:t>+</a:t>
-            </a:r>
-            <a:r>
-              <a:rPr lang="en-US" altLang="zh-CN" sz="2400" b="0" i="0" dirty="0">
-                <a:solidFill>
-                  <a:srgbClr val="AAB1BF"/>
-                </a:solidFill>
-                <a:effectLst/>
-                <a:latin typeface="FiraMono Nerd Font Medium" panose="020B0609050000020004" pitchFamily="49" charset="0"/>
-                <a:ea typeface="FiraMono Nerd Font Medium" panose="020B0609050000020004" pitchFamily="49" charset="0"/>
-              </a:rPr>
-              <a:t> </a:t>
-            </a:r>
-            <a:r>
-              <a:rPr lang="en-US" altLang="zh-CN" sz="2400" b="0" i="0" dirty="0">
-                <a:solidFill>
-                  <a:srgbClr val="D19965"/>
-                </a:solidFill>
-                <a:effectLst/>
-                <a:latin typeface="FiraMono Nerd Font Medium" panose="020B0609050000020004" pitchFamily="49" charset="0"/>
-                <a:ea typeface="FiraMono Nerd Font Medium" panose="020B0609050000020004" pitchFamily="49" charset="0"/>
-              </a:rPr>
-              <a:t>1</a:t>
-            </a:r>
-            <a:r>
-              <a:rPr lang="en-US" altLang="zh-CN" sz="2400" b="0" i="0" dirty="0">
-                <a:solidFill>
-                  <a:srgbClr val="AAB1BF"/>
-                </a:solidFill>
-                <a:effectLst/>
-                <a:latin typeface="FiraMono Nerd Font Medium" panose="020B0609050000020004" pitchFamily="49" charset="0"/>
-                <a:ea typeface="FiraMono Nerd Font Medium" panose="020B0609050000020004" pitchFamily="49" charset="0"/>
-              </a:rPr>
-              <a:t>):</a:t>
-            </a:r>
-            <a:br>
-              <a:rPr lang="en-US" altLang="zh-CN" sz="2400" dirty="0">
-                <a:latin typeface="FiraMono Nerd Font Medium" panose="020B0609050000020004" pitchFamily="49" charset="0"/>
-                <a:ea typeface="FiraMono Nerd Font Medium" panose="020B0609050000020004" pitchFamily="49" charset="0"/>
-              </a:rPr>
-            </a:br>
-            <a:r>
-              <a:rPr lang="en-US" altLang="zh-CN" sz="2400" b="0" i="0" dirty="0">
-                <a:solidFill>
-                  <a:srgbClr val="AAB1BF"/>
-                </a:solidFill>
-                <a:effectLst/>
-                <a:latin typeface="FiraMono Nerd Font Medium" panose="020B0609050000020004" pitchFamily="49" charset="0"/>
-                <a:ea typeface="FiraMono Nerd Font Medium" panose="020B0609050000020004" pitchFamily="49" charset="0"/>
-              </a:rPr>
-              <a:t>        a, b </a:t>
-            </a:r>
-            <a:r>
-              <a:rPr lang="en-US" altLang="zh-CN" sz="2400" b="0" i="0" dirty="0">
-                <a:solidFill>
-                  <a:srgbClr val="61AFEF"/>
-                </a:solidFill>
-                <a:effectLst/>
-                <a:latin typeface="FiraMono Nerd Font Medium" panose="020B0609050000020004" pitchFamily="49" charset="0"/>
-                <a:ea typeface="FiraMono Nerd Font Medium" panose="020B0609050000020004" pitchFamily="49" charset="0"/>
-              </a:rPr>
-              <a:t>=</a:t>
-            </a:r>
-            <a:r>
-              <a:rPr lang="en-US" altLang="zh-CN" sz="2400" b="0" i="0" dirty="0">
-                <a:solidFill>
-                  <a:srgbClr val="AAB1BF"/>
-                </a:solidFill>
-                <a:effectLst/>
-                <a:latin typeface="FiraMono Nerd Font Medium" panose="020B0609050000020004" pitchFamily="49" charset="0"/>
-                <a:ea typeface="FiraMono Nerd Font Medium" panose="020B0609050000020004" pitchFamily="49" charset="0"/>
-              </a:rPr>
-              <a:t> b, a </a:t>
-            </a:r>
-            <a:r>
-              <a:rPr lang="en-US" altLang="zh-CN" sz="2400" b="0" i="0" dirty="0">
-                <a:solidFill>
-                  <a:srgbClr val="61AFEF"/>
-                </a:solidFill>
-                <a:effectLst/>
-                <a:latin typeface="FiraMono Nerd Font Medium" panose="020B0609050000020004" pitchFamily="49" charset="0"/>
-                <a:ea typeface="FiraMono Nerd Font Medium" panose="020B0609050000020004" pitchFamily="49" charset="0"/>
-              </a:rPr>
-              <a:t>+</a:t>
-            </a:r>
-            <a:r>
-              <a:rPr lang="en-US" altLang="zh-CN" sz="2400" b="0" i="0" dirty="0">
-                <a:solidFill>
-                  <a:srgbClr val="AAB1BF"/>
-                </a:solidFill>
-                <a:effectLst/>
-                <a:latin typeface="FiraMono Nerd Font Medium" panose="020B0609050000020004" pitchFamily="49" charset="0"/>
-                <a:ea typeface="FiraMono Nerd Font Medium" panose="020B0609050000020004" pitchFamily="49" charset="0"/>
-              </a:rPr>
-              <a:t> b</a:t>
-            </a:r>
-            <a:br>
-              <a:rPr lang="en-US" altLang="zh-CN" sz="2400" dirty="0">
-                <a:latin typeface="FiraMono Nerd Font Medium" panose="020B0609050000020004" pitchFamily="49" charset="0"/>
-                <a:ea typeface="FiraMono Nerd Font Medium" panose="020B0609050000020004" pitchFamily="49" charset="0"/>
-              </a:rPr>
-            </a:br>
-            <a:r>
-              <a:rPr lang="en-US" altLang="zh-CN" sz="2400" b="0" i="0" dirty="0">
-                <a:solidFill>
-                  <a:srgbClr val="AAB1BF"/>
-                </a:solidFill>
-                <a:effectLst/>
-                <a:latin typeface="FiraMono Nerd Font Medium" panose="020B0609050000020004" pitchFamily="49" charset="0"/>
-                <a:ea typeface="FiraMono Nerd Font Medium" panose="020B0609050000020004" pitchFamily="49" charset="0"/>
-              </a:rPr>
-              <a:t>    </a:t>
-            </a:r>
-            <a:r>
-              <a:rPr lang="en-US" altLang="zh-CN" sz="2400" b="0" i="0" dirty="0">
-                <a:solidFill>
-                  <a:srgbClr val="C578DD"/>
-                </a:solidFill>
-                <a:effectLst/>
-                <a:latin typeface="FiraMono Nerd Font Medium" panose="020B0609050000020004" pitchFamily="49" charset="0"/>
-                <a:ea typeface="FiraMono Nerd Font Medium" panose="020B0609050000020004" pitchFamily="49" charset="0"/>
-              </a:rPr>
-              <a:t>return</a:t>
-            </a:r>
-            <a:r>
-              <a:rPr lang="en-US" altLang="zh-CN" sz="2400" b="0" i="0" dirty="0">
-                <a:solidFill>
-                  <a:srgbClr val="AAB1BF"/>
-                </a:solidFill>
-                <a:effectLst/>
-                <a:latin typeface="FiraMono Nerd Font Medium" panose="020B0609050000020004" pitchFamily="49" charset="0"/>
-                <a:ea typeface="FiraMono Nerd Font Medium" panose="020B0609050000020004" pitchFamily="49" charset="0"/>
-              </a:rPr>
-              <a:t> b</a:t>
-            </a:r>
-            <a:endParaRPr lang="zh-CN" altLang="en-US" sz="2400" dirty="0">
-              <a:latin typeface="FiraMono Nerd Font Medium" panose="020B0609050000020004" pitchFamily="49" charset="0"/>
-            </a:endParaRPr>
-          </a:p>
-        </p:txBody>
-      </p:sp>
-      <p:sp>
-        <p:nvSpPr>
-          <p:cNvPr id="5" name="矩形: 圆角 4">
-            <a:extLst>
-              <a:ext uri="{FF2B5EF4-FFF2-40B4-BE49-F238E27FC236}">
-                <a16:creationId xmlns:a16="http://schemas.microsoft.com/office/drawing/2014/main" id="{B2D83A27-FA42-A1F2-73BA-EC8824832EAF}"/>
-              </a:ext>
-            </a:extLst>
-          </p:cNvPr>
-          <p:cNvSpPr/>
-          <p:nvPr/>
-        </p:nvSpPr>
-        <p:spPr>
-          <a:xfrm>
-            <a:off x="6096000" y="359229"/>
-            <a:ext cx="6041572" cy="6020030"/>
-          </a:xfrm>
-          <a:prstGeom prst="roundRect">
-            <a:avLst/>
-          </a:prstGeom>
-          <a:solidFill>
-            <a:schemeClr val="tx1">
-              <a:lumMod val="85000"/>
-              <a:lumOff val="15000"/>
-            </a:schemeClr>
-          </a:solidFill>
-          <a:ln w="47625">
-            <a:solidFill>
-              <a:schemeClr val="tx1">
-                <a:lumMod val="65000"/>
-                <a:lumOff val="35000"/>
-                <a:alpha val="99000"/>
-              </a:schemeClr>
-            </a:solidFill>
-            <a:prstDash val="lgDashDot"/>
-          </a:ln>
-        </p:spPr>
-        <p:style>
-          <a:lnRef idx="2">
-            <a:schemeClr val="accent1">
-              <a:shade val="15000"/>
-            </a:schemeClr>
-          </a:lnRef>
-          <a:fillRef idx="1">
-            <a:schemeClr val="accent1"/>
-          </a:fillRef>
-          <a:effectRef idx="0">
-            <a:schemeClr val="accent1"/>
-          </a:effectRef>
-          <a:fontRef idx="minor">
-            <a:schemeClr val="lt1"/>
-          </a:fontRef>
-        </p:style>
-        <p:txBody>
-          <a:bodyPr rtlCol="0" anchor="ctr"/>
-          <a:lstStyle/>
-          <a:p>
-            <a:pPr algn="ctr"/>
-            <a:endParaRPr lang="zh-CN" altLang="en-US" dirty="0"/>
-          </a:p>
-        </p:txBody>
-      </p:sp>
-      <p:sp>
-        <p:nvSpPr>
-          <p:cNvPr id="7" name="文本框 6">
-            <a:extLst>
-              <a:ext uri="{FF2B5EF4-FFF2-40B4-BE49-F238E27FC236}">
-                <a16:creationId xmlns:a16="http://schemas.microsoft.com/office/drawing/2014/main" id="{7EB9DD0A-D24D-2F8D-AE40-FA43E712F2BE}"/>
-              </a:ext>
-            </a:extLst>
-          </p:cNvPr>
-          <p:cNvSpPr txBox="1"/>
-          <p:nvPr/>
-        </p:nvSpPr>
-        <p:spPr>
-          <a:xfrm>
-            <a:off x="6498772" y="1265436"/>
-            <a:ext cx="5900056" cy="4893647"/>
-          </a:xfrm>
-          <a:prstGeom prst="rect">
-            <a:avLst/>
-          </a:prstGeom>
-          <a:noFill/>
-        </p:spPr>
-        <p:txBody>
-          <a:bodyPr wrap="square">
-            <a:spAutoFit/>
-          </a:bodyPr>
-          <a:lstStyle/>
-          <a:p>
-            <a:r>
-              <a:rPr lang="en-US" altLang="zh-CN" sz="2400" b="0" i="0" dirty="0">
-                <a:solidFill>
-                  <a:srgbClr val="C578DD"/>
-                </a:solidFill>
-                <a:effectLst/>
-                <a:latin typeface="FiraMono Nerd Font Medium" panose="020B0609050000020004" pitchFamily="49" charset="0"/>
-                <a:ea typeface="FiraMono Nerd Font Medium" panose="020B0609050000020004" pitchFamily="49" charset="0"/>
-              </a:rPr>
-              <a:t>fn</a:t>
-            </a:r>
-            <a:r>
-              <a:rPr lang="en-US" altLang="zh-CN" sz="2400" b="0" i="0" dirty="0">
-                <a:solidFill>
-                  <a:srgbClr val="AAB1BF"/>
-                </a:solidFill>
-                <a:effectLst/>
-                <a:latin typeface="FiraMono Nerd Font Medium" panose="020B0609050000020004" pitchFamily="49" charset="0"/>
-                <a:ea typeface="FiraMono Nerd Font Medium" panose="020B0609050000020004" pitchFamily="49" charset="0"/>
-              </a:rPr>
-              <a:t> </a:t>
-            </a:r>
-            <a:r>
-              <a:rPr lang="en-US" altLang="zh-CN" sz="2400" b="0" i="0" dirty="0">
-                <a:solidFill>
-                  <a:srgbClr val="61AFEF"/>
-                </a:solidFill>
-                <a:effectLst/>
-                <a:latin typeface="FiraMono Nerd Font Medium" panose="020B0609050000020004" pitchFamily="49" charset="0"/>
-                <a:ea typeface="FiraMono Nerd Font Medium" panose="020B0609050000020004" pitchFamily="49" charset="0"/>
-              </a:rPr>
-              <a:t>fibonacci</a:t>
-            </a:r>
-            <a:r>
-              <a:rPr lang="en-US" altLang="zh-CN" sz="2400" b="0" i="0" dirty="0">
-                <a:solidFill>
-                  <a:srgbClr val="AAB1BF"/>
-                </a:solidFill>
-                <a:effectLst/>
-                <a:latin typeface="FiraMono Nerd Font Medium" panose="020B0609050000020004" pitchFamily="49" charset="0"/>
-                <a:ea typeface="FiraMono Nerd Font Medium" panose="020B0609050000020004" pitchFamily="49" charset="0"/>
-              </a:rPr>
-              <a:t>(n: </a:t>
-            </a:r>
-            <a:r>
-              <a:rPr lang="en-US" altLang="zh-CN" sz="2400" b="0" i="0" dirty="0">
-                <a:solidFill>
-                  <a:srgbClr val="C578DD"/>
-                </a:solidFill>
-                <a:effectLst/>
-                <a:latin typeface="FiraMono Nerd Font Medium" panose="020B0609050000020004" pitchFamily="49" charset="0"/>
-                <a:ea typeface="FiraMono Nerd Font Medium" panose="020B0609050000020004" pitchFamily="49" charset="0"/>
-              </a:rPr>
-              <a:t>u32</a:t>
-            </a:r>
-            <a:r>
-              <a:rPr lang="en-US" altLang="zh-CN" sz="2400" b="0" i="0" dirty="0">
-                <a:solidFill>
-                  <a:srgbClr val="AAB1BF"/>
-                </a:solidFill>
-                <a:effectLst/>
-                <a:latin typeface="FiraMono Nerd Font Medium" panose="020B0609050000020004" pitchFamily="49" charset="0"/>
-                <a:ea typeface="FiraMono Nerd Font Medium" panose="020B0609050000020004" pitchFamily="49" charset="0"/>
-              </a:rPr>
-              <a:t>) -&gt; </a:t>
-            </a:r>
-            <a:r>
-              <a:rPr lang="en-US" altLang="zh-CN" sz="2400" b="0" i="0" dirty="0">
-                <a:solidFill>
-                  <a:srgbClr val="C578DD"/>
-                </a:solidFill>
-                <a:effectLst/>
-                <a:latin typeface="FiraMono Nerd Font Medium" panose="020B0609050000020004" pitchFamily="49" charset="0"/>
-                <a:ea typeface="FiraMono Nerd Font Medium" panose="020B0609050000020004" pitchFamily="49" charset="0"/>
-              </a:rPr>
-              <a:t>u64</a:t>
-            </a:r>
-            <a:r>
-              <a:rPr lang="en-US" altLang="zh-CN" sz="2400" b="0" i="0" dirty="0">
-                <a:solidFill>
-                  <a:srgbClr val="AAB1BF"/>
-                </a:solidFill>
-                <a:effectLst/>
-                <a:latin typeface="FiraMono Nerd Font Medium" panose="020B0609050000020004" pitchFamily="49" charset="0"/>
-                <a:ea typeface="FiraMono Nerd Font Medium" panose="020B0609050000020004" pitchFamily="49" charset="0"/>
-              </a:rPr>
-              <a:t> {</a:t>
-            </a:r>
-            <a:br>
-              <a:rPr lang="en-US" altLang="zh-CN" sz="2400" dirty="0">
-                <a:latin typeface="FiraMono Nerd Font Medium" panose="020B0609050000020004" pitchFamily="49" charset="0"/>
-                <a:ea typeface="FiraMono Nerd Font Medium" panose="020B0609050000020004" pitchFamily="49" charset="0"/>
-              </a:rPr>
-            </a:br>
-            <a:r>
-              <a:rPr lang="en-US" altLang="zh-CN" sz="2400" b="0" i="0" dirty="0">
-                <a:solidFill>
-                  <a:srgbClr val="AAB1BF"/>
-                </a:solidFill>
-                <a:effectLst/>
-                <a:latin typeface="FiraMono Nerd Font Medium" panose="020B0609050000020004" pitchFamily="49" charset="0"/>
-                <a:ea typeface="FiraMono Nerd Font Medium" panose="020B0609050000020004" pitchFamily="49" charset="0"/>
-              </a:rPr>
-              <a:t>    </a:t>
-            </a:r>
-            <a:r>
-              <a:rPr lang="en-US" altLang="zh-CN" sz="2400" b="0" i="0" dirty="0">
-                <a:solidFill>
-                  <a:srgbClr val="C578DD"/>
-                </a:solidFill>
-                <a:effectLst/>
-                <a:latin typeface="FiraMono Nerd Font Medium" panose="020B0609050000020004" pitchFamily="49" charset="0"/>
-                <a:ea typeface="FiraMono Nerd Font Medium" panose="020B0609050000020004" pitchFamily="49" charset="0"/>
-              </a:rPr>
-              <a:t>if</a:t>
-            </a:r>
-            <a:r>
-              <a:rPr lang="en-US" altLang="zh-CN" sz="2400" b="0" i="0" dirty="0">
-                <a:solidFill>
-                  <a:srgbClr val="AAB1BF"/>
-                </a:solidFill>
-                <a:effectLst/>
-                <a:latin typeface="FiraMono Nerd Font Medium" panose="020B0609050000020004" pitchFamily="49" charset="0"/>
-                <a:ea typeface="FiraMono Nerd Font Medium" panose="020B0609050000020004" pitchFamily="49" charset="0"/>
-              </a:rPr>
-              <a:t> n </a:t>
-            </a:r>
-            <a:r>
-              <a:rPr lang="en-US" altLang="zh-CN" sz="2400" b="0" i="0" dirty="0">
-                <a:solidFill>
-                  <a:srgbClr val="61AFEF"/>
-                </a:solidFill>
-                <a:effectLst/>
-                <a:latin typeface="FiraMono Nerd Font Medium" panose="020B0609050000020004" pitchFamily="49" charset="0"/>
-                <a:ea typeface="FiraMono Nerd Font Medium" panose="020B0609050000020004" pitchFamily="49" charset="0"/>
-              </a:rPr>
-              <a:t>&lt;=</a:t>
-            </a:r>
-            <a:r>
-              <a:rPr lang="en-US" altLang="zh-CN" sz="2400" b="0" i="0" dirty="0">
-                <a:solidFill>
-                  <a:srgbClr val="AAB1BF"/>
-                </a:solidFill>
-                <a:effectLst/>
-                <a:latin typeface="FiraMono Nerd Font Medium" panose="020B0609050000020004" pitchFamily="49" charset="0"/>
-                <a:ea typeface="FiraMono Nerd Font Medium" panose="020B0609050000020004" pitchFamily="49" charset="0"/>
-              </a:rPr>
-              <a:t> </a:t>
-            </a:r>
-            <a:r>
-              <a:rPr lang="en-US" altLang="zh-CN" sz="2400" b="0" i="0" dirty="0">
-                <a:solidFill>
-                  <a:srgbClr val="D19965"/>
-                </a:solidFill>
-                <a:effectLst/>
-                <a:latin typeface="FiraMono Nerd Font Medium" panose="020B0609050000020004" pitchFamily="49" charset="0"/>
-                <a:ea typeface="FiraMono Nerd Font Medium" panose="020B0609050000020004" pitchFamily="49" charset="0"/>
-              </a:rPr>
-              <a:t>1</a:t>
-            </a:r>
-            <a:r>
-              <a:rPr lang="en-US" altLang="zh-CN" sz="2400" b="0" i="0" dirty="0">
-                <a:solidFill>
-                  <a:srgbClr val="AAB1BF"/>
-                </a:solidFill>
-                <a:effectLst/>
-                <a:latin typeface="FiraMono Nerd Font Medium" panose="020B0609050000020004" pitchFamily="49" charset="0"/>
-                <a:ea typeface="FiraMono Nerd Font Medium" panose="020B0609050000020004" pitchFamily="49" charset="0"/>
-              </a:rPr>
-              <a:t> {</a:t>
-            </a:r>
-            <a:br>
-              <a:rPr lang="en-US" altLang="zh-CN" sz="2400" dirty="0">
-                <a:latin typeface="FiraMono Nerd Font Medium" panose="020B0609050000020004" pitchFamily="49" charset="0"/>
-                <a:ea typeface="FiraMono Nerd Font Medium" panose="020B0609050000020004" pitchFamily="49" charset="0"/>
-              </a:rPr>
-            </a:br>
-            <a:r>
-              <a:rPr lang="en-US" altLang="zh-CN" sz="2400" b="0" i="0" dirty="0">
-                <a:solidFill>
-                  <a:srgbClr val="AAB1BF"/>
-                </a:solidFill>
-                <a:effectLst/>
-                <a:latin typeface="FiraMono Nerd Font Medium" panose="020B0609050000020004" pitchFamily="49" charset="0"/>
-                <a:ea typeface="FiraMono Nerd Font Medium" panose="020B0609050000020004" pitchFamily="49" charset="0"/>
-              </a:rPr>
-              <a:t>        </a:t>
-            </a:r>
-            <a:r>
-              <a:rPr lang="en-US" altLang="zh-CN" sz="2400" b="0" i="0" dirty="0">
-                <a:solidFill>
-                  <a:srgbClr val="C578DD"/>
-                </a:solidFill>
-                <a:effectLst/>
-                <a:latin typeface="FiraMono Nerd Font Medium" panose="020B0609050000020004" pitchFamily="49" charset="0"/>
-                <a:ea typeface="FiraMono Nerd Font Medium" panose="020B0609050000020004" pitchFamily="49" charset="0"/>
-              </a:rPr>
-              <a:t>return</a:t>
-            </a:r>
-            <a:r>
-              <a:rPr lang="en-US" altLang="zh-CN" sz="2400" b="0" i="0" dirty="0">
-                <a:solidFill>
-                  <a:srgbClr val="AAB1BF"/>
-                </a:solidFill>
-                <a:effectLst/>
-                <a:latin typeface="FiraMono Nerd Font Medium" panose="020B0609050000020004" pitchFamily="49" charset="0"/>
-                <a:ea typeface="FiraMono Nerd Font Medium" panose="020B0609050000020004" pitchFamily="49" charset="0"/>
-              </a:rPr>
-              <a:t> n </a:t>
-            </a:r>
-            <a:r>
-              <a:rPr lang="en-US" altLang="zh-CN" sz="2400" b="0" i="0" dirty="0">
-                <a:solidFill>
-                  <a:srgbClr val="C578DD"/>
-                </a:solidFill>
-                <a:effectLst/>
-                <a:latin typeface="FiraMono Nerd Font Medium" panose="020B0609050000020004" pitchFamily="49" charset="0"/>
-                <a:ea typeface="FiraMono Nerd Font Medium" panose="020B0609050000020004" pitchFamily="49" charset="0"/>
-              </a:rPr>
-              <a:t>as</a:t>
-            </a:r>
-            <a:r>
-              <a:rPr lang="en-US" altLang="zh-CN" sz="2400" b="0" i="0" dirty="0">
-                <a:solidFill>
-                  <a:srgbClr val="AAB1BF"/>
-                </a:solidFill>
-                <a:effectLst/>
-                <a:latin typeface="FiraMono Nerd Font Medium" panose="020B0609050000020004" pitchFamily="49" charset="0"/>
-                <a:ea typeface="FiraMono Nerd Font Medium" panose="020B0609050000020004" pitchFamily="49" charset="0"/>
-              </a:rPr>
-              <a:t> </a:t>
-            </a:r>
-            <a:r>
-              <a:rPr lang="en-US" altLang="zh-CN" sz="2400" b="0" i="0" dirty="0">
-                <a:solidFill>
-                  <a:srgbClr val="C578DD"/>
-                </a:solidFill>
-                <a:effectLst/>
-                <a:latin typeface="FiraMono Nerd Font Medium" panose="020B0609050000020004" pitchFamily="49" charset="0"/>
-                <a:ea typeface="FiraMono Nerd Font Medium" panose="020B0609050000020004" pitchFamily="49" charset="0"/>
-              </a:rPr>
-              <a:t>u64</a:t>
-            </a:r>
-            <a:r>
-              <a:rPr lang="en-US" altLang="zh-CN" sz="2400" b="0" i="0" dirty="0">
-                <a:solidFill>
-                  <a:srgbClr val="AAB1BF"/>
-                </a:solidFill>
-                <a:effectLst/>
-                <a:latin typeface="FiraMono Nerd Font Medium" panose="020B0609050000020004" pitchFamily="49" charset="0"/>
-                <a:ea typeface="FiraMono Nerd Font Medium" panose="020B0609050000020004" pitchFamily="49" charset="0"/>
-              </a:rPr>
-              <a:t>;</a:t>
-            </a:r>
-            <a:br>
-              <a:rPr lang="en-US" altLang="zh-CN" sz="2400" dirty="0">
-                <a:latin typeface="FiraMono Nerd Font Medium" panose="020B0609050000020004" pitchFamily="49" charset="0"/>
-                <a:ea typeface="FiraMono Nerd Font Medium" panose="020B0609050000020004" pitchFamily="49" charset="0"/>
-              </a:rPr>
-            </a:br>
-            <a:r>
-              <a:rPr lang="en-US" altLang="zh-CN" sz="2400" b="0" i="0" dirty="0">
-                <a:solidFill>
-                  <a:srgbClr val="AAB1BF"/>
-                </a:solidFill>
-                <a:effectLst/>
-                <a:latin typeface="FiraMono Nerd Font Medium" panose="020B0609050000020004" pitchFamily="49" charset="0"/>
-                <a:ea typeface="FiraMono Nerd Font Medium" panose="020B0609050000020004" pitchFamily="49" charset="0"/>
-              </a:rPr>
-              <a:t>    }</a:t>
-            </a:r>
-            <a:br>
-              <a:rPr lang="en-US" altLang="zh-CN" sz="2400" dirty="0">
-                <a:latin typeface="FiraMono Nerd Font Medium" panose="020B0609050000020004" pitchFamily="49" charset="0"/>
-                <a:ea typeface="FiraMono Nerd Font Medium" panose="020B0609050000020004" pitchFamily="49" charset="0"/>
-              </a:rPr>
-            </a:br>
-            <a:r>
-              <a:rPr lang="en-US" altLang="zh-CN" sz="2400" b="0" i="0" dirty="0">
-                <a:solidFill>
-                  <a:srgbClr val="AAB1BF"/>
-                </a:solidFill>
-                <a:effectLst/>
-                <a:latin typeface="FiraMono Nerd Font Medium" panose="020B0609050000020004" pitchFamily="49" charset="0"/>
-                <a:ea typeface="FiraMono Nerd Font Medium" panose="020B0609050000020004" pitchFamily="49" charset="0"/>
-              </a:rPr>
-              <a:t>    </a:t>
-            </a:r>
-            <a:r>
-              <a:rPr lang="en-US" altLang="zh-CN" sz="2400" b="0" i="0" dirty="0">
-                <a:solidFill>
-                  <a:srgbClr val="C578DD"/>
-                </a:solidFill>
-                <a:effectLst/>
-                <a:latin typeface="FiraMono Nerd Font Medium" panose="020B0609050000020004" pitchFamily="49" charset="0"/>
-                <a:ea typeface="FiraMono Nerd Font Medium" panose="020B0609050000020004" pitchFamily="49" charset="0"/>
-              </a:rPr>
-              <a:t>let</a:t>
-            </a:r>
-            <a:r>
-              <a:rPr lang="en-US" altLang="zh-CN" sz="2400" b="0" i="0" dirty="0">
-                <a:solidFill>
-                  <a:srgbClr val="AAB1BF"/>
-                </a:solidFill>
-                <a:effectLst/>
-                <a:latin typeface="FiraMono Nerd Font Medium" panose="020B0609050000020004" pitchFamily="49" charset="0"/>
-                <a:ea typeface="FiraMono Nerd Font Medium" panose="020B0609050000020004" pitchFamily="49" charset="0"/>
-              </a:rPr>
-              <a:t> </a:t>
-            </a:r>
-            <a:r>
-              <a:rPr lang="en-US" altLang="zh-CN" sz="2400" b="0" i="0" dirty="0">
-                <a:solidFill>
-                  <a:srgbClr val="C578DD"/>
-                </a:solidFill>
-                <a:effectLst/>
-                <a:latin typeface="FiraMono Nerd Font Medium" panose="020B0609050000020004" pitchFamily="49" charset="0"/>
-                <a:ea typeface="FiraMono Nerd Font Medium" panose="020B0609050000020004" pitchFamily="49" charset="0"/>
-              </a:rPr>
-              <a:t>mut</a:t>
-            </a:r>
-            <a:r>
-              <a:rPr lang="en-US" altLang="zh-CN" sz="2400" b="0" i="0" dirty="0">
-                <a:solidFill>
-                  <a:srgbClr val="AAB1BF"/>
-                </a:solidFill>
-                <a:effectLst/>
-                <a:latin typeface="FiraMono Nerd Font Medium" panose="020B0609050000020004" pitchFamily="49" charset="0"/>
-                <a:ea typeface="FiraMono Nerd Font Medium" panose="020B0609050000020004" pitchFamily="49" charset="0"/>
-              </a:rPr>
-              <a:t> a </a:t>
-            </a:r>
-            <a:r>
-              <a:rPr lang="en-US" altLang="zh-CN" sz="2400" b="0" i="0" dirty="0">
-                <a:solidFill>
-                  <a:srgbClr val="61AFEF"/>
-                </a:solidFill>
-                <a:effectLst/>
-                <a:latin typeface="FiraMono Nerd Font Medium" panose="020B0609050000020004" pitchFamily="49" charset="0"/>
-                <a:ea typeface="FiraMono Nerd Font Medium" panose="020B0609050000020004" pitchFamily="49" charset="0"/>
-              </a:rPr>
-              <a:t>=</a:t>
-            </a:r>
-            <a:r>
-              <a:rPr lang="en-US" altLang="zh-CN" sz="2400" b="0" i="0" dirty="0">
-                <a:solidFill>
-                  <a:srgbClr val="AAB1BF"/>
-                </a:solidFill>
-                <a:effectLst/>
-                <a:latin typeface="FiraMono Nerd Font Medium" panose="020B0609050000020004" pitchFamily="49" charset="0"/>
-                <a:ea typeface="FiraMono Nerd Font Medium" panose="020B0609050000020004" pitchFamily="49" charset="0"/>
-              </a:rPr>
-              <a:t> </a:t>
-            </a:r>
-            <a:r>
-              <a:rPr lang="en-US" altLang="zh-CN" sz="2400" b="0" i="0" dirty="0">
-                <a:solidFill>
-                  <a:srgbClr val="D19965"/>
-                </a:solidFill>
-                <a:effectLst/>
-                <a:latin typeface="FiraMono Nerd Font Medium" panose="020B0609050000020004" pitchFamily="49" charset="0"/>
-                <a:ea typeface="FiraMono Nerd Font Medium" panose="020B0609050000020004" pitchFamily="49" charset="0"/>
-              </a:rPr>
-              <a:t>0</a:t>
-            </a:r>
-            <a:r>
-              <a:rPr lang="en-US" altLang="zh-CN" sz="2400" b="0" i="0" dirty="0">
-                <a:solidFill>
-                  <a:srgbClr val="AAB1BF"/>
-                </a:solidFill>
-                <a:effectLst/>
-                <a:latin typeface="FiraMono Nerd Font Medium" panose="020B0609050000020004" pitchFamily="49" charset="0"/>
-                <a:ea typeface="FiraMono Nerd Font Medium" panose="020B0609050000020004" pitchFamily="49" charset="0"/>
-              </a:rPr>
-              <a:t>;</a:t>
-            </a:r>
-            <a:br>
-              <a:rPr lang="en-US" altLang="zh-CN" sz="2400" dirty="0">
-                <a:latin typeface="FiraMono Nerd Font Medium" panose="020B0609050000020004" pitchFamily="49" charset="0"/>
-                <a:ea typeface="FiraMono Nerd Font Medium" panose="020B0609050000020004" pitchFamily="49" charset="0"/>
-              </a:rPr>
-            </a:br>
-            <a:r>
-              <a:rPr lang="en-US" altLang="zh-CN" sz="2400" b="0" i="0" dirty="0">
-                <a:solidFill>
-                  <a:srgbClr val="AAB1BF"/>
-                </a:solidFill>
-                <a:effectLst/>
-                <a:latin typeface="FiraMono Nerd Font Medium" panose="020B0609050000020004" pitchFamily="49" charset="0"/>
-                <a:ea typeface="FiraMono Nerd Font Medium" panose="020B0609050000020004" pitchFamily="49" charset="0"/>
-              </a:rPr>
-              <a:t>    </a:t>
-            </a:r>
-            <a:r>
-              <a:rPr lang="en-US" altLang="zh-CN" sz="2400" b="0" i="0" dirty="0">
-                <a:solidFill>
-                  <a:srgbClr val="C578DD"/>
-                </a:solidFill>
-                <a:effectLst/>
-                <a:latin typeface="FiraMono Nerd Font Medium" panose="020B0609050000020004" pitchFamily="49" charset="0"/>
-                <a:ea typeface="FiraMono Nerd Font Medium" panose="020B0609050000020004" pitchFamily="49" charset="0"/>
-              </a:rPr>
-              <a:t>let</a:t>
-            </a:r>
-            <a:r>
-              <a:rPr lang="en-US" altLang="zh-CN" sz="2400" b="0" i="0" dirty="0">
-                <a:solidFill>
-                  <a:srgbClr val="AAB1BF"/>
-                </a:solidFill>
-                <a:effectLst/>
-                <a:latin typeface="FiraMono Nerd Font Medium" panose="020B0609050000020004" pitchFamily="49" charset="0"/>
-                <a:ea typeface="FiraMono Nerd Font Medium" panose="020B0609050000020004" pitchFamily="49" charset="0"/>
-              </a:rPr>
-              <a:t> </a:t>
-            </a:r>
-            <a:r>
-              <a:rPr lang="en-US" altLang="zh-CN" sz="2400" b="0" i="0" dirty="0">
-                <a:solidFill>
-                  <a:srgbClr val="C578DD"/>
-                </a:solidFill>
-                <a:effectLst/>
-                <a:latin typeface="FiraMono Nerd Font Medium" panose="020B0609050000020004" pitchFamily="49" charset="0"/>
-                <a:ea typeface="FiraMono Nerd Font Medium" panose="020B0609050000020004" pitchFamily="49" charset="0"/>
-              </a:rPr>
-              <a:t>mut</a:t>
-            </a:r>
-            <a:r>
-              <a:rPr lang="en-US" altLang="zh-CN" sz="2400" b="0" i="0" dirty="0">
-                <a:solidFill>
-                  <a:srgbClr val="AAB1BF"/>
-                </a:solidFill>
-                <a:effectLst/>
-                <a:latin typeface="FiraMono Nerd Font Medium" panose="020B0609050000020004" pitchFamily="49" charset="0"/>
-                <a:ea typeface="FiraMono Nerd Font Medium" panose="020B0609050000020004" pitchFamily="49" charset="0"/>
-              </a:rPr>
-              <a:t> b </a:t>
-            </a:r>
-            <a:r>
-              <a:rPr lang="en-US" altLang="zh-CN" sz="2400" b="0" i="0" dirty="0">
-                <a:solidFill>
-                  <a:srgbClr val="61AFEF"/>
-                </a:solidFill>
-                <a:effectLst/>
-                <a:latin typeface="FiraMono Nerd Font Medium" panose="020B0609050000020004" pitchFamily="49" charset="0"/>
-                <a:ea typeface="FiraMono Nerd Font Medium" panose="020B0609050000020004" pitchFamily="49" charset="0"/>
-              </a:rPr>
-              <a:t>=</a:t>
-            </a:r>
-            <a:r>
-              <a:rPr lang="en-US" altLang="zh-CN" sz="2400" b="0" i="0" dirty="0">
-                <a:solidFill>
-                  <a:srgbClr val="AAB1BF"/>
-                </a:solidFill>
-                <a:effectLst/>
-                <a:latin typeface="FiraMono Nerd Font Medium" panose="020B0609050000020004" pitchFamily="49" charset="0"/>
-                <a:ea typeface="FiraMono Nerd Font Medium" panose="020B0609050000020004" pitchFamily="49" charset="0"/>
-              </a:rPr>
-              <a:t> </a:t>
-            </a:r>
-            <a:r>
-              <a:rPr lang="en-US" altLang="zh-CN" sz="2400" b="0" i="0" dirty="0">
-                <a:solidFill>
-                  <a:srgbClr val="D19965"/>
-                </a:solidFill>
-                <a:effectLst/>
-                <a:latin typeface="FiraMono Nerd Font Medium" panose="020B0609050000020004" pitchFamily="49" charset="0"/>
-                <a:ea typeface="FiraMono Nerd Font Medium" panose="020B0609050000020004" pitchFamily="49" charset="0"/>
-              </a:rPr>
-              <a:t>1</a:t>
-            </a:r>
-            <a:r>
-              <a:rPr lang="en-US" altLang="zh-CN" sz="2400" b="0" i="0" dirty="0">
-                <a:solidFill>
-                  <a:srgbClr val="AAB1BF"/>
-                </a:solidFill>
-                <a:effectLst/>
-                <a:latin typeface="FiraMono Nerd Font Medium" panose="020B0609050000020004" pitchFamily="49" charset="0"/>
-                <a:ea typeface="FiraMono Nerd Font Medium" panose="020B0609050000020004" pitchFamily="49" charset="0"/>
-              </a:rPr>
-              <a:t>;</a:t>
-            </a:r>
-            <a:br>
-              <a:rPr lang="en-US" altLang="zh-CN" sz="2400" dirty="0">
-                <a:latin typeface="FiraMono Nerd Font Medium" panose="020B0609050000020004" pitchFamily="49" charset="0"/>
-                <a:ea typeface="FiraMono Nerd Font Medium" panose="020B0609050000020004" pitchFamily="49" charset="0"/>
-              </a:rPr>
-            </a:br>
-            <a:r>
-              <a:rPr lang="en-US" altLang="zh-CN" sz="2400" b="0" i="0" dirty="0">
-                <a:solidFill>
-                  <a:srgbClr val="AAB1BF"/>
-                </a:solidFill>
-                <a:effectLst/>
-                <a:latin typeface="FiraMono Nerd Font Medium" panose="020B0609050000020004" pitchFamily="49" charset="0"/>
-                <a:ea typeface="FiraMono Nerd Font Medium" panose="020B0609050000020004" pitchFamily="49" charset="0"/>
-              </a:rPr>
-              <a:t>    </a:t>
-            </a:r>
-            <a:r>
-              <a:rPr lang="en-US" altLang="zh-CN" sz="2400" b="0" i="0" dirty="0">
-                <a:solidFill>
-                  <a:srgbClr val="C578DD"/>
-                </a:solidFill>
-                <a:effectLst/>
-                <a:latin typeface="FiraMono Nerd Font Medium" panose="020B0609050000020004" pitchFamily="49" charset="0"/>
-                <a:ea typeface="FiraMono Nerd Font Medium" panose="020B0609050000020004" pitchFamily="49" charset="0"/>
-              </a:rPr>
-              <a:t>for</a:t>
-            </a:r>
-            <a:r>
-              <a:rPr lang="en-US" altLang="zh-CN" sz="2400" b="0" i="0" dirty="0">
-                <a:solidFill>
-                  <a:srgbClr val="AAB1BF"/>
-                </a:solidFill>
-                <a:effectLst/>
-                <a:latin typeface="FiraMono Nerd Font Medium" panose="020B0609050000020004" pitchFamily="49" charset="0"/>
-                <a:ea typeface="FiraMono Nerd Font Medium" panose="020B0609050000020004" pitchFamily="49" charset="0"/>
-              </a:rPr>
-              <a:t> _ </a:t>
-            </a:r>
-            <a:r>
-              <a:rPr lang="en-US" altLang="zh-CN" sz="2400" b="0" i="0" dirty="0">
-                <a:solidFill>
-                  <a:srgbClr val="C578DD"/>
-                </a:solidFill>
-                <a:effectLst/>
-                <a:latin typeface="FiraMono Nerd Font Medium" panose="020B0609050000020004" pitchFamily="49" charset="0"/>
-                <a:ea typeface="FiraMono Nerd Font Medium" panose="020B0609050000020004" pitchFamily="49" charset="0"/>
-              </a:rPr>
-              <a:t>in</a:t>
-            </a:r>
-            <a:r>
-              <a:rPr lang="en-US" altLang="zh-CN" sz="2400" b="0" i="0" dirty="0">
-                <a:solidFill>
-                  <a:srgbClr val="AAB1BF"/>
-                </a:solidFill>
-                <a:effectLst/>
-                <a:latin typeface="FiraMono Nerd Font Medium" panose="020B0609050000020004" pitchFamily="49" charset="0"/>
-                <a:ea typeface="FiraMono Nerd Font Medium" panose="020B0609050000020004" pitchFamily="49" charset="0"/>
-              </a:rPr>
-              <a:t> </a:t>
-            </a:r>
-            <a:r>
-              <a:rPr lang="en-US" altLang="zh-CN" sz="2400" b="0" i="0" dirty="0">
-                <a:solidFill>
-                  <a:srgbClr val="D19965"/>
-                </a:solidFill>
-                <a:effectLst/>
-                <a:latin typeface="FiraMono Nerd Font Medium" panose="020B0609050000020004" pitchFamily="49" charset="0"/>
-                <a:ea typeface="FiraMono Nerd Font Medium" panose="020B0609050000020004" pitchFamily="49" charset="0"/>
-              </a:rPr>
-              <a:t>2</a:t>
-            </a:r>
-            <a:r>
-              <a:rPr lang="en-US" altLang="zh-CN" sz="2400" b="0" i="0" dirty="0">
-                <a:solidFill>
-                  <a:srgbClr val="AAB1BF"/>
-                </a:solidFill>
-                <a:effectLst/>
-                <a:latin typeface="FiraMono Nerd Font Medium" panose="020B0609050000020004" pitchFamily="49" charset="0"/>
-                <a:ea typeface="FiraMono Nerd Font Medium" panose="020B0609050000020004" pitchFamily="49" charset="0"/>
-              </a:rPr>
-              <a:t>..=n {</a:t>
-            </a:r>
-            <a:br>
-              <a:rPr lang="en-US" altLang="zh-CN" sz="2400" dirty="0">
-                <a:latin typeface="FiraMono Nerd Font Medium" panose="020B0609050000020004" pitchFamily="49" charset="0"/>
-                <a:ea typeface="FiraMono Nerd Font Medium" panose="020B0609050000020004" pitchFamily="49" charset="0"/>
-              </a:rPr>
-            </a:br>
-            <a:r>
-              <a:rPr lang="en-US" altLang="zh-CN" sz="2400" b="0" i="0" dirty="0">
-                <a:solidFill>
-                  <a:srgbClr val="AAB1BF"/>
-                </a:solidFill>
-                <a:effectLst/>
-                <a:latin typeface="FiraMono Nerd Font Medium" panose="020B0609050000020004" pitchFamily="49" charset="0"/>
-                <a:ea typeface="FiraMono Nerd Font Medium" panose="020B0609050000020004" pitchFamily="49" charset="0"/>
-              </a:rPr>
-              <a:t>        </a:t>
-            </a:r>
-            <a:r>
-              <a:rPr lang="en-US" altLang="zh-CN" sz="2400" b="0" i="0" dirty="0">
-                <a:solidFill>
-                  <a:srgbClr val="C578DD"/>
-                </a:solidFill>
-                <a:effectLst/>
-                <a:latin typeface="FiraMono Nerd Font Medium" panose="020B0609050000020004" pitchFamily="49" charset="0"/>
-                <a:ea typeface="FiraMono Nerd Font Medium" panose="020B0609050000020004" pitchFamily="49" charset="0"/>
-              </a:rPr>
-              <a:t>let</a:t>
-            </a:r>
-            <a:r>
-              <a:rPr lang="en-US" altLang="zh-CN" sz="2400" b="0" i="0" dirty="0">
-                <a:solidFill>
-                  <a:srgbClr val="AAB1BF"/>
-                </a:solidFill>
-                <a:effectLst/>
-                <a:latin typeface="FiraMono Nerd Font Medium" panose="020B0609050000020004" pitchFamily="49" charset="0"/>
-                <a:ea typeface="FiraMono Nerd Font Medium" panose="020B0609050000020004" pitchFamily="49" charset="0"/>
-              </a:rPr>
-              <a:t> next </a:t>
-            </a:r>
-            <a:r>
-              <a:rPr lang="en-US" altLang="zh-CN" sz="2400" b="0" i="0" dirty="0">
-                <a:solidFill>
-                  <a:srgbClr val="61AFEF"/>
-                </a:solidFill>
-                <a:effectLst/>
-                <a:latin typeface="FiraMono Nerd Font Medium" panose="020B0609050000020004" pitchFamily="49" charset="0"/>
-                <a:ea typeface="FiraMono Nerd Font Medium" panose="020B0609050000020004" pitchFamily="49" charset="0"/>
-              </a:rPr>
-              <a:t>=</a:t>
-            </a:r>
-            <a:r>
-              <a:rPr lang="en-US" altLang="zh-CN" sz="2400" b="0" i="0" dirty="0">
-                <a:solidFill>
-                  <a:srgbClr val="AAB1BF"/>
-                </a:solidFill>
-                <a:effectLst/>
-                <a:latin typeface="FiraMono Nerd Font Medium" panose="020B0609050000020004" pitchFamily="49" charset="0"/>
-                <a:ea typeface="FiraMono Nerd Font Medium" panose="020B0609050000020004" pitchFamily="49" charset="0"/>
-              </a:rPr>
-              <a:t> a </a:t>
-            </a:r>
-            <a:r>
-              <a:rPr lang="en-US" altLang="zh-CN" sz="2400" b="0" i="0" dirty="0">
-                <a:solidFill>
-                  <a:srgbClr val="61AFEF"/>
-                </a:solidFill>
-                <a:effectLst/>
-                <a:latin typeface="FiraMono Nerd Font Medium" panose="020B0609050000020004" pitchFamily="49" charset="0"/>
-                <a:ea typeface="FiraMono Nerd Font Medium" panose="020B0609050000020004" pitchFamily="49" charset="0"/>
-              </a:rPr>
-              <a:t>+</a:t>
-            </a:r>
-            <a:r>
-              <a:rPr lang="en-US" altLang="zh-CN" sz="2400" b="0" i="0" dirty="0">
-                <a:solidFill>
-                  <a:srgbClr val="AAB1BF"/>
-                </a:solidFill>
-                <a:effectLst/>
-                <a:latin typeface="FiraMono Nerd Font Medium" panose="020B0609050000020004" pitchFamily="49" charset="0"/>
-                <a:ea typeface="FiraMono Nerd Font Medium" panose="020B0609050000020004" pitchFamily="49" charset="0"/>
-              </a:rPr>
-              <a:t> b;</a:t>
-            </a:r>
-            <a:br>
-              <a:rPr lang="en-US" altLang="zh-CN" sz="2400" dirty="0">
-                <a:latin typeface="FiraMono Nerd Font Medium" panose="020B0609050000020004" pitchFamily="49" charset="0"/>
-                <a:ea typeface="FiraMono Nerd Font Medium" panose="020B0609050000020004" pitchFamily="49" charset="0"/>
-              </a:rPr>
-            </a:br>
-            <a:r>
-              <a:rPr lang="en-US" altLang="zh-CN" sz="2400" b="0" i="0" dirty="0">
-                <a:solidFill>
-                  <a:srgbClr val="AAB1BF"/>
-                </a:solidFill>
-                <a:effectLst/>
-                <a:latin typeface="FiraMono Nerd Font Medium" panose="020B0609050000020004" pitchFamily="49" charset="0"/>
-                <a:ea typeface="FiraMono Nerd Font Medium" panose="020B0609050000020004" pitchFamily="49" charset="0"/>
-              </a:rPr>
-              <a:t>        a </a:t>
-            </a:r>
-            <a:r>
-              <a:rPr lang="en-US" altLang="zh-CN" sz="2400" b="0" i="0" dirty="0">
-                <a:solidFill>
-                  <a:srgbClr val="61AFEF"/>
-                </a:solidFill>
-                <a:effectLst/>
-                <a:latin typeface="FiraMono Nerd Font Medium" panose="020B0609050000020004" pitchFamily="49" charset="0"/>
-                <a:ea typeface="FiraMono Nerd Font Medium" panose="020B0609050000020004" pitchFamily="49" charset="0"/>
-              </a:rPr>
-              <a:t>=</a:t>
-            </a:r>
-            <a:r>
-              <a:rPr lang="en-US" altLang="zh-CN" sz="2400" b="0" i="0" dirty="0">
-                <a:solidFill>
-                  <a:srgbClr val="AAB1BF"/>
-                </a:solidFill>
-                <a:effectLst/>
-                <a:latin typeface="FiraMono Nerd Font Medium" panose="020B0609050000020004" pitchFamily="49" charset="0"/>
-                <a:ea typeface="FiraMono Nerd Font Medium" panose="020B0609050000020004" pitchFamily="49" charset="0"/>
-              </a:rPr>
-              <a:t> b;</a:t>
-            </a:r>
-            <a:br>
-              <a:rPr lang="en-US" altLang="zh-CN" sz="2400" dirty="0">
-                <a:latin typeface="FiraMono Nerd Font Medium" panose="020B0609050000020004" pitchFamily="49" charset="0"/>
-                <a:ea typeface="FiraMono Nerd Font Medium" panose="020B0609050000020004" pitchFamily="49" charset="0"/>
-              </a:rPr>
-            </a:br>
-            <a:r>
-              <a:rPr lang="en-US" altLang="zh-CN" sz="2400" b="0" i="0" dirty="0">
-                <a:solidFill>
-                  <a:srgbClr val="AAB1BF"/>
-                </a:solidFill>
-                <a:effectLst/>
-                <a:latin typeface="FiraMono Nerd Font Medium" panose="020B0609050000020004" pitchFamily="49" charset="0"/>
-                <a:ea typeface="FiraMono Nerd Font Medium" panose="020B0609050000020004" pitchFamily="49" charset="0"/>
-              </a:rPr>
-              <a:t>        b </a:t>
-            </a:r>
-            <a:r>
-              <a:rPr lang="en-US" altLang="zh-CN" sz="2400" b="0" i="0" dirty="0">
-                <a:solidFill>
-                  <a:srgbClr val="61AFEF"/>
-                </a:solidFill>
-                <a:effectLst/>
-                <a:latin typeface="FiraMono Nerd Font Medium" panose="020B0609050000020004" pitchFamily="49" charset="0"/>
-                <a:ea typeface="FiraMono Nerd Font Medium" panose="020B0609050000020004" pitchFamily="49" charset="0"/>
-              </a:rPr>
-              <a:t>=</a:t>
-            </a:r>
-            <a:r>
-              <a:rPr lang="en-US" altLang="zh-CN" sz="2400" b="0" i="0" dirty="0">
-                <a:solidFill>
-                  <a:srgbClr val="AAB1BF"/>
-                </a:solidFill>
-                <a:effectLst/>
-                <a:latin typeface="FiraMono Nerd Font Medium" panose="020B0609050000020004" pitchFamily="49" charset="0"/>
-                <a:ea typeface="FiraMono Nerd Font Medium" panose="020B0609050000020004" pitchFamily="49" charset="0"/>
-              </a:rPr>
-              <a:t> next;</a:t>
-            </a:r>
-            <a:br>
-              <a:rPr lang="en-US" altLang="zh-CN" sz="2400" dirty="0">
-                <a:latin typeface="FiraMono Nerd Font Medium" panose="020B0609050000020004" pitchFamily="49" charset="0"/>
-                <a:ea typeface="FiraMono Nerd Font Medium" panose="020B0609050000020004" pitchFamily="49" charset="0"/>
-              </a:rPr>
-            </a:br>
-            <a:r>
-              <a:rPr lang="en-US" altLang="zh-CN" sz="2400" b="0" i="0" dirty="0">
-                <a:solidFill>
-                  <a:srgbClr val="AAB1BF"/>
-                </a:solidFill>
-                <a:effectLst/>
-                <a:latin typeface="FiraMono Nerd Font Medium" panose="020B0609050000020004" pitchFamily="49" charset="0"/>
-                <a:ea typeface="FiraMono Nerd Font Medium" panose="020B0609050000020004" pitchFamily="49" charset="0"/>
-              </a:rPr>
-              <a:t>    }</a:t>
-            </a:r>
-            <a:br>
-              <a:rPr lang="en-US" altLang="zh-CN" sz="2400" dirty="0">
-                <a:latin typeface="FiraMono Nerd Font Medium" panose="020B0609050000020004" pitchFamily="49" charset="0"/>
-                <a:ea typeface="FiraMono Nerd Font Medium" panose="020B0609050000020004" pitchFamily="49" charset="0"/>
-              </a:rPr>
-            </a:br>
-            <a:r>
-              <a:rPr lang="en-US" altLang="zh-CN" sz="2400" b="0" i="0" dirty="0">
-                <a:solidFill>
-                  <a:srgbClr val="AAB1BF"/>
-                </a:solidFill>
-                <a:effectLst/>
-                <a:latin typeface="FiraMono Nerd Font Medium" panose="020B0609050000020004" pitchFamily="49" charset="0"/>
-                <a:ea typeface="FiraMono Nerd Font Medium" panose="020B0609050000020004" pitchFamily="49" charset="0"/>
-              </a:rPr>
-              <a:t>    b</a:t>
-            </a:r>
-            <a:br>
-              <a:rPr lang="en-US" altLang="zh-CN" sz="2400" dirty="0">
-                <a:latin typeface="FiraMono Nerd Font Medium" panose="020B0609050000020004" pitchFamily="49" charset="0"/>
-                <a:ea typeface="FiraMono Nerd Font Medium" panose="020B0609050000020004" pitchFamily="49" charset="0"/>
-              </a:rPr>
-            </a:br>
-            <a:r>
-              <a:rPr lang="en-US" altLang="zh-CN" sz="2400" b="0" i="0" dirty="0">
-                <a:solidFill>
-                  <a:srgbClr val="AAB1BF"/>
-                </a:solidFill>
-                <a:effectLst/>
-                <a:latin typeface="FiraMono Nerd Font Medium" panose="020B0609050000020004" pitchFamily="49" charset="0"/>
-                <a:ea typeface="FiraMono Nerd Font Medium" panose="020B0609050000020004" pitchFamily="49" charset="0"/>
-              </a:rPr>
-              <a:t>}</a:t>
-            </a:r>
-            <a:endParaRPr lang="zh-CN" altLang="en-US" sz="2400" dirty="0">
-              <a:latin typeface="FiraMono Nerd Font Medium" panose="020B0609050000020004" pitchFamily="49" charset="0"/>
-            </a:endParaRPr>
-          </a:p>
-        </p:txBody>
-      </p:sp>
-      <p:sp>
-        <p:nvSpPr>
-          <p:cNvPr id="8" name="文本框 7">
-            <a:extLst>
-              <a:ext uri="{FF2B5EF4-FFF2-40B4-BE49-F238E27FC236}">
-                <a16:creationId xmlns:a16="http://schemas.microsoft.com/office/drawing/2014/main" id="{AAA8C658-E9D5-5E13-C68D-DA4BF07BF1B9}"/>
-              </a:ext>
-            </a:extLst>
-          </p:cNvPr>
-          <p:cNvSpPr txBox="1"/>
-          <p:nvPr/>
-        </p:nvSpPr>
-        <p:spPr>
-          <a:xfrm>
-            <a:off x="2465613" y="2742969"/>
-            <a:ext cx="1491343" cy="4508927"/>
-          </a:xfrm>
-          <a:prstGeom prst="rect">
-            <a:avLst/>
-          </a:prstGeom>
-          <a:noFill/>
-        </p:spPr>
-        <p:txBody>
-          <a:bodyPr wrap="square" rtlCol="0">
-            <a:spAutoFit/>
-          </a:bodyPr>
-          <a:lstStyle/>
-          <a:p>
-            <a:r>
-              <a:rPr lang="zh-CN" altLang="en-US" sz="28000" dirty="0">
+              <a:rPr lang="en-US" altLang="zh-CN" sz="4000" b="1" dirty="0">
                 <a:solidFill>
                   <a:schemeClr val="bg2">
                     <a:lumMod val="90000"/>
@@ -4851,176 +5409,15 @@
                 <a:latin typeface="得意黑" pitchFamily="50" charset="-122"/>
                 <a:ea typeface="得意黑" pitchFamily="50" charset="-122"/>
               </a:rPr>
-              <a:t>？</a:t>
+              <a:t>Compiler</a:t>
             </a:r>
-          </a:p>
-        </p:txBody>
-      </p:sp>
-      <p:pic>
-        <p:nvPicPr>
-          <p:cNvPr id="6" name="图片 5">
-            <a:extLst>
-              <a:ext uri="{FF2B5EF4-FFF2-40B4-BE49-F238E27FC236}">
-                <a16:creationId xmlns:a16="http://schemas.microsoft.com/office/drawing/2014/main" id="{B3789878-43FF-01EF-5AC5-8588E59BE2CE}"/>
-              </a:ext>
-            </a:extLst>
-          </p:cNvPr>
-          <p:cNvPicPr>
-            <a:picLocks noChangeAspect="1"/>
-          </p:cNvPicPr>
-          <p:nvPr/>
-        </p:nvPicPr>
-        <p:blipFill>
-          <a:blip r:embed="rId2"/>
-          <a:stretch>
-            <a:fillRect/>
-          </a:stretch>
-        </p:blipFill>
-        <p:spPr>
-          <a:xfrm>
-            <a:off x="4416878" y="960636"/>
-            <a:ext cx="609600" cy="609600"/>
-          </a:xfrm>
-          <a:prstGeom prst="rect">
-            <a:avLst/>
-          </a:prstGeom>
-        </p:spPr>
-      </p:pic>
-      <p:pic>
-        <p:nvPicPr>
-          <p:cNvPr id="13" name="图片 12">
-            <a:extLst>
-              <a:ext uri="{FF2B5EF4-FFF2-40B4-BE49-F238E27FC236}">
-                <a16:creationId xmlns:a16="http://schemas.microsoft.com/office/drawing/2014/main" id="{FCC0DA18-7001-959F-93B0-2F66ABC076FC}"/>
-              </a:ext>
-            </a:extLst>
-          </p:cNvPr>
-          <p:cNvPicPr>
-            <a:picLocks noChangeAspect="1"/>
-          </p:cNvPicPr>
-          <p:nvPr/>
-        </p:nvPicPr>
-        <p:blipFill>
-          <a:blip r:embed="rId3"/>
-          <a:stretch>
-            <a:fillRect/>
-          </a:stretch>
-        </p:blipFill>
-        <p:spPr>
-          <a:xfrm>
-            <a:off x="10695709" y="5287764"/>
-            <a:ext cx="609600" cy="609600"/>
-          </a:xfrm>
-          <a:prstGeom prst="rect">
-            <a:avLst/>
-          </a:prstGeom>
-        </p:spPr>
-      </p:pic>
-      <p:sp>
-        <p:nvSpPr>
-          <p:cNvPr id="14" name="文本框 13">
-            <a:extLst>
-              <a:ext uri="{FF2B5EF4-FFF2-40B4-BE49-F238E27FC236}">
-                <a16:creationId xmlns:a16="http://schemas.microsoft.com/office/drawing/2014/main" id="{2CCB7684-A656-6143-E00B-609FBE5F51F2}"/>
-              </a:ext>
-            </a:extLst>
-          </p:cNvPr>
-          <p:cNvSpPr txBox="1"/>
-          <p:nvPr/>
-        </p:nvSpPr>
-        <p:spPr>
-          <a:xfrm>
-            <a:off x="4833438" y="823023"/>
-            <a:ext cx="386080" cy="297517"/>
-          </a:xfrm>
-          <a:prstGeom prst="rect">
-            <a:avLst/>
-          </a:prstGeom>
-          <a:noFill/>
-        </p:spPr>
-        <p:txBody>
-          <a:bodyPr wrap="square" rtlCol="0">
-            <a:spAutoFit/>
-          </a:bodyPr>
-          <a:lstStyle/>
-          <a:p>
-            <a:r>
-              <a:rPr lang="en-US" altLang="zh-CN" sz="2000" baseline="30000" dirty="0">
-                <a:solidFill>
-                  <a:schemeClr val="bg1">
-                    <a:lumMod val="95000"/>
-                  </a:schemeClr>
-                </a:solidFill>
-                <a:latin typeface="得意黑" pitchFamily="50" charset="-122"/>
-                <a:ea typeface="得意黑" pitchFamily="50" charset="-122"/>
-              </a:rPr>
-              <a:t>[1]</a:t>
-            </a:r>
-            <a:endParaRPr lang="zh-CN" altLang="en-US" sz="2000" baseline="30000" dirty="0">
-              <a:solidFill>
-                <a:schemeClr val="bg1">
-                  <a:lumMod val="95000"/>
-                </a:schemeClr>
-              </a:solidFill>
-              <a:latin typeface="得意黑" pitchFamily="50" charset="-122"/>
-              <a:ea typeface="得意黑" pitchFamily="50" charset="-122"/>
-            </a:endParaRPr>
-          </a:p>
-        </p:txBody>
-      </p:sp>
-      <p:sp>
-        <p:nvSpPr>
-          <p:cNvPr id="17" name="文本框 16">
-            <a:extLst>
-              <a:ext uri="{FF2B5EF4-FFF2-40B4-BE49-F238E27FC236}">
-                <a16:creationId xmlns:a16="http://schemas.microsoft.com/office/drawing/2014/main" id="{E707A838-F526-98E9-A1E2-17D47ECE072A}"/>
-              </a:ext>
-            </a:extLst>
-          </p:cNvPr>
-          <p:cNvSpPr txBox="1"/>
-          <p:nvPr/>
-        </p:nvSpPr>
-        <p:spPr>
-          <a:xfrm>
-            <a:off x="11207519" y="5287764"/>
-            <a:ext cx="500562" cy="297517"/>
-          </a:xfrm>
-          <a:prstGeom prst="rect">
-            <a:avLst/>
-          </a:prstGeom>
-          <a:noFill/>
-        </p:spPr>
-        <p:txBody>
-          <a:bodyPr wrap="square" rtlCol="0">
-            <a:spAutoFit/>
-          </a:bodyPr>
-          <a:lstStyle/>
-          <a:p>
-            <a:r>
-              <a:rPr lang="en-US" altLang="zh-CN" sz="2000" baseline="30000" dirty="0">
-                <a:solidFill>
-                  <a:schemeClr val="bg1">
-                    <a:lumMod val="95000"/>
-                  </a:schemeClr>
-                </a:solidFill>
-                <a:latin typeface="得意黑" pitchFamily="50" charset="-122"/>
-                <a:ea typeface="得意黑" pitchFamily="50" charset="-122"/>
-              </a:rPr>
-              <a:t>[2]</a:t>
-            </a:r>
-            <a:endParaRPr lang="zh-CN" altLang="en-US" sz="2000" baseline="30000" dirty="0">
-              <a:solidFill>
-                <a:schemeClr val="bg1">
-                  <a:lumMod val="95000"/>
-                </a:schemeClr>
-              </a:solidFill>
-              <a:latin typeface="得意黑" pitchFamily="50" charset="-122"/>
-              <a:ea typeface="得意黑" pitchFamily="50" charset="-122"/>
-            </a:endParaRPr>
           </a:p>
         </p:txBody>
       </p:sp>
     </p:spTree>
+    <p:custDataLst>
+      <p:tags r:id="rId1"/>
+    </p:custDataLst>
     <p:extLst>
       <p:ext uri="{BB962C8B-B14F-4D97-AF65-F5344CB8AC3E}">
         <p14:creationId xmlns:p14="http://schemas.microsoft.com/office/powerpoint/2010/main" val="248129424"/>
@@ -5030,6 +5427,14 @@
   <p:clrMapOvr>
     <a:masterClrMapping/>
   </p:clrMapOvr>
+  <mc:AlternateContent xmlns:mc="http://schemas.openxmlformats.org/markup-compatibility/2006" xmlns:p14="http://schemas.microsoft.com/office/powerpoint/2010/main">
+    <mc:Choice Requires="p14">
+      <p:transition spd="slow" p14:dur="2000" advTm="7000"/>
+    </mc:Choice>
+    <mc:Fallback xmlns="">
+      <p:transition spd="slow" advTm="7000"/>
+    </mc:Fallback>
+  </mc:AlternateContent>
   <p:timing>
     <p:tnLst>
       <p:par>
@@ -5051,7 +5456,7 @@
                             </p:stCondLst>
                             <p:childTnLst>
                               <p:par>
-                                <p:cTn id="5" presetID="10" presetClass="entr" presetSubtype="0" fill="hold" grpId="0" nodeType="clickEffect">
+                                <p:cTn id="5" presetID="1" presetClass="entr" presetSubtype="0" fill="hold" nodeType="clickEffect">
                                   <p:stCondLst>
                                     <p:cond delay="0"/>
                                   </p:stCondLst>
@@ -5064,7 +5469,7 @@
                                           </p:stCondLst>
                                         </p:cTn>
                                         <p:tgtEl>
-                                          <p:spTgt spid="4"/>
+                                          <p:spTgt spid="2"/>
                                         </p:tgtEl>
                                         <p:attrNameLst>
                                           <p:attrName>style.visibility</p:attrName>
@@ -5074,14 +5479,6 @@
                                         <p:strVal val="visible"/>
                                       </p:to>
                                     </p:set>
-                                    <p:animEffect transition="in" filter="fade">
-                                      <p:cBhvr>
-                                        <p:cTn id="7" dur="500"/>
-                                        <p:tgtEl>
-                                          <p:spTgt spid="4"/>
-                                        </p:tgtEl>
-                                      </p:cBhvr>
-                                    </p:animEffect>
                                   </p:childTnLst>
                                 </p:cTn>
                               </p:par>
@@ -5089,83 +5486,90 @@
                           </p:cTn>
                         </p:par>
                         <p:par>
-                          <p:cTn id="8" fill="hold">
+                          <p:cTn id="7" fill="hold">
                             <p:stCondLst>
-                              <p:cond delay="500"/>
+                              <p:cond delay="0"/>
                             </p:stCondLst>
                             <p:childTnLst>
                               <p:par>
-                                <p:cTn id="9" presetID="10" presetClass="entr" presetSubtype="0" fill="hold" grpId="0" nodeType="afterEffect">
+                                <p:cTn id="8" presetID="35" presetClass="emph" presetSubtype="0" repeatCount="3000" fill="hold" nodeType="afterEffect">
                                   <p:stCondLst>
                                     <p:cond delay="0"/>
                                   </p:stCondLst>
                                   <p:childTnLst>
-                                    <p:set>
+                                    <p:anim calcmode="discrete" valueType="str">
                                       <p:cBhvr>
-                                        <p:cTn id="10" dur="1" fill="hold">
-                                          <p:stCondLst>
-                                            <p:cond delay="0"/>
-                                          </p:stCondLst>
-                                        </p:cTn>
+                                        <p:cTn id="9" dur="50" fill="hold"/>
                                         <p:tgtEl>
-                                          <p:spTgt spid="3"/>
+                                          <p:spTgt spid="2"/>
                                         </p:tgtEl>
                                         <p:attrNameLst>
                                           <p:attrName>style.visibility</p:attrName>
                                         </p:attrNameLst>
                                       </p:cBhvr>
-                                      <p:to>
-                                        <p:strVal val="visible"/>
-                                      </p:to>
-                                    </p:set>
-                                    <p:animEffect transition="in" filter="fade">
-                                      <p:cBhvr>
-                                        <p:cTn id="11" dur="500"/>
-                                        <p:tgtEl>
-                                          <p:spTgt spid="3"/>
-                                        </p:tgtEl>
-                                      </p:cBhvr>
-                                    </p:animEffect>
+                                      <p:tavLst>
+                                        <p:tav tm="0">
+                                          <p:val>
+                                            <p:strVal val="hidden"/>
+                                          </p:val>
+                                        </p:tav>
+                                        <p:tav tm="50000">
+                                          <p:val>
+                                            <p:strVal val="visible"/>
+                                          </p:val>
+                                        </p:tav>
+                                      </p:tavLst>
+                                    </p:anim>
                                   </p:childTnLst>
                                 </p:cTn>
                               </p:par>
+                            </p:childTnLst>
+                          </p:cTn>
+                        </p:par>
+                      </p:childTnLst>
+                    </p:cTn>
+                  </p:par>
+                  <p:par>
+                    <p:cTn id="10" fill="hold">
+                      <p:stCondLst>
+                        <p:cond delay="indefinite"/>
+                      </p:stCondLst>
+                      <p:childTnLst>
+                        <p:par>
+                          <p:cTn id="11" fill="hold">
+                            <p:stCondLst>
+                              <p:cond delay="0"/>
+                            </p:stCondLst>
+                            <p:childTnLst>
                               <p:par>
-                                <p:cTn id="12" presetID="10" presetClass="entr" presetSubtype="0" fill="hold" nodeType="withEffect">
+                                <p:cTn id="12" presetID="6" presetClass="emph" presetSubtype="0" fill="hold" nodeType="clickEffect">
                                   <p:stCondLst>
                                     <p:cond delay="0"/>
                                   </p:stCondLst>
                                   <p:childTnLst>
-                                    <p:set>
+                                    <p:animScale>
                                       <p:cBhvr>
-                                        <p:cTn id="13" dur="1" fill="hold">
-                                          <p:stCondLst>
-                                            <p:cond delay="0"/>
-                                          </p:stCondLst>
-                                        </p:cTn>
+                                        <p:cTn id="13" dur="250" fill="hold"/>
                                         <p:tgtEl>
-                                          <p:spTgt spid="6"/>
-                                        </p:tgtEl>
-                                        <p:attrNameLst>
-                                          <p:attrName>style.visibility</p:attrName>
-                                        </p:attrNameLst>
-                                      </p:cBhvr>
-                                      <p:to>
-                                        <p:strVal val="visible"/>
-                                      </p:to>
-                                    </p:set>
-                                    <p:animEffect transition="in" filter="fade">
-                                      <p:cBhvr>
-                                        <p:cTn id="14" dur="500"/>
-                                        <p:tgtEl>
-                                          <p:spTgt spid="6"/>
+                                          <p:spTgt spid="2"/>
                                         </p:tgtEl>
                                       </p:cBhvr>
-                                    </p:animEffect>
+                                      <p:by x="0" y="0"/>
+                                    </p:animScale>
                                   </p:childTnLst>
                                 </p:cTn>
                               </p:par>
+                            </p:childTnLst>
+                          </p:cTn>
+                        </p:par>
+                        <p:par>
+                          <p:cTn id="14" fill="hold">
+                            <p:stCondLst>
+                              <p:cond delay="250"/>
+                            </p:stCondLst>
+                            <p:childTnLst>
                               <p:par>
-                                <p:cTn id="15" presetID="10" presetClass="entr" presetSubtype="0" fill="hold" grpId="0" nodeType="withEffect">
+                                <p:cTn id="15" presetID="10" presetClass="entr" presetSubtype="0" fill="hold" nodeType="afterEffect">
                                   <p:stCondLst>
                                     <p:cond delay="0"/>
                                   </p:stCondLst>
@@ -5178,7 +5582,7 @@
                                           </p:stCondLst>
                                         </p:cTn>
                                         <p:tgtEl>
-                                          <p:spTgt spid="14"/>
+                                          <p:spTgt spid="18"/>
                                         </p:tgtEl>
                                         <p:attrNameLst>
                                           <p:attrName>style.visibility</p:attrName>
@@ -5190,12 +5594,43 @@
                                     </p:set>
                                     <p:animEffect transition="in" filter="fade">
                                       <p:cBhvr>
-                                        <p:cTn id="17" dur="500"/>
+                                        <p:cTn id="17" dur="250"/>
                                         <p:tgtEl>
-                                          <p:spTgt spid="14"/>
+                                          <p:spTgt spid="18"/>
                                         </p:tgtEl>
                                       </p:cBhvr>
                                     </p:animEffect>
+                                  </p:childTnLst>
+                                </p:cTn>
+                              </p:par>
+                            </p:childTnLst>
+                          </p:cTn>
+                        </p:par>
+                        <p:par>
+                          <p:cTn id="18" fill="hold">
+                            <p:stCondLst>
+                              <p:cond delay="500"/>
+                            </p:stCondLst>
+                            <p:childTnLst>
+                              <p:par>
+                                <p:cTn id="19" presetID="42" presetClass="path" presetSubtype="0" accel="50000" decel="50000" fill="hold" nodeType="afterEffect">
+                                  <p:stCondLst>
+                                    <p:cond delay="0"/>
+                                  </p:stCondLst>
+                                  <p:childTnLst>
+                                    <p:animMotion origin="layout" path="M -3.54167E-6 -3.7037E-7 L -0.35091 -3.7037E-7 " pathEditMode="relative" rAng="0" ptsTypes="AA">
+                                      <p:cBhvr>
+                                        <p:cTn id="20" dur="250" fill="hold"/>
+                                        <p:tgtEl>
+                                          <p:spTgt spid="18"/>
+                                        </p:tgtEl>
+                                        <p:attrNameLst>
+                                          <p:attrName>ppt_x</p:attrName>
+                                          <p:attrName>ppt_y</p:attrName>
+                                        </p:attrNameLst>
+                                      </p:cBhvr>
+                                      <p:rCtr x="-17552" y="0"/>
+                                    </p:animMotion>
                                   </p:childTnLst>
                                 </p:cTn>
                               </p:par>
@@ -5206,32 +5641,221 @@
                     </p:cTn>
                   </p:par>
                   <p:par>
-                    <p:cTn id="18" fill="hold">
+                    <p:cTn id="21" fill="hold">
                       <p:stCondLst>
                         <p:cond delay="indefinite"/>
                       </p:stCondLst>
                       <p:childTnLst>
                         <p:par>
-                          <p:cTn id="19" fill="hold">
+                          <p:cTn id="22" fill="hold">
                             <p:stCondLst>
                               <p:cond delay="0"/>
                             </p:stCondLst>
                             <p:childTnLst>
                               <p:par>
-                                <p:cTn id="20" presetID="10" presetClass="entr" presetSubtype="0" fill="hold" grpId="0" nodeType="clickEffect">
+                                <p:cTn id="23" presetID="1" presetClass="entr" presetSubtype="0" fill="hold" nodeType="clickEffect">
                                   <p:stCondLst>
                                     <p:cond delay="0"/>
                                   </p:stCondLst>
                                   <p:childTnLst>
                                     <p:set>
                                       <p:cBhvr>
-                                        <p:cTn id="21" dur="1" fill="hold">
+                                        <p:cTn id="24" dur="1" fill="hold">
                                           <p:stCondLst>
                                             <p:cond delay="0"/>
                                           </p:stCondLst>
                                         </p:cTn>
                                         <p:tgtEl>
-                                          <p:spTgt spid="5"/>
+                                          <p:spTgt spid="10"/>
+                                        </p:tgtEl>
+                                        <p:attrNameLst>
+                                          <p:attrName>style.visibility</p:attrName>
+                                        </p:attrNameLst>
+                                      </p:cBhvr>
+                                      <p:to>
+                                        <p:strVal val="visible"/>
+                                      </p:to>
+                                    </p:set>
+                                  </p:childTnLst>
+                                </p:cTn>
+                              </p:par>
+                            </p:childTnLst>
+                          </p:cTn>
+                        </p:par>
+                        <p:par>
+                          <p:cTn id="25" fill="hold">
+                            <p:stCondLst>
+                              <p:cond delay="0"/>
+                            </p:stCondLst>
+                            <p:childTnLst>
+                              <p:par>
+                                <p:cTn id="26" presetID="35" presetClass="emph" presetSubtype="0" repeatCount="3000" fill="hold" nodeType="afterEffect">
+                                  <p:stCondLst>
+                                    <p:cond delay="0"/>
+                                  </p:stCondLst>
+                                  <p:childTnLst>
+                                    <p:anim calcmode="discrete" valueType="str">
+                                      <p:cBhvr>
+                                        <p:cTn id="27" dur="50" fill="hold"/>
+                                        <p:tgtEl>
+                                          <p:spTgt spid="10"/>
+                                        </p:tgtEl>
+                                        <p:attrNameLst>
+                                          <p:attrName>style.visibility</p:attrName>
+                                        </p:attrNameLst>
+                                      </p:cBhvr>
+                                      <p:tavLst>
+                                        <p:tav tm="0">
+                                          <p:val>
+                                            <p:strVal val="hidden"/>
+                                          </p:val>
+                                        </p:tav>
+                                        <p:tav tm="50000">
+                                          <p:val>
+                                            <p:strVal val="visible"/>
+                                          </p:val>
+                                        </p:tav>
+                                      </p:tavLst>
+                                    </p:anim>
+                                  </p:childTnLst>
+                                </p:cTn>
+                              </p:par>
+                            </p:childTnLst>
+                          </p:cTn>
+                        </p:par>
+                      </p:childTnLst>
+                    </p:cTn>
+                  </p:par>
+                  <p:par>
+                    <p:cTn id="28" fill="hold">
+                      <p:stCondLst>
+                        <p:cond delay="indefinite"/>
+                      </p:stCondLst>
+                      <p:childTnLst>
+                        <p:par>
+                          <p:cTn id="29" fill="hold">
+                            <p:stCondLst>
+                              <p:cond delay="0"/>
+                            </p:stCondLst>
+                            <p:childTnLst>
+                              <p:par>
+                                <p:cTn id="30" presetID="6" presetClass="emph" presetSubtype="0" fill="hold" nodeType="clickEffect">
+                                  <p:stCondLst>
+                                    <p:cond delay="0"/>
+                                  </p:stCondLst>
+                                  <p:childTnLst>
+                                    <p:animScale>
+                                      <p:cBhvr>
+                                        <p:cTn id="31" dur="250" fill="hold"/>
+                                        <p:tgtEl>
+                                          <p:spTgt spid="10"/>
+                                        </p:tgtEl>
+                                      </p:cBhvr>
+                                      <p:by x="0" y="0"/>
+                                    </p:animScale>
+                                  </p:childTnLst>
+                                </p:cTn>
+                              </p:par>
+                            </p:childTnLst>
+                          </p:cTn>
+                        </p:par>
+                        <p:par>
+                          <p:cTn id="32" fill="hold">
+                            <p:stCondLst>
+                              <p:cond delay="250"/>
+                            </p:stCondLst>
+                            <p:childTnLst>
+                              <p:par>
+                                <p:cTn id="33" presetID="1" presetClass="entr" presetSubtype="0" fill="hold" nodeType="afterEffect">
+                                  <p:stCondLst>
+                                    <p:cond delay="0"/>
+                                  </p:stCondLst>
+                                  <p:childTnLst>
+                                    <p:set>
+                                      <p:cBhvr>
+                                        <p:cTn id="34" dur="1" fill="hold">
+                                          <p:stCondLst>
+                                            <p:cond delay="0"/>
+                                          </p:stCondLst>
+                                        </p:cTn>
+                                        <p:tgtEl>
+                                          <p:spTgt spid="24"/>
+                                        </p:tgtEl>
+                                        <p:attrNameLst>
+                                          <p:attrName>style.visibility</p:attrName>
+                                        </p:attrNameLst>
+                                      </p:cBhvr>
+                                      <p:to>
+                                        <p:strVal val="visible"/>
+                                      </p:to>
+                                    </p:set>
+                                  </p:childTnLst>
+                                </p:cTn>
+                              </p:par>
+                            </p:childTnLst>
+                          </p:cTn>
+                        </p:par>
+                        <p:par>
+                          <p:cTn id="35" fill="hold">
+                            <p:stCondLst>
+                              <p:cond delay="250"/>
+                            </p:stCondLst>
+                            <p:childTnLst>
+                              <p:par>
+                                <p:cTn id="36" presetID="42" presetClass="path" presetSubtype="0" accel="50000" decel="50000" fill="hold" nodeType="afterEffect">
+                                  <p:stCondLst>
+                                    <p:cond delay="0"/>
+                                  </p:stCondLst>
+                                  <p:childTnLst>
+                                    <p:animMotion origin="layout" path="M -4.58333E-6 -3.7037E-7 L 0.39558 0.00232 " pathEditMode="relative" rAng="0" ptsTypes="AA">
+                                      <p:cBhvr>
+                                        <p:cTn id="37" dur="250" fill="hold"/>
+                                        <p:tgtEl>
+                                          <p:spTgt spid="24"/>
+                                        </p:tgtEl>
+                                        <p:attrNameLst>
+                                          <p:attrName>ppt_x</p:attrName>
+                                          <p:attrName>ppt_y</p:attrName>
+                                        </p:attrNameLst>
+                                      </p:cBhvr>
+                                      <p:rCtr x="19779" y="116"/>
+                                    </p:animMotion>
+                                  </p:childTnLst>
+                                </p:cTn>
+                              </p:par>
+                            </p:childTnLst>
+                          </p:cTn>
+                        </p:par>
+                      </p:childTnLst>
+                    </p:cTn>
+                  </p:par>
+                  <p:par>
+                    <p:cTn id="38" fill="hold">
+                      <p:stCondLst>
+                        <p:cond delay="indefinite"/>
+                      </p:stCondLst>
+                      <p:childTnLst>
+                        <p:par>
+                          <p:cTn id="39" fill="hold">
+                            <p:stCondLst>
+                              <p:cond delay="0"/>
+                            </p:stCondLst>
+                            <p:childTnLst>
+                              <p:par>
+                                <p:cTn id="40" presetID="10" presetClass="entr" presetSubtype="0" fill="hold" grpId="0" nodeType="clickEffect">
+                                  <p:stCondLst>
+                                    <p:cond delay="0"/>
+                                  </p:stCondLst>
+                                  <p:childTnLst>
+                                    <p:set>
+                                      <p:cBhvr>
+                                        <p:cTn id="41" dur="1" fill="hold">
+                                          <p:stCondLst>
+                                            <p:cond delay="0"/>
+                                          </p:stCondLst>
+                                        </p:cTn>
+                                        <p:tgtEl>
+                                          <p:spTgt spid="25"/>
                                         </p:tgtEl>
                                         <p:attrNameLst>
                                           <p:attrName>style.visibility</p:attrName>
@@ -5243,176 +5867,9 @@
                                     </p:set>
                                     <p:animEffect transition="in" filter="fade">
                                       <p:cBhvr>
-                                        <p:cTn id="22" dur="500"/>
+                                        <p:cTn id="42" dur="500"/>
                                         <p:tgtEl>
-                                          <p:spTgt spid="5"/>
-                                        </p:tgtEl>
-                                      </p:cBhvr>
-                                    </p:animEffect>
-                                  </p:childTnLst>
-                                </p:cTn>
-                              </p:par>
-                            </p:childTnLst>
-                          </p:cTn>
-                        </p:par>
-                        <p:par>
-                          <p:cTn id="23" fill="hold">
-                            <p:stCondLst>
-                              <p:cond delay="500"/>
-                            </p:stCondLst>
-                            <p:childTnLst>
-                              <p:par>
-                                <p:cTn id="24" presetID="10" presetClass="entr" presetSubtype="0" fill="hold" grpId="0" nodeType="afterEffect">
-                                  <p:stCondLst>
-                                    <p:cond delay="50"/>
-                                  </p:stCondLst>
-                                  <p:childTnLst>
-                                    <p:set>
-                                      <p:cBhvr>
-                                        <p:cTn id="25" dur="1" fill="hold">
-                                          <p:stCondLst>
-                                            <p:cond delay="0"/>
-                                          </p:stCondLst>
-                                        </p:cTn>
-                                        <p:tgtEl>
-                                          <p:spTgt spid="7"/>
-                                        </p:tgtEl>
-                                        <p:attrNameLst>
-                                          <p:attrName>style.visibility</p:attrName>
-                                        </p:attrNameLst>
-                                      </p:cBhvr>
-                                      <p:to>
-                                        <p:strVal val="visible"/>
-                                      </p:to>
-                                    </p:set>
-                                    <p:animEffect transition="in" filter="fade">
-                                      <p:cBhvr>
-                                        <p:cTn id="26" dur="500"/>
-                                        <p:tgtEl>
-                                          <p:spTgt spid="7"/>
-                                        </p:tgtEl>
-                                      </p:cBhvr>
-                                    </p:animEffect>
-                                  </p:childTnLst>
-                                </p:cTn>
-                              </p:par>
-                              <p:par>
-                                <p:cTn id="27" presetID="10" presetClass="entr" presetSubtype="0" fill="hold" nodeType="withEffect">
-                                  <p:stCondLst>
-                                    <p:cond delay="50"/>
-                                  </p:stCondLst>
-                                  <p:childTnLst>
-                                    <p:set>
-                                      <p:cBhvr>
-                                        <p:cTn id="28" dur="1" fill="hold">
-                                          <p:stCondLst>
-                                            <p:cond delay="0"/>
-                                          </p:stCondLst>
-                                        </p:cTn>
-                                        <p:tgtEl>
-                                          <p:spTgt spid="13"/>
-                                        </p:tgtEl>
-                                        <p:attrNameLst>
-                                          <p:attrName>style.visibility</p:attrName>
-                                        </p:attrNameLst>
-                                      </p:cBhvr>
-                                      <p:to>
-                                        <p:strVal val="visible"/>
-                                      </p:to>
-                                    </p:set>
-                                    <p:animEffect transition="in" filter="fade">
-                                      <p:cBhvr>
-                                        <p:cTn id="29" dur="500"/>
-                                        <p:tgtEl>
-                                          <p:spTgt spid="13"/>
-                                        </p:tgtEl>
-                                      </p:cBhvr>
-                                    </p:animEffect>
-                                  </p:childTnLst>
-                                </p:cTn>
-                              </p:par>
-                              <p:par>
-                                <p:cTn id="30" presetID="10" presetClass="entr" presetSubtype="0" fill="hold" grpId="0" nodeType="withEffect">
-                                  <p:stCondLst>
-                                    <p:cond delay="50"/>
-                                  </p:stCondLst>
-                                  <p:childTnLst>
-                                    <p:set>
-                                      <p:cBhvr>
-                                        <p:cTn id="31" dur="1" fill="hold">
-                                          <p:stCondLst>
-                                            <p:cond delay="0"/>
-                                          </p:stCondLst>
-                                        </p:cTn>
-                                        <p:tgtEl>
-                                          <p:spTgt spid="17"/>
-                                        </p:tgtEl>
-                                        <p:attrNameLst>
-                                          <p:attrName>style.visibility</p:attrName>
-                                        </p:attrNameLst>
-                                      </p:cBhvr>
-                                      <p:to>
-                                        <p:strVal val="visible"/>
-                                      </p:to>
-                                    </p:set>
-                                    <p:animEffect transition="in" filter="fade">
-                                      <p:cBhvr>
-                                        <p:cTn id="32" dur="500"/>
-                                        <p:tgtEl>
-                                          <p:spTgt spid="17"/>
-                                        </p:tgtEl>
-                                      </p:cBhvr>
-                                    </p:animEffect>
-                                  </p:childTnLst>
-                                </p:cTn>
-                              </p:par>
-                            </p:childTnLst>
-                          </p:cTn>
-                        </p:par>
-                      </p:childTnLst>
-                    </p:cTn>
-                  </p:par>
-                  <p:par>
-                    <p:cTn id="33" fill="hold">
-                      <p:stCondLst>
-                        <p:cond delay="indefinite"/>
-                      </p:stCondLst>
-                      <p:childTnLst>
-                        <p:par>
-                          <p:cTn id="34" fill="hold">
-                            <p:stCondLst>
-                              <p:cond delay="0"/>
-                            </p:stCondLst>
-                            <p:childTnLst>
-                              <p:par>
-                                <p:cTn id="35" presetID="10" presetClass="entr" presetSubtype="0" fill="hold" grpId="0" nodeType="clickEffect">
-                                  <p:stCondLst>
-                                    <p:cond delay="0"/>
-                                  </p:stCondLst>
-                                  <p:childTnLst>
-                                    <p:set>
-                                      <p:cBhvr>
-                                        <p:cTn id="36" dur="1" fill="hold">
-                                          <p:stCondLst>
-                                            <p:cond delay="0"/>
-                                          </p:stCondLst>
-                                        </p:cTn>
-                                        <p:tgtEl>
-                                          <p:spTgt spid="8"/>
-                                        </p:tgtEl>
-                                        <p:attrNameLst>
-                                          <p:attrName>style.visibility</p:attrName>
-                                        </p:attrNameLst>
-                                      </p:cBhvr>
-                                      <p:to>
-                                        <p:strVal val="visible"/>
-                                      </p:to>
-                                    </p:set>
-                                    <p:animEffect transition="in" filter="fade">
-                                      <p:cBhvr>
-                                        <p:cTn id="37" dur="750"/>
-                                        <p:tgtEl>
-                                          <p:spTgt spid="8"/>
+                                          <p:spTgt spid="25"/>
                                         </p:tgtEl>
                                       </p:cBhvr>
                                     </p:animEffect>
@@ -5447,13 +5904,7 @@
       </p:par>
     </p:tnLst>
     <p:bldLst>
-      <p:bldP spid="4" grpId="0" animBg="1"/>
-      <p:bldP spid="3" grpId="0"/>
-      <p:bldP spid="5" grpId="0" animBg="1"/>
-      <p:bldP spid="7" grpId="0"/>
-      <p:bldP spid="8" grpId="0"/>
-      <p:bldP spid="14" grpId="0"/>
-      <p:bldP spid="17" grpId="0"/>
+      <p:bldP spid="25" grpId="0" animBg="1"/>
     </p:bldLst>
   </p:timing>
 </p:sld>
@@ -5476,589 +5927,655 @@
           <a:chExt cx="0" cy="0"/>
         </a:xfrm>
       </p:grpSpPr>
-      <p:sp>
-        <p:nvSpPr>
-          <p:cNvPr id="4" name="文本框 3">
+      <p:grpSp>
+        <p:nvGrpSpPr>
+          <p:cNvPr id="10" name="组合 9">
             <a:extLst>
               <a:ext uri="{FF2B5EF4-FFF2-40B4-BE49-F238E27FC236}">
-                <a16:creationId xmlns:a16="http://schemas.microsoft.com/office/drawing/2014/main" id="{70F58C32-47DB-3315-7F4B-A6A175B2D388}"/>
+                <a16:creationId xmlns:a16="http://schemas.microsoft.com/office/drawing/2014/main" id="{49621BDF-1DB3-AFD2-4023-2005E8EA33B5}"/>
               </a:ext>
             </a:extLst>
           </p:cNvPr>
-          <p:cNvSpPr txBox="1"/>
+          <p:cNvGrpSpPr/>
           <p:nvPr/>
-        </p:nvSpPr>
-        <p:spPr>
-          <a:xfrm>
-            <a:off x="6542316" y="696686"/>
-            <a:ext cx="5181600" cy="1754326"/>
-          </a:xfrm>
-          <a:prstGeom prst="rect">
-            <a:avLst/>
-          </a:prstGeom>
-          <a:noFill/>
-        </p:spPr>
-        <p:txBody>
-          <a:bodyPr wrap="square" rtlCol="0">
-            <a:spAutoFit/>
-          </a:bodyPr>
-          <a:lstStyle/>
-          <a:p>
-            <a:r>
-              <a:rPr lang="zh-CN" altLang="en-US" sz="5400" b="1" dirty="0">
-                <a:solidFill>
-                  <a:schemeClr val="bg2">
-                    <a:lumMod val="75000"/>
-                  </a:schemeClr>
-                </a:solidFill>
-                <a:latin typeface="得意黑" pitchFamily="50" charset="-122"/>
-                <a:ea typeface="得意黑" pitchFamily="50" charset="-122"/>
-              </a:rPr>
-              <a:t>如何</a:t>
-            </a:r>
-            <a:r>
-              <a:rPr lang="zh-CN" altLang="en-US" sz="5400" b="1" dirty="0">
-                <a:solidFill>
-                  <a:schemeClr val="accent1">
-                    <a:lumMod val="40000"/>
-                    <a:lumOff val="60000"/>
-                  </a:schemeClr>
-                </a:solidFill>
-                <a:latin typeface="得意黑" pitchFamily="50" charset="-122"/>
-                <a:ea typeface="得意黑" pitchFamily="50" charset="-122"/>
-              </a:rPr>
-              <a:t>科学</a:t>
-            </a:r>
-            <a:r>
-              <a:rPr lang="zh-CN" altLang="en-US" sz="5400" b="1" dirty="0">
-                <a:solidFill>
-                  <a:schemeClr val="bg2">
-                    <a:lumMod val="75000"/>
-                  </a:schemeClr>
-                </a:solidFill>
-                <a:latin typeface="得意黑" pitchFamily="50" charset="-122"/>
-                <a:ea typeface="得意黑" pitchFamily="50" charset="-122"/>
-              </a:rPr>
-              <a:t>的</a:t>
-            </a:r>
-            <a:endParaRPr lang="en-US" altLang="zh-CN" sz="5400" b="1" dirty="0">
-              <a:solidFill>
-                <a:schemeClr val="bg2">
-                  <a:lumMod val="75000"/>
-                </a:schemeClr>
-              </a:solidFill>
-              <a:latin typeface="得意黑" pitchFamily="50" charset="-122"/>
-              <a:ea typeface="得意黑" pitchFamily="50" charset="-122"/>
-            </a:endParaRPr>
-          </a:p>
-          <a:p>
-            <a:r>
-              <a:rPr lang="en-US" altLang="zh-CN" sz="5400" b="1" dirty="0">
-                <a:solidFill>
-                  <a:schemeClr val="bg2">
-                    <a:lumMod val="75000"/>
-                  </a:schemeClr>
-                </a:solidFill>
-                <a:latin typeface="得意黑" pitchFamily="50" charset="-122"/>
-                <a:ea typeface="得意黑" pitchFamily="50" charset="-122"/>
-              </a:rPr>
-              <a:t>	</a:t>
-            </a:r>
-            <a:r>
-              <a:rPr lang="zh-CN" altLang="en-US" sz="5400" b="1" dirty="0">
-                <a:solidFill>
-                  <a:schemeClr val="bg2">
-                    <a:lumMod val="75000"/>
-                  </a:schemeClr>
-                </a:solidFill>
-                <a:latin typeface="得意黑" pitchFamily="50" charset="-122"/>
-                <a:ea typeface="得意黑" pitchFamily="50" charset="-122"/>
-              </a:rPr>
-              <a:t>制作一个</a:t>
-            </a:r>
-            <a:r>
-              <a:rPr lang="zh-CN" altLang="en-US" sz="5400" b="1" dirty="0">
-                <a:solidFill>
-                  <a:schemeClr val="accent1">
-                    <a:lumMod val="40000"/>
-                    <a:lumOff val="60000"/>
-                  </a:schemeClr>
-                </a:solidFill>
-                <a:latin typeface="得意黑" pitchFamily="50" charset="-122"/>
-                <a:ea typeface="得意黑" pitchFamily="50" charset="-122"/>
-              </a:rPr>
-              <a:t>编译器</a:t>
-            </a:r>
-            <a:r>
-              <a:rPr lang="zh-CN" altLang="en-US" sz="5400" b="1" dirty="0">
-                <a:solidFill>
-                  <a:schemeClr val="bg2">
-                    <a:lumMod val="75000"/>
-                  </a:schemeClr>
-                </a:solidFill>
-                <a:latin typeface="得意黑" pitchFamily="50" charset="-122"/>
-                <a:ea typeface="得意黑" pitchFamily="50" charset="-122"/>
-              </a:rPr>
-              <a:t>？</a:t>
-            </a:r>
-          </a:p>
-        </p:txBody>
-      </p:sp>
-      <p:sp>
-        <p:nvSpPr>
-          <p:cNvPr id="5" name="矩形: 圆角 4">
-            <a:extLst>
-              <a:ext uri="{FF2B5EF4-FFF2-40B4-BE49-F238E27FC236}">
-                <a16:creationId xmlns:a16="http://schemas.microsoft.com/office/drawing/2014/main" id="{E2991793-CE86-E003-25B7-95DE22AA2754}"/>
-              </a:ext>
-            </a:extLst>
-          </p:cNvPr>
-          <p:cNvSpPr/>
-          <p:nvPr/>
-        </p:nvSpPr>
-        <p:spPr>
+        </p:nvGrpSpPr>
+        <p:grpSpPr>
           <a:xfrm>
             <a:off x="816429" y="696686"/>
-            <a:ext cx="5279571" cy="5584371"/>
+            <a:ext cx="10959361" cy="5584371"/>
+            <a:chOff x="816429" y="696686"/>
+            <a:chExt cx="10959361" cy="5584371"/>
           </a:xfrm>
-          <a:prstGeom prst="roundRect">
-            <a:avLst/>
-          </a:prstGeom>
-          <a:noFill/>
-          <a:ln w="41275">
-            <a:solidFill>
-              <a:schemeClr val="tx2">
-                <a:lumMod val="60000"/>
-                <a:lumOff val="40000"/>
-              </a:schemeClr>
-            </a:solidFill>
-          </a:ln>
-        </p:spPr>
-        <p:style>
-          <a:lnRef idx="2">
-            <a:schemeClr val="accent1">
-              <a:shade val="15000"/>
-            </a:schemeClr>
-          </a:lnRef>
-          <a:fillRef idx="1">
-            <a:schemeClr val="accent1"/>
-          </a:fillRef>
-          <a:effectRef idx="0">
-            <a:schemeClr val="accent1"/>
-          </a:effectRef>
-          <a:fontRef idx="minor">
-            <a:schemeClr val="lt1"/>
-          </a:fontRef>
-        </p:style>
-        <p:txBody>
-          <a:bodyPr rtlCol="0" anchor="ctr"/>
-          <a:lstStyle/>
-          <a:p>
-            <a:pPr algn="ctr"/>
-            <a:endParaRPr lang="zh-CN" altLang="en-US"/>
-          </a:p>
-        </p:txBody>
-      </p:sp>
-      <p:sp>
-        <p:nvSpPr>
-          <p:cNvPr id="6" name="矩形 5">
-            <a:extLst>
-              <a:ext uri="{FF2B5EF4-FFF2-40B4-BE49-F238E27FC236}">
-                <a16:creationId xmlns:a16="http://schemas.microsoft.com/office/drawing/2014/main" id="{B542E42B-FDA9-57E9-815D-D454820B1E4F}"/>
-              </a:ext>
-            </a:extLst>
-          </p:cNvPr>
-          <p:cNvSpPr/>
-          <p:nvPr/>
-        </p:nvSpPr>
-        <p:spPr>
-          <a:xfrm>
-            <a:off x="7260771" y="4789713"/>
-            <a:ext cx="174172" cy="968829"/>
-          </a:xfrm>
-          <a:prstGeom prst="rect">
-            <a:avLst/>
-          </a:prstGeom>
-          <a:solidFill>
-            <a:srgbClr val="C00000"/>
-          </a:solidFill>
-          <a:ln>
-            <a:noFill/>
-          </a:ln>
-        </p:spPr>
-        <p:style>
-          <a:lnRef idx="2">
-            <a:schemeClr val="accent1">
-              <a:shade val="15000"/>
-            </a:schemeClr>
-          </a:lnRef>
-          <a:fillRef idx="1">
-            <a:schemeClr val="accent1"/>
-          </a:fillRef>
-          <a:effectRef idx="0">
-            <a:schemeClr val="accent1"/>
-          </a:effectRef>
-          <a:fontRef idx="minor">
-            <a:schemeClr val="lt1"/>
-          </a:fontRef>
-        </p:style>
-        <p:txBody>
-          <a:bodyPr rtlCol="0" anchor="ctr"/>
-          <a:lstStyle/>
-          <a:p>
-            <a:pPr algn="ctr"/>
-            <a:endParaRPr lang="zh-CN" altLang="en-US" dirty="0"/>
-          </a:p>
-        </p:txBody>
-      </p:sp>
-      <p:sp>
-        <p:nvSpPr>
-          <p:cNvPr id="7" name="文本框 6">
-            <a:extLst>
-              <a:ext uri="{FF2B5EF4-FFF2-40B4-BE49-F238E27FC236}">
-                <a16:creationId xmlns:a16="http://schemas.microsoft.com/office/drawing/2014/main" id="{F1B05571-0D66-2BE1-9034-7E5593771EA9}"/>
-              </a:ext>
-            </a:extLst>
-          </p:cNvPr>
-          <p:cNvSpPr txBox="1"/>
-          <p:nvPr/>
-        </p:nvSpPr>
-        <p:spPr>
-          <a:xfrm>
-            <a:off x="7783286" y="4789713"/>
-            <a:ext cx="3287486" cy="954107"/>
-          </a:xfrm>
-          <a:custGeom>
-            <a:avLst/>
-            <a:gdLst>
-              <a:gd name="connsiteX0" fmla="*/ 0 w 3287486"/>
-              <a:gd name="connsiteY0" fmla="*/ 0 h 954107"/>
-              <a:gd name="connsiteX1" fmla="*/ 515039 w 3287486"/>
-              <a:gd name="connsiteY1" fmla="*/ 0 h 954107"/>
-              <a:gd name="connsiteX2" fmla="*/ 964329 w 3287486"/>
-              <a:gd name="connsiteY2" fmla="*/ 0 h 954107"/>
-              <a:gd name="connsiteX3" fmla="*/ 1577993 w 3287486"/>
-              <a:gd name="connsiteY3" fmla="*/ 0 h 954107"/>
-              <a:gd name="connsiteX4" fmla="*/ 2093033 w 3287486"/>
-              <a:gd name="connsiteY4" fmla="*/ 0 h 954107"/>
-              <a:gd name="connsiteX5" fmla="*/ 2608072 w 3287486"/>
-              <a:gd name="connsiteY5" fmla="*/ 0 h 954107"/>
-              <a:gd name="connsiteX6" fmla="*/ 3287486 w 3287486"/>
-              <a:gd name="connsiteY6" fmla="*/ 0 h 954107"/>
-              <a:gd name="connsiteX7" fmla="*/ 3287486 w 3287486"/>
-              <a:gd name="connsiteY7" fmla="*/ 457971 h 954107"/>
-              <a:gd name="connsiteX8" fmla="*/ 3287486 w 3287486"/>
-              <a:gd name="connsiteY8" fmla="*/ 954107 h 954107"/>
-              <a:gd name="connsiteX9" fmla="*/ 2805321 w 3287486"/>
-              <a:gd name="connsiteY9" fmla="*/ 954107 h 954107"/>
-              <a:gd name="connsiteX10" fmla="*/ 2257407 w 3287486"/>
-              <a:gd name="connsiteY10" fmla="*/ 954107 h 954107"/>
-              <a:gd name="connsiteX11" fmla="*/ 1709493 w 3287486"/>
-              <a:gd name="connsiteY11" fmla="*/ 954107 h 954107"/>
-              <a:gd name="connsiteX12" fmla="*/ 1194453 w 3287486"/>
-              <a:gd name="connsiteY12" fmla="*/ 954107 h 954107"/>
-              <a:gd name="connsiteX13" fmla="*/ 580789 w 3287486"/>
-              <a:gd name="connsiteY13" fmla="*/ 954107 h 954107"/>
-              <a:gd name="connsiteX14" fmla="*/ 0 w 3287486"/>
-              <a:gd name="connsiteY14" fmla="*/ 954107 h 954107"/>
-              <a:gd name="connsiteX15" fmla="*/ 0 w 3287486"/>
-              <a:gd name="connsiteY15" fmla="*/ 496136 h 954107"/>
-              <a:gd name="connsiteX16" fmla="*/ 0 w 3287486"/>
-              <a:gd name="connsiteY16" fmla="*/ 0 h 954107"/>
-            </a:gdLst>
-            <a:ahLst/>
-            <a:cxnLst>
-              <a:cxn ang="0">
-                <a:pos x="connsiteX0" y="connsiteY0"/>
-              </a:cxn>
-              <a:cxn ang="0">
-                <a:pos x="connsiteX1" y="connsiteY1"/>
-              </a:cxn>
-              <a:cxn ang="0">
-                <a:pos x="connsiteX2" y="connsiteY2"/>
-              </a:cxn>
-              <a:cxn ang="0">
-                <a:pos x="connsiteX3" y="connsiteY3"/>
-              </a:cxn>
-              <a:cxn ang="0">
-                <a:pos x="connsiteX4" y="connsiteY4"/>
-              </a:cxn>
-              <a:cxn ang="0">
-                <a:pos x="connsiteX5" y="connsiteY5"/>
-              </a:cxn>
-              <a:cxn ang="0">
-                <a:pos x="connsiteX6" y="connsiteY6"/>
-              </a:cxn>
-              <a:cxn ang="0">
-                <a:pos x="connsiteX7" y="connsiteY7"/>
-              </a:cxn>
-              <a:cxn ang="0">
-                <a:pos x="connsiteX8" y="connsiteY8"/>
-              </a:cxn>
-              <a:cxn ang="0">
-                <a:pos x="connsiteX9" y="connsiteY9"/>
-              </a:cxn>
-              <a:cxn ang="0">
-                <a:pos x="connsiteX10" y="connsiteY10"/>
-              </a:cxn>
-              <a:cxn ang="0">
-                <a:pos x="connsiteX11" y="connsiteY11"/>
-              </a:cxn>
-              <a:cxn ang="0">
-                <a:pos x="connsiteX12" y="connsiteY12"/>
-              </a:cxn>
-              <a:cxn ang="0">
-                <a:pos x="connsiteX13" y="connsiteY13"/>
-              </a:cxn>
-              <a:cxn ang="0">
-                <a:pos x="connsiteX14" y="connsiteY14"/>
-              </a:cxn>
-              <a:cxn ang="0">
-                <a:pos x="connsiteX15" y="connsiteY15"/>
-              </a:cxn>
-              <a:cxn ang="0">
-                <a:pos x="connsiteX16" y="connsiteY16"/>
-              </a:cxn>
-            </a:cxnLst>
-            <a:rect l="l" t="t" r="r" b="b"/>
-            <a:pathLst>
-              <a:path w="3287486" h="954107" extrusionOk="0">
-                <a:moveTo>
-                  <a:pt x="0" y="0"/>
-                </a:moveTo>
-                <a:cubicBezTo>
-                  <a:pt x="161600" y="-55001"/>
-                  <a:pt x="392024" y="1565"/>
-                  <a:pt x="515039" y="0"/>
-                </a:cubicBezTo>
-                <a:cubicBezTo>
-                  <a:pt x="638054" y="-1565"/>
-                  <a:pt x="792591" y="3414"/>
-                  <a:pt x="964329" y="0"/>
-                </a:cubicBezTo>
-                <a:cubicBezTo>
-                  <a:pt x="1136067" y="-3414"/>
-                  <a:pt x="1377498" y="23894"/>
-                  <a:pt x="1577993" y="0"/>
-                </a:cubicBezTo>
-                <a:cubicBezTo>
-                  <a:pt x="1778488" y="-23894"/>
-                  <a:pt x="1938231" y="59387"/>
-                  <a:pt x="2093033" y="0"/>
-                </a:cubicBezTo>
-                <a:cubicBezTo>
-                  <a:pt x="2247835" y="-59387"/>
-                  <a:pt x="2399125" y="32315"/>
-                  <a:pt x="2608072" y="0"/>
-                </a:cubicBezTo>
-                <a:cubicBezTo>
-                  <a:pt x="2817019" y="-32315"/>
-                  <a:pt x="3055143" y="68971"/>
-                  <a:pt x="3287486" y="0"/>
-                </a:cubicBezTo>
-                <a:cubicBezTo>
-                  <a:pt x="3298534" y="117221"/>
-                  <a:pt x="3239479" y="254607"/>
-                  <a:pt x="3287486" y="457971"/>
-                </a:cubicBezTo>
-                <a:cubicBezTo>
-                  <a:pt x="3335493" y="661335"/>
-                  <a:pt x="3256468" y="757503"/>
-                  <a:pt x="3287486" y="954107"/>
-                </a:cubicBezTo>
-                <a:cubicBezTo>
-                  <a:pt x="3052564" y="1003782"/>
-                  <a:pt x="2903550" y="953486"/>
-                  <a:pt x="2805321" y="954107"/>
-                </a:cubicBezTo>
-                <a:cubicBezTo>
-                  <a:pt x="2707092" y="954728"/>
-                  <a:pt x="2368532" y="900617"/>
-                  <a:pt x="2257407" y="954107"/>
-                </a:cubicBezTo>
-                <a:cubicBezTo>
-                  <a:pt x="2146282" y="1007597"/>
-                  <a:pt x="1945057" y="896601"/>
-                  <a:pt x="1709493" y="954107"/>
-                </a:cubicBezTo>
-                <a:cubicBezTo>
-                  <a:pt x="1473929" y="1011613"/>
-                  <a:pt x="1334965" y="923694"/>
-                  <a:pt x="1194453" y="954107"/>
-                </a:cubicBezTo>
-                <a:cubicBezTo>
-                  <a:pt x="1053941" y="984520"/>
-                  <a:pt x="716289" y="948488"/>
-                  <a:pt x="580789" y="954107"/>
-                </a:cubicBezTo>
-                <a:cubicBezTo>
-                  <a:pt x="445289" y="959726"/>
-                  <a:pt x="205423" y="890334"/>
-                  <a:pt x="0" y="954107"/>
-                </a:cubicBezTo>
-                <a:cubicBezTo>
-                  <a:pt x="-40069" y="750809"/>
-                  <a:pt x="51408" y="709054"/>
-                  <a:pt x="0" y="496136"/>
-                </a:cubicBezTo>
-                <a:cubicBezTo>
-                  <a:pt x="-51408" y="283218"/>
-                  <a:pt x="19498" y="184269"/>
-                  <a:pt x="0" y="0"/>
-                </a:cubicBezTo>
-                <a:close/>
-              </a:path>
-            </a:pathLst>
-          </a:custGeom>
-          <a:noFill/>
-          <a:ln w="34925">
-            <a:solidFill>
-              <a:schemeClr val="bg2">
-                <a:lumMod val="90000"/>
-              </a:schemeClr>
-            </a:solidFill>
-            <a:prstDash val="dashDot"/>
-            <a:extLst>
-              <a:ext uri="{C807C97D-BFC1-408E-A445-0C87EB9F89A2}">
-                <ask:lineSketchStyleProps xmlns:ask="http://schemas.microsoft.com/office/drawing/2018/sketchyshapes" sd="1219033472">
-                  <a:prstGeom prst="rect">
-                    <a:avLst/>
-                  </a:prstGeom>
-                  <ask:type>
-                    <ask:lineSketchScribble/>
-                  </ask:type>
-                </ask:lineSketchStyleProps>
-              </a:ext>
-            </a:extLst>
-          </a:ln>
-        </p:spPr>
-        <p:txBody>
-          <a:bodyPr wrap="square" rtlCol="0">
-            <a:spAutoFit/>
-          </a:bodyPr>
-          <a:lstStyle/>
-          <a:p>
-            <a:r>
-              <a:rPr lang="en-US" altLang="zh-CN" sz="2800" dirty="0">
+        </p:grpSpPr>
+        <p:grpSp>
+          <p:nvGrpSpPr>
+            <p:cNvPr id="8" name="组合 7">
+              <a:extLst>
+                <a:ext uri="{FF2B5EF4-FFF2-40B4-BE49-F238E27FC236}">
+                  <a16:creationId xmlns:a16="http://schemas.microsoft.com/office/drawing/2014/main" id="{CBB7B8E3-F0E1-A7B4-0EB7-DEEAA537F308}"/>
+                </a:ext>
+              </a:extLst>
+            </p:cNvPr>
+            <p:cNvGrpSpPr/>
+            <p:nvPr/>
+          </p:nvGrpSpPr>
+          <p:grpSpPr>
+            <a:xfrm>
+              <a:off x="6594190" y="740978"/>
+              <a:ext cx="5181600" cy="4590548"/>
+              <a:chOff x="6736080" y="845444"/>
+              <a:chExt cx="5181600" cy="4590548"/>
+            </a:xfrm>
+          </p:grpSpPr>
+          <p:sp>
+            <p:nvSpPr>
+              <p:cNvPr id="4" name="文本框 3">
+                <a:extLst>
+                  <a:ext uri="{FF2B5EF4-FFF2-40B4-BE49-F238E27FC236}">
+                    <a16:creationId xmlns:a16="http://schemas.microsoft.com/office/drawing/2014/main" id="{70F58C32-47DB-3315-7F4B-A6A175B2D388}"/>
+                  </a:ext>
+                </a:extLst>
+              </p:cNvPr>
+              <p:cNvSpPr txBox="1"/>
+              <p:nvPr/>
+            </p:nvSpPr>
+            <p:spPr>
+              <a:xfrm>
+                <a:off x="6736080" y="845444"/>
+                <a:ext cx="5181600" cy="1754326"/>
+              </a:xfrm>
+              <a:prstGeom prst="rect">
+                <a:avLst/>
+              </a:prstGeom>
+              <a:noFill/>
+            </p:spPr>
+            <p:txBody>
+              <a:bodyPr wrap="square" rtlCol="0">
+                <a:spAutoFit/>
+              </a:bodyPr>
+              <a:lstStyle/>
+              <a:p>
+                <a:r>
+                  <a:rPr lang="zh-CN" altLang="en-US" sz="5400" b="1" dirty="0">
+                    <a:solidFill>
+                      <a:schemeClr val="bg2">
+                        <a:lumMod val="75000"/>
+                      </a:schemeClr>
+                    </a:solidFill>
+                    <a:latin typeface="得意黑" pitchFamily="50" charset="-122"/>
+                    <a:ea typeface="得意黑" pitchFamily="50" charset="-122"/>
+                  </a:rPr>
+                  <a:t>如何</a:t>
+                </a:r>
+                <a:r>
+                  <a:rPr lang="zh-CN" altLang="en-US" sz="5400" b="1" dirty="0">
+                    <a:solidFill>
+                      <a:schemeClr val="accent1">
+                        <a:lumMod val="40000"/>
+                        <a:lumOff val="60000"/>
+                      </a:schemeClr>
+                    </a:solidFill>
+                    <a:latin typeface="得意黑" pitchFamily="50" charset="-122"/>
+                    <a:ea typeface="得意黑" pitchFamily="50" charset="-122"/>
+                  </a:rPr>
+                  <a:t>科学</a:t>
+                </a:r>
+                <a:r>
+                  <a:rPr lang="zh-CN" altLang="en-US" sz="5400" b="1" dirty="0">
+                    <a:solidFill>
+                      <a:schemeClr val="bg2">
+                        <a:lumMod val="75000"/>
+                      </a:schemeClr>
+                    </a:solidFill>
+                    <a:latin typeface="得意黑" pitchFamily="50" charset="-122"/>
+                    <a:ea typeface="得意黑" pitchFamily="50" charset="-122"/>
+                  </a:rPr>
+                  <a:t>的</a:t>
+                </a:r>
+                <a:endParaRPr lang="en-US" altLang="zh-CN" sz="5400" b="1" dirty="0">
+                  <a:solidFill>
+                    <a:schemeClr val="bg2">
+                      <a:lumMod val="75000"/>
+                    </a:schemeClr>
+                  </a:solidFill>
+                  <a:latin typeface="得意黑" pitchFamily="50" charset="-122"/>
+                  <a:ea typeface="得意黑" pitchFamily="50" charset="-122"/>
+                </a:endParaRPr>
+              </a:p>
+              <a:p>
+                <a:r>
+                  <a:rPr lang="en-US" altLang="zh-CN" sz="5400" b="1" dirty="0">
+                    <a:solidFill>
+                      <a:schemeClr val="bg2">
+                        <a:lumMod val="75000"/>
+                      </a:schemeClr>
+                    </a:solidFill>
+                    <a:latin typeface="得意黑" pitchFamily="50" charset="-122"/>
+                    <a:ea typeface="得意黑" pitchFamily="50" charset="-122"/>
+                  </a:rPr>
+                  <a:t>	</a:t>
+                </a:r>
+                <a:r>
+                  <a:rPr lang="zh-CN" altLang="en-US" sz="5400" b="1" dirty="0">
+                    <a:solidFill>
+                      <a:schemeClr val="bg2">
+                        <a:lumMod val="75000"/>
+                      </a:schemeClr>
+                    </a:solidFill>
+                    <a:latin typeface="得意黑" pitchFamily="50" charset="-122"/>
+                    <a:ea typeface="得意黑" pitchFamily="50" charset="-122"/>
+                  </a:rPr>
+                  <a:t>制作一个</a:t>
+                </a:r>
+                <a:r>
+                  <a:rPr lang="zh-CN" altLang="en-US" sz="5400" b="1" dirty="0">
+                    <a:solidFill>
+                      <a:schemeClr val="accent1">
+                        <a:lumMod val="40000"/>
+                        <a:lumOff val="60000"/>
+                      </a:schemeClr>
+                    </a:solidFill>
+                    <a:latin typeface="得意黑" pitchFamily="50" charset="-122"/>
+                    <a:ea typeface="得意黑" pitchFamily="50" charset="-122"/>
+                  </a:rPr>
+                  <a:t>编译器</a:t>
+                </a:r>
+                <a:r>
+                  <a:rPr lang="zh-CN" altLang="en-US" sz="5400" b="1" dirty="0">
+                    <a:solidFill>
+                      <a:schemeClr val="bg2">
+                        <a:lumMod val="75000"/>
+                      </a:schemeClr>
+                    </a:solidFill>
+                    <a:latin typeface="得意黑" pitchFamily="50" charset="-122"/>
+                    <a:ea typeface="得意黑" pitchFamily="50" charset="-122"/>
+                  </a:rPr>
+                  <a:t>？</a:t>
+                </a:r>
+              </a:p>
+            </p:txBody>
+          </p:sp>
+          <p:sp>
+            <p:nvSpPr>
+              <p:cNvPr id="6" name="矩形 5">
+                <a:extLst>
+                  <a:ext uri="{FF2B5EF4-FFF2-40B4-BE49-F238E27FC236}">
+                    <a16:creationId xmlns:a16="http://schemas.microsoft.com/office/drawing/2014/main" id="{B542E42B-FDA9-57E9-815D-D454820B1E4F}"/>
+                  </a:ext>
+                </a:extLst>
+              </p:cNvPr>
+              <p:cNvSpPr/>
+              <p:nvPr/>
+            </p:nvSpPr>
+            <p:spPr>
+              <a:xfrm>
+                <a:off x="7533852" y="4467163"/>
+                <a:ext cx="174172" cy="968829"/>
+              </a:xfrm>
+              <a:prstGeom prst="rect">
+                <a:avLst/>
+              </a:prstGeom>
+              <a:solidFill>
+                <a:srgbClr val="C00000"/>
+              </a:solidFill>
+              <a:ln>
+                <a:noFill/>
+              </a:ln>
+            </p:spPr>
+            <p:style>
+              <a:lnRef idx="2">
+                <a:schemeClr val="accent1">
+                  <a:shade val="15000"/>
+                </a:schemeClr>
+              </a:lnRef>
+              <a:fillRef idx="1">
+                <a:schemeClr val="accent1"/>
+              </a:fillRef>
+              <a:effectRef idx="0">
+                <a:schemeClr val="accent1"/>
+              </a:effectRef>
+              <a:fontRef idx="minor">
+                <a:schemeClr val="lt1"/>
+              </a:fontRef>
+            </p:style>
+            <p:txBody>
+              <a:bodyPr rtlCol="0" anchor="ctr"/>
+              <a:lstStyle/>
+              <a:p>
+                <a:pPr algn="ctr"/>
+                <a:endParaRPr lang="zh-CN" altLang="en-US" dirty="0"/>
+              </a:p>
+            </p:txBody>
+          </p:sp>
+          <p:sp>
+            <p:nvSpPr>
+              <p:cNvPr id="7" name="文本框 6">
+                <a:extLst>
+                  <a:ext uri="{FF2B5EF4-FFF2-40B4-BE49-F238E27FC236}">
+                    <a16:creationId xmlns:a16="http://schemas.microsoft.com/office/drawing/2014/main" id="{F1B05571-0D66-2BE1-9034-7E5593771EA9}"/>
+                  </a:ext>
+                </a:extLst>
+              </p:cNvPr>
+              <p:cNvSpPr txBox="1"/>
+              <p:nvPr/>
+            </p:nvSpPr>
+            <p:spPr>
+              <a:xfrm>
+                <a:off x="7909410" y="4470051"/>
+                <a:ext cx="3287486" cy="954107"/>
+              </a:xfrm>
+              <a:custGeom>
+                <a:avLst/>
+                <a:gdLst>
+                  <a:gd name="connsiteX0" fmla="*/ 0 w 3287486"/>
+                  <a:gd name="connsiteY0" fmla="*/ 0 h 954107"/>
+                  <a:gd name="connsiteX1" fmla="*/ 515039 w 3287486"/>
+                  <a:gd name="connsiteY1" fmla="*/ 0 h 954107"/>
+                  <a:gd name="connsiteX2" fmla="*/ 964329 w 3287486"/>
+                  <a:gd name="connsiteY2" fmla="*/ 0 h 954107"/>
+                  <a:gd name="connsiteX3" fmla="*/ 1577993 w 3287486"/>
+                  <a:gd name="connsiteY3" fmla="*/ 0 h 954107"/>
+                  <a:gd name="connsiteX4" fmla="*/ 2093033 w 3287486"/>
+                  <a:gd name="connsiteY4" fmla="*/ 0 h 954107"/>
+                  <a:gd name="connsiteX5" fmla="*/ 2608072 w 3287486"/>
+                  <a:gd name="connsiteY5" fmla="*/ 0 h 954107"/>
+                  <a:gd name="connsiteX6" fmla="*/ 3287486 w 3287486"/>
+                  <a:gd name="connsiteY6" fmla="*/ 0 h 954107"/>
+                  <a:gd name="connsiteX7" fmla="*/ 3287486 w 3287486"/>
+                  <a:gd name="connsiteY7" fmla="*/ 457971 h 954107"/>
+                  <a:gd name="connsiteX8" fmla="*/ 3287486 w 3287486"/>
+                  <a:gd name="connsiteY8" fmla="*/ 954107 h 954107"/>
+                  <a:gd name="connsiteX9" fmla="*/ 2805321 w 3287486"/>
+                  <a:gd name="connsiteY9" fmla="*/ 954107 h 954107"/>
+                  <a:gd name="connsiteX10" fmla="*/ 2257407 w 3287486"/>
+                  <a:gd name="connsiteY10" fmla="*/ 954107 h 954107"/>
+                  <a:gd name="connsiteX11" fmla="*/ 1709493 w 3287486"/>
+                  <a:gd name="connsiteY11" fmla="*/ 954107 h 954107"/>
+                  <a:gd name="connsiteX12" fmla="*/ 1194453 w 3287486"/>
+                  <a:gd name="connsiteY12" fmla="*/ 954107 h 954107"/>
+                  <a:gd name="connsiteX13" fmla="*/ 580789 w 3287486"/>
+                  <a:gd name="connsiteY13" fmla="*/ 954107 h 954107"/>
+                  <a:gd name="connsiteX14" fmla="*/ 0 w 3287486"/>
+                  <a:gd name="connsiteY14" fmla="*/ 954107 h 954107"/>
+                  <a:gd name="connsiteX15" fmla="*/ 0 w 3287486"/>
+                  <a:gd name="connsiteY15" fmla="*/ 496136 h 954107"/>
+                  <a:gd name="connsiteX16" fmla="*/ 0 w 3287486"/>
+                  <a:gd name="connsiteY16" fmla="*/ 0 h 954107"/>
+                </a:gdLst>
+                <a:ahLst/>
+                <a:cxnLst>
+                  <a:cxn ang="0">
+                    <a:pos x="connsiteX0" y="connsiteY0"/>
+                  </a:cxn>
+                  <a:cxn ang="0">
+                    <a:pos x="connsiteX1" y="connsiteY1"/>
+                  </a:cxn>
+                  <a:cxn ang="0">
+                    <a:pos x="connsiteX2" y="connsiteY2"/>
+                  </a:cxn>
+                  <a:cxn ang="0">
+                    <a:pos x="connsiteX3" y="connsiteY3"/>
+                  </a:cxn>
+                  <a:cxn ang="0">
+                    <a:pos x="connsiteX4" y="connsiteY4"/>
+                  </a:cxn>
+                  <a:cxn ang="0">
+                    <a:pos x="connsiteX5" y="connsiteY5"/>
+                  </a:cxn>
+                  <a:cxn ang="0">
+                    <a:pos x="connsiteX6" y="connsiteY6"/>
+                  </a:cxn>
+                  <a:cxn ang="0">
+                    <a:pos x="connsiteX7" y="connsiteY7"/>
+                  </a:cxn>
+                  <a:cxn ang="0">
+                    <a:pos x="connsiteX8" y="connsiteY8"/>
+                  </a:cxn>
+                  <a:cxn ang="0">
+                    <a:pos x="connsiteX9" y="connsiteY9"/>
+                  </a:cxn>
+                  <a:cxn ang="0">
+                    <a:pos x="connsiteX10" y="connsiteY10"/>
+                  </a:cxn>
+                  <a:cxn ang="0">
+                    <a:pos x="connsiteX11" y="connsiteY11"/>
+                  </a:cxn>
+                  <a:cxn ang="0">
+                    <a:pos x="connsiteX12" y="connsiteY12"/>
+                  </a:cxn>
+                  <a:cxn ang="0">
+                    <a:pos x="connsiteX13" y="connsiteY13"/>
+                  </a:cxn>
+                  <a:cxn ang="0">
+                    <a:pos x="connsiteX14" y="connsiteY14"/>
+                  </a:cxn>
+                  <a:cxn ang="0">
+                    <a:pos x="connsiteX15" y="connsiteY15"/>
+                  </a:cxn>
+                  <a:cxn ang="0">
+                    <a:pos x="connsiteX16" y="connsiteY16"/>
+                  </a:cxn>
+                </a:cxnLst>
+                <a:rect l="l" t="t" r="r" b="b"/>
+                <a:pathLst>
+                  <a:path w="3287486" h="954107" extrusionOk="0">
+                    <a:moveTo>
+                      <a:pt x="0" y="0"/>
+                    </a:moveTo>
+                    <a:cubicBezTo>
+                      <a:pt x="161600" y="-55001"/>
+                      <a:pt x="392024" y="1565"/>
+                      <a:pt x="515039" y="0"/>
+                    </a:cubicBezTo>
+                    <a:cubicBezTo>
+                      <a:pt x="638054" y="-1565"/>
+                      <a:pt x="792591" y="3414"/>
+                      <a:pt x="964329" y="0"/>
+                    </a:cubicBezTo>
+                    <a:cubicBezTo>
+                      <a:pt x="1136067" y="-3414"/>
+                      <a:pt x="1377498" y="23894"/>
+                      <a:pt x="1577993" y="0"/>
+                    </a:cubicBezTo>
+                    <a:cubicBezTo>
+                      <a:pt x="1778488" y="-23894"/>
+                      <a:pt x="1938231" y="59387"/>
+                      <a:pt x="2093033" y="0"/>
+                    </a:cubicBezTo>
+                    <a:cubicBezTo>
+                      <a:pt x="2247835" y="-59387"/>
+                      <a:pt x="2399125" y="32315"/>
+                      <a:pt x="2608072" y="0"/>
+                    </a:cubicBezTo>
+                    <a:cubicBezTo>
+                      <a:pt x="2817019" y="-32315"/>
+                      <a:pt x="3055143" y="68971"/>
+                      <a:pt x="3287486" y="0"/>
+                    </a:cubicBezTo>
+                    <a:cubicBezTo>
+                      <a:pt x="3298534" y="117221"/>
+                      <a:pt x="3239479" y="254607"/>
+                      <a:pt x="3287486" y="457971"/>
+                    </a:cubicBezTo>
+                    <a:cubicBezTo>
+                      <a:pt x="3335493" y="661335"/>
+                      <a:pt x="3256468" y="757503"/>
+                      <a:pt x="3287486" y="954107"/>
+                    </a:cubicBezTo>
+                    <a:cubicBezTo>
+                      <a:pt x="3052564" y="1003782"/>
+                      <a:pt x="2903550" y="953486"/>
+                      <a:pt x="2805321" y="954107"/>
+                    </a:cubicBezTo>
+                    <a:cubicBezTo>
+                      <a:pt x="2707092" y="954728"/>
+                      <a:pt x="2368532" y="900617"/>
+                      <a:pt x="2257407" y="954107"/>
+                    </a:cubicBezTo>
+                    <a:cubicBezTo>
+                      <a:pt x="2146282" y="1007597"/>
+                      <a:pt x="1945057" y="896601"/>
+                      <a:pt x="1709493" y="954107"/>
+                    </a:cubicBezTo>
+                    <a:cubicBezTo>
+                      <a:pt x="1473929" y="1011613"/>
+                      <a:pt x="1334965" y="923694"/>
+                      <a:pt x="1194453" y="954107"/>
+                    </a:cubicBezTo>
+                    <a:cubicBezTo>
+                      <a:pt x="1053941" y="984520"/>
+                      <a:pt x="716289" y="948488"/>
+                      <a:pt x="580789" y="954107"/>
+                    </a:cubicBezTo>
+                    <a:cubicBezTo>
+                      <a:pt x="445289" y="959726"/>
+                      <a:pt x="205423" y="890334"/>
+                      <a:pt x="0" y="954107"/>
+                    </a:cubicBezTo>
+                    <a:cubicBezTo>
+                      <a:pt x="-40069" y="750809"/>
+                      <a:pt x="51408" y="709054"/>
+                      <a:pt x="0" y="496136"/>
+                    </a:cubicBezTo>
+                    <a:cubicBezTo>
+                      <a:pt x="-51408" y="283218"/>
+                      <a:pt x="19498" y="184269"/>
+                      <a:pt x="0" y="0"/>
+                    </a:cubicBezTo>
+                    <a:close/>
+                  </a:path>
+                </a:pathLst>
+              </a:custGeom>
+              <a:noFill/>
+              <a:ln w="34925">
                 <a:solidFill>
                   <a:schemeClr val="bg2">
                     <a:lumMod val="90000"/>
                   </a:schemeClr>
                 </a:solidFill>
-                <a:latin typeface="得意黑" pitchFamily="50" charset="-122"/>
-                <a:ea typeface="得意黑" pitchFamily="50" charset="-122"/>
-              </a:rPr>
-              <a:t>Vol.0</a:t>
-            </a:r>
-          </a:p>
-          <a:p>
-            <a:r>
-              <a:rPr lang="en-US" altLang="zh-CN" sz="2800" dirty="0">
+                <a:prstDash val="dashDot"/>
+                <a:extLst>
+                  <a:ext uri="{C807C97D-BFC1-408E-A445-0C87EB9F89A2}">
+                    <ask:lineSketchStyleProps xmlns:ask="http://schemas.microsoft.com/office/drawing/2018/sketchyshapes" sd="1219033472">
+                      <a:prstGeom prst="rect">
+                        <a:avLst/>
+                      </a:prstGeom>
+                      <ask:type>
+                        <ask:lineSketchScribble/>
+                      </ask:type>
+                    </ask:lineSketchStyleProps>
+                  </a:ext>
+                </a:extLst>
+              </a:ln>
+            </p:spPr>
+            <p:txBody>
+              <a:bodyPr wrap="square" rtlCol="0">
+                <a:spAutoFit/>
+              </a:bodyPr>
+              <a:lstStyle/>
+              <a:p>
+                <a:r>
+                  <a:rPr lang="en-US" altLang="zh-CN" sz="2800" dirty="0">
+                    <a:solidFill>
+                      <a:schemeClr val="bg2">
+                        <a:lumMod val="90000"/>
+                      </a:schemeClr>
+                    </a:solidFill>
+                    <a:latin typeface="得意黑" pitchFamily="50" charset="-122"/>
+                    <a:ea typeface="得意黑" pitchFamily="50" charset="-122"/>
+                  </a:rPr>
+                  <a:t>Vol.0</a:t>
+                </a:r>
+              </a:p>
+              <a:p>
+                <a:r>
+                  <a:rPr lang="en-US" altLang="zh-CN" sz="2800" dirty="0">
+                    <a:solidFill>
+                      <a:schemeClr val="bg2">
+                        <a:lumMod val="90000"/>
+                      </a:schemeClr>
+                    </a:solidFill>
+                    <a:latin typeface="得意黑" pitchFamily="50" charset="-122"/>
+                    <a:ea typeface="得意黑" pitchFamily="50" charset="-122"/>
+                  </a:rPr>
+                  <a:t>Made By </a:t>
+                </a:r>
+                <a:r>
+                  <a:rPr lang="zh-CN" altLang="en-US" sz="2800" b="1" dirty="0">
+                    <a:solidFill>
+                      <a:schemeClr val="accent1">
+                        <a:lumMod val="20000"/>
+                        <a:lumOff val="80000"/>
+                      </a:schemeClr>
+                    </a:solidFill>
+                    <a:latin typeface="得意黑" pitchFamily="50" charset="-122"/>
+                    <a:ea typeface="得意黑" pitchFamily="50" charset="-122"/>
+                  </a:rPr>
+                  <a:t>在下未定义</a:t>
+                </a:r>
+              </a:p>
+            </p:txBody>
+          </p:sp>
+        </p:grpSp>
+        <p:grpSp>
+          <p:nvGrpSpPr>
+            <p:cNvPr id="2" name="组合 1">
+              <a:extLst>
+                <a:ext uri="{FF2B5EF4-FFF2-40B4-BE49-F238E27FC236}">
+                  <a16:creationId xmlns:a16="http://schemas.microsoft.com/office/drawing/2014/main" id="{30E8B54C-5643-D92C-2645-04B20D78290F}"/>
+                </a:ext>
+              </a:extLst>
+            </p:cNvPr>
+            <p:cNvGrpSpPr/>
+            <p:nvPr/>
+          </p:nvGrpSpPr>
+          <p:grpSpPr>
+            <a:xfrm>
+              <a:off x="816429" y="696686"/>
+              <a:ext cx="5279571" cy="5584371"/>
+              <a:chOff x="816429" y="696686"/>
+              <a:chExt cx="5279571" cy="5584371"/>
+            </a:xfrm>
+          </p:grpSpPr>
+          <p:sp>
+            <p:nvSpPr>
+              <p:cNvPr id="5" name="矩形: 圆角 4">
+                <a:extLst>
+                  <a:ext uri="{FF2B5EF4-FFF2-40B4-BE49-F238E27FC236}">
+                    <a16:creationId xmlns:a16="http://schemas.microsoft.com/office/drawing/2014/main" id="{E2991793-CE86-E003-25B7-95DE22AA2754}"/>
+                  </a:ext>
+                </a:extLst>
+              </p:cNvPr>
+              <p:cNvSpPr/>
+              <p:nvPr/>
+            </p:nvSpPr>
+            <p:spPr>
+              <a:xfrm>
+                <a:off x="816429" y="696686"/>
+                <a:ext cx="5279571" cy="5584371"/>
+              </a:xfrm>
+              <a:prstGeom prst="roundRect">
+                <a:avLst/>
+              </a:prstGeom>
+              <a:noFill/>
+              <a:ln w="41275">
                 <a:solidFill>
-                  <a:schemeClr val="bg2">
-                    <a:lumMod val="90000"/>
+                  <a:schemeClr val="tx2">
+                    <a:lumMod val="60000"/>
+                    <a:lumOff val="40000"/>
                   </a:schemeClr>
                 </a:solidFill>
-                <a:latin typeface="得意黑" pitchFamily="50" charset="-122"/>
-                <a:ea typeface="得意黑" pitchFamily="50" charset="-122"/>
-              </a:rPr>
-              <a:t>Made By </a:t>
-            </a:r>
-            <a:r>
-              <a:rPr lang="zh-CN" altLang="en-US" sz="2800" b="1" dirty="0">
-                <a:solidFill>
-                  <a:schemeClr val="accent1">
-                    <a:lumMod val="20000"/>
-                    <a:lumOff val="80000"/>
-                  </a:schemeClr>
-                </a:solidFill>
-                <a:latin typeface="得意黑" pitchFamily="50" charset="-122"/>
-                <a:ea typeface="得意黑" pitchFamily="50" charset="-122"/>
-              </a:rPr>
-              <a:t>在下未定义</a:t>
-            </a:r>
-          </a:p>
-        </p:txBody>
-      </p:sp>
-      <p:pic>
-        <p:nvPicPr>
-          <p:cNvPr id="11" name="图片 10">
-            <a:extLst>
-              <a:ext uri="{FF2B5EF4-FFF2-40B4-BE49-F238E27FC236}">
-                <a16:creationId xmlns:a16="http://schemas.microsoft.com/office/drawing/2014/main" id="{DA083ABC-574B-4C59-71EC-C3E489607C86}"/>
-              </a:ext>
-            </a:extLst>
-          </p:cNvPr>
-          <p:cNvPicPr>
-            <a:picLocks noChangeAspect="1"/>
-          </p:cNvPicPr>
-          <p:nvPr/>
-        </p:nvPicPr>
-        <p:blipFill>
-          <a:blip r:embed="rId2"/>
-          <a:stretch>
-            <a:fillRect/>
-          </a:stretch>
-        </p:blipFill>
-        <p:spPr>
-          <a:xfrm>
-            <a:off x="1017814" y="990600"/>
-            <a:ext cx="4876800" cy="4876800"/>
-          </a:xfrm>
-          <a:prstGeom prst="rect">
-            <a:avLst/>
-          </a:prstGeom>
-        </p:spPr>
-      </p:pic>
-      <p:sp>
-        <p:nvSpPr>
-          <p:cNvPr id="3" name="文本框 2">
-            <a:extLst>
-              <a:ext uri="{FF2B5EF4-FFF2-40B4-BE49-F238E27FC236}">
-                <a16:creationId xmlns:a16="http://schemas.microsoft.com/office/drawing/2014/main" id="{099E6CDF-A58B-9DDF-2D21-91BAFFE45363}"/>
-              </a:ext>
-            </a:extLst>
-          </p:cNvPr>
-          <p:cNvSpPr txBox="1"/>
-          <p:nvPr/>
-        </p:nvSpPr>
-        <p:spPr>
-          <a:xfrm>
-            <a:off x="4760867" y="1573849"/>
-            <a:ext cx="822960" cy="297517"/>
-          </a:xfrm>
-          <a:prstGeom prst="rect">
-            <a:avLst/>
-          </a:prstGeom>
-          <a:noFill/>
-        </p:spPr>
-        <p:txBody>
-          <a:bodyPr wrap="square" rtlCol="0">
-            <a:spAutoFit/>
-          </a:bodyPr>
-          <a:lstStyle/>
-          <a:p>
-            <a:r>
-              <a:rPr lang="en-US" altLang="zh-CN" sz="2000" b="1" baseline="30000" dirty="0">
-                <a:solidFill>
-                  <a:schemeClr val="bg2"/>
-                </a:solidFill>
-                <a:latin typeface="得意黑" pitchFamily="50" charset="-122"/>
-                <a:ea typeface="得意黑" pitchFamily="50" charset="-122"/>
-              </a:rPr>
-              <a:t>[1]</a:t>
-            </a:r>
-            <a:endParaRPr lang="zh-CN" altLang="en-US" sz="2000" b="1" baseline="30000" dirty="0">
-              <a:solidFill>
-                <a:schemeClr val="bg2"/>
-              </a:solidFill>
-              <a:latin typeface="得意黑" pitchFamily="50" charset="-122"/>
-              <a:ea typeface="得意黑" pitchFamily="50" charset="-122"/>
-            </a:endParaRPr>
-          </a:p>
-        </p:txBody>
-      </p:sp>
+              </a:ln>
+            </p:spPr>
+            <p:style>
+              <a:lnRef idx="2">
+                <a:schemeClr val="accent1">
+                  <a:shade val="15000"/>
+                </a:schemeClr>
+              </a:lnRef>
+              <a:fillRef idx="1">
+                <a:schemeClr val="accent1"/>
+              </a:fillRef>
+              <a:effectRef idx="0">
+                <a:schemeClr val="accent1"/>
+              </a:effectRef>
+              <a:fontRef idx="minor">
+                <a:schemeClr val="lt1"/>
+              </a:fontRef>
+            </p:style>
+            <p:txBody>
+              <a:bodyPr rtlCol="0" anchor="ctr"/>
+              <a:lstStyle/>
+              <a:p>
+                <a:pPr algn="ctr"/>
+                <a:endParaRPr lang="zh-CN" altLang="en-US"/>
+              </a:p>
+            </p:txBody>
+          </p:sp>
+          <p:pic>
+            <p:nvPicPr>
+              <p:cNvPr id="11" name="图片 10">
+                <a:extLst>
+                  <a:ext uri="{FF2B5EF4-FFF2-40B4-BE49-F238E27FC236}">
+                    <a16:creationId xmlns:a16="http://schemas.microsoft.com/office/drawing/2014/main" id="{DA083ABC-574B-4C59-71EC-C3E489607C86}"/>
+                  </a:ext>
+                </a:extLst>
+              </p:cNvPr>
+              <p:cNvPicPr>
+                <a:picLocks noChangeAspect="1"/>
+              </p:cNvPicPr>
+              <p:nvPr/>
+            </p:nvPicPr>
+            <p:blipFill>
+              <a:blip r:embed="rId3"/>
+              <a:stretch>
+                <a:fillRect/>
+              </a:stretch>
+            </p:blipFill>
+            <p:spPr>
+              <a:xfrm>
+                <a:off x="1017814" y="990600"/>
+                <a:ext cx="4876800" cy="4876800"/>
+              </a:xfrm>
+              <a:prstGeom prst="rect">
+                <a:avLst/>
+              </a:prstGeom>
+            </p:spPr>
+          </p:pic>
+          <p:sp>
+            <p:nvSpPr>
+              <p:cNvPr id="3" name="文本框 2">
+                <a:extLst>
+                  <a:ext uri="{FF2B5EF4-FFF2-40B4-BE49-F238E27FC236}">
+                    <a16:creationId xmlns:a16="http://schemas.microsoft.com/office/drawing/2014/main" id="{099E6CDF-A58B-9DDF-2D21-91BAFFE45363}"/>
+                  </a:ext>
+                </a:extLst>
+              </p:cNvPr>
+              <p:cNvSpPr txBox="1"/>
+              <p:nvPr/>
+            </p:nvSpPr>
+            <p:spPr>
+              <a:xfrm>
+                <a:off x="4760867" y="1573849"/>
+                <a:ext cx="822960" cy="297517"/>
+              </a:xfrm>
+              <a:prstGeom prst="rect">
+                <a:avLst/>
+              </a:prstGeom>
+              <a:noFill/>
+            </p:spPr>
+            <p:txBody>
+              <a:bodyPr wrap="square" rtlCol="0">
+                <a:spAutoFit/>
+              </a:bodyPr>
+              <a:lstStyle/>
+              <a:p>
+                <a:r>
+                  <a:rPr lang="en-US" altLang="zh-CN" sz="2000" b="1" baseline="30000" dirty="0">
+                    <a:solidFill>
+                      <a:schemeClr val="bg2"/>
+                    </a:solidFill>
+                    <a:latin typeface="得意黑" pitchFamily="50" charset="-122"/>
+                    <a:ea typeface="得意黑" pitchFamily="50" charset="-122"/>
+                  </a:rPr>
+                  <a:t>[1]</a:t>
+                </a:r>
+                <a:endParaRPr lang="zh-CN" altLang="en-US" sz="2000" b="1" baseline="30000" dirty="0">
+                  <a:solidFill>
+                    <a:schemeClr val="bg2"/>
+                  </a:solidFill>
+                  <a:latin typeface="得意黑" pitchFamily="50" charset="-122"/>
+                  <a:ea typeface="得意黑" pitchFamily="50" charset="-122"/>
+                </a:endParaRPr>
+              </a:p>
+            </p:txBody>
+          </p:sp>
+        </p:grpSp>
+      </p:grpSp>
     </p:spTree>
+    <p:custDataLst>
+      <p:tags r:id="rId1"/>
+    </p:custDataLst>
     <p:extLst>
       <p:ext uri="{BB962C8B-B14F-4D97-AF65-F5344CB8AC3E}">
         <p14:creationId xmlns:p14="http://schemas.microsoft.com/office/powerpoint/2010/main" val="2989833837"/>
@@ -6068,6 +6585,14 @@
   <p:clrMapOvr>
     <a:masterClrMapping/>
   </p:clrMapOvr>
+  <mc:AlternateContent xmlns:mc="http://schemas.openxmlformats.org/markup-compatibility/2006" xmlns:p14="http://schemas.microsoft.com/office/powerpoint/2010/main">
+    <mc:Choice Requires="p14">
+      <p:transition p14:dur="10" advTm="3000"/>
+    </mc:Choice>
+    <mc:Fallback xmlns="">
+      <p:transition advTm="3000"/>
+    </mc:Fallback>
+  </mc:AlternateContent>
   <p:timing>
     <p:tnLst>
       <p:par>
@@ -6089,7 +6614,7 @@
                             </p:stCondLst>
                             <p:childTnLst>
                               <p:par>
-                                <p:cTn id="5" presetID="10" presetClass="entr" presetSubtype="0" fill="hold" grpId="0" nodeType="clickEffect">
+                                <p:cTn id="5" presetID="1" presetClass="entr" presetSubtype="0" fill="hold" nodeType="clickEffect">
                                   <p:stCondLst>
                                     <p:cond delay="0"/>
                                   </p:stCondLst>
@@ -6102,7 +6627,7 @@
                                           </p:stCondLst>
                                         </p:cTn>
                                         <p:tgtEl>
-                                          <p:spTgt spid="4"/>
+                                          <p:spTgt spid="10"/>
                                         </p:tgtEl>
                                         <p:attrNameLst>
                                           <p:attrName>style.visibility</p:attrName>
@@ -6112,54 +6637,826 @@
                                         <p:strVal val="visible"/>
                                       </p:to>
                                     </p:set>
-                                    <p:animEffect transition="in" filter="fade">
-                                      <p:cBhvr>
-                                        <p:cTn id="7" dur="500"/>
-                                        <p:tgtEl>
-                                          <p:spTgt spid="4"/>
-                                        </p:tgtEl>
-                                      </p:cBhvr>
-                                    </p:animEffect>
                                   </p:childTnLst>
                                 </p:cTn>
                               </p:par>
+                            </p:childTnLst>
+                          </p:cTn>
+                        </p:par>
+                        <p:par>
+                          <p:cTn id="7" fill="hold">
+                            <p:stCondLst>
+                              <p:cond delay="0"/>
+                            </p:stCondLst>
+                            <p:childTnLst>
                               <p:par>
-                                <p:cTn id="8" presetID="10" presetClass="entr" presetSubtype="0" fill="hold" grpId="0" nodeType="withEffect">
+                                <p:cTn id="8" presetID="35" presetClass="emph" presetSubtype="0" repeatCount="3000" fill="hold" nodeType="afterEffect">
                                   <p:stCondLst>
                                     <p:cond delay="0"/>
                                   </p:stCondLst>
                                   <p:childTnLst>
-                                    <p:set>
+                                    <p:anim calcmode="discrete" valueType="str">
                                       <p:cBhvr>
-                                        <p:cTn id="9" dur="1" fill="hold">
-                                          <p:stCondLst>
-                                            <p:cond delay="0"/>
-                                          </p:stCondLst>
-                                        </p:cTn>
+                                        <p:cTn id="9" dur="50" fill="hold"/>
                                         <p:tgtEl>
-                                          <p:spTgt spid="7"/>
+                                          <p:spTgt spid="10"/>
                                         </p:tgtEl>
                                         <p:attrNameLst>
                                           <p:attrName>style.visibility</p:attrName>
                                         </p:attrNameLst>
                                       </p:cBhvr>
-                                      <p:to>
-                                        <p:strVal val="visible"/>
-                                      </p:to>
-                                    </p:set>
-                                    <p:animEffect transition="in" filter="fade">
-                                      <p:cBhvr>
-                                        <p:cTn id="10" dur="500"/>
-                                        <p:tgtEl>
-                                          <p:spTgt spid="7"/>
-                                        </p:tgtEl>
-                                      </p:cBhvr>
-                                    </p:animEffect>
+                                      <p:tavLst>
+                                        <p:tav tm="0">
+                                          <p:val>
+                                            <p:strVal val="hidden"/>
+                                          </p:val>
+                                        </p:tav>
+                                        <p:tav tm="50000">
+                                          <p:val>
+                                            <p:strVal val="visible"/>
+                                          </p:val>
+                                        </p:tav>
+                                      </p:tavLst>
+                                    </p:anim>
                                   </p:childTnLst>
                                 </p:cTn>
                               </p:par>
+                            </p:childTnLst>
+                          </p:cTn>
+                        </p:par>
+                      </p:childTnLst>
+                    </p:cTn>
+                  </p:par>
+                </p:childTnLst>
+              </p:cTn>
+              <p:prevCondLst>
+                <p:cond evt="onPrev" delay="0">
+                  <p:tgtEl>
+                    <p:sldTgt/>
+                  </p:tgtEl>
+                </p:cond>
+              </p:prevCondLst>
+              <p:nextCondLst>
+                <p:cond evt="onNext" delay="0">
+                  <p:tgtEl>
+                    <p:sldTgt/>
+                  </p:tgtEl>
+                </p:cond>
+              </p:nextCondLst>
+            </p:seq>
+          </p:childTnLst>
+        </p:cTn>
+      </p:par>
+    </p:tnLst>
+  </p:timing>
+</p:sld>
+</file>
+
+<file path=ppt/slides/slide3.xml><?xml version="1.0" encoding="utf-8"?>
+<p:sld xmlns:a="http://schemas.openxmlformats.org/drawingml/2006/main" xmlns:r="http://schemas.openxmlformats.org/officeDocument/2006/relationships" xmlns:p="http://schemas.openxmlformats.org/presentationml/2006/main">
+  <p:cSld>
+    <p:spTree>
+      <p:nvGrpSpPr>
+        <p:cNvPr id="1" name=""/>
+        <p:cNvGrpSpPr/>
+        <p:nvPr/>
+      </p:nvGrpSpPr>
+      <p:grpSpPr>
+        <a:xfrm>
+          <a:off x="0" y="0"/>
+          <a:ext cx="0" cy="0"/>
+          <a:chOff x="0" y="0"/>
+          <a:chExt cx="0" cy="0"/>
+        </a:xfrm>
+      </p:grpSpPr>
+      <p:sp>
+        <p:nvSpPr>
+          <p:cNvPr id="2" name="矩形: 圆角 1">
+            <a:extLst>
+              <a:ext uri="{FF2B5EF4-FFF2-40B4-BE49-F238E27FC236}">
+                <a16:creationId xmlns:a16="http://schemas.microsoft.com/office/drawing/2014/main" id="{041EF2A3-C741-F6D4-AD6B-504174035535}"/>
+              </a:ext>
+            </a:extLst>
+          </p:cNvPr>
+          <p:cNvSpPr/>
+          <p:nvPr/>
+        </p:nvSpPr>
+        <p:spPr>
+          <a:xfrm>
+            <a:off x="12777281" y="1867710"/>
+            <a:ext cx="2636196" cy="3122579"/>
+          </a:xfrm>
+          <a:prstGeom prst="roundRect">
+            <a:avLst/>
+          </a:prstGeom>
+          <a:solidFill>
+            <a:schemeClr val="tx1">
+              <a:lumMod val="65000"/>
+              <a:lumOff val="35000"/>
+            </a:schemeClr>
+          </a:solidFill>
+        </p:spPr>
+        <p:style>
+          <a:lnRef idx="2">
+            <a:schemeClr val="accent1">
+              <a:shade val="15000"/>
+            </a:schemeClr>
+          </a:lnRef>
+          <a:fillRef idx="1">
+            <a:schemeClr val="accent1"/>
+          </a:fillRef>
+          <a:effectRef idx="0">
+            <a:schemeClr val="accent1"/>
+          </a:effectRef>
+          <a:fontRef idx="minor">
+            <a:schemeClr val="lt1"/>
+          </a:fontRef>
+        </p:style>
+        <p:txBody>
+          <a:bodyPr rtlCol="0" anchor="ctr"/>
+          <a:lstStyle/>
+          <a:p>
+            <a:pPr algn="ctr"/>
+            <a:endParaRPr lang="zh-CN" altLang="en-US" dirty="0"/>
+          </a:p>
+        </p:txBody>
+      </p:sp>
+      <p:sp>
+        <p:nvSpPr>
+          <p:cNvPr id="5" name="矩形: 圆角 4">
+            <a:extLst>
+              <a:ext uri="{FF2B5EF4-FFF2-40B4-BE49-F238E27FC236}">
+                <a16:creationId xmlns:a16="http://schemas.microsoft.com/office/drawing/2014/main" id="{167ACE7D-2ACF-F2A0-64F7-E01065D808DC}"/>
+              </a:ext>
+            </a:extLst>
+          </p:cNvPr>
+          <p:cNvSpPr/>
+          <p:nvPr/>
+        </p:nvSpPr>
+        <p:spPr>
+          <a:xfrm>
+            <a:off x="15306797" y="1867710"/>
+            <a:ext cx="2636196" cy="3122579"/>
+          </a:xfrm>
+          <a:prstGeom prst="roundRect">
+            <a:avLst/>
+          </a:prstGeom>
+          <a:solidFill>
+            <a:schemeClr val="tx1">
+              <a:lumMod val="65000"/>
+              <a:lumOff val="35000"/>
+            </a:schemeClr>
+          </a:solidFill>
+        </p:spPr>
+        <p:style>
+          <a:lnRef idx="2">
+            <a:schemeClr val="accent1">
+              <a:shade val="15000"/>
+            </a:schemeClr>
+          </a:lnRef>
+          <a:fillRef idx="1">
+            <a:schemeClr val="accent1"/>
+          </a:fillRef>
+          <a:effectRef idx="0">
+            <a:schemeClr val="accent1"/>
+          </a:effectRef>
+          <a:fontRef idx="minor">
+            <a:schemeClr val="lt1"/>
+          </a:fontRef>
+        </p:style>
+        <p:txBody>
+          <a:bodyPr rtlCol="0" anchor="ctr"/>
+          <a:lstStyle/>
+          <a:p>
+            <a:pPr algn="ctr"/>
+            <a:endParaRPr lang="zh-CN" altLang="en-US" dirty="0"/>
+          </a:p>
+        </p:txBody>
+      </p:sp>
+      <p:sp>
+        <p:nvSpPr>
+          <p:cNvPr id="6" name="文本框 5">
+            <a:extLst>
+              <a:ext uri="{FF2B5EF4-FFF2-40B4-BE49-F238E27FC236}">
+                <a16:creationId xmlns:a16="http://schemas.microsoft.com/office/drawing/2014/main" id="{D8E3B0B1-B1F4-AC91-CD08-75C8CAAE2FCC}"/>
+              </a:ext>
+            </a:extLst>
+          </p:cNvPr>
+          <p:cNvSpPr txBox="1"/>
+          <p:nvPr/>
+        </p:nvSpPr>
+        <p:spPr>
+          <a:xfrm>
+            <a:off x="4511202" y="2921168"/>
+            <a:ext cx="2636196" cy="1015663"/>
+          </a:xfrm>
+          <a:prstGeom prst="rect">
+            <a:avLst/>
+          </a:prstGeom>
+          <a:noFill/>
+        </p:spPr>
+        <p:txBody>
+          <a:bodyPr wrap="square" rtlCol="0">
+            <a:spAutoFit/>
+          </a:bodyPr>
+          <a:lstStyle/>
+          <a:p>
+            <a:r>
+              <a:rPr lang="zh-CN" altLang="en-US" sz="6000" dirty="0">
+                <a:solidFill>
+                  <a:schemeClr val="tx2">
+                    <a:lumMod val="20000"/>
+                    <a:lumOff val="80000"/>
+                  </a:schemeClr>
+                </a:solidFill>
+                <a:latin typeface="得意黑" pitchFamily="2" charset="-122"/>
+                <a:ea typeface="得意黑" pitchFamily="2" charset="-122"/>
+              </a:rPr>
+              <a:t>词法分析</a:t>
+            </a:r>
+          </a:p>
+        </p:txBody>
+      </p:sp>
+      <p:sp>
+        <p:nvSpPr>
+          <p:cNvPr id="15" name="文本框 14">
+            <a:extLst>
+              <a:ext uri="{FF2B5EF4-FFF2-40B4-BE49-F238E27FC236}">
+                <a16:creationId xmlns:a16="http://schemas.microsoft.com/office/drawing/2014/main" id="{A8C4DFE0-21EC-CE91-9AA2-A3AE85E0F25A}"/>
+              </a:ext>
+            </a:extLst>
+          </p:cNvPr>
+          <p:cNvSpPr txBox="1"/>
+          <p:nvPr/>
+        </p:nvSpPr>
+        <p:spPr>
+          <a:xfrm>
+            <a:off x="1940689" y="3244334"/>
+            <a:ext cx="8488101" cy="369332"/>
+          </a:xfrm>
+          <a:prstGeom prst="rect">
+            <a:avLst/>
+          </a:prstGeom>
+          <a:noFill/>
+        </p:spPr>
+        <p:txBody>
+          <a:bodyPr wrap="square">
+            <a:spAutoFit/>
+          </a:bodyPr>
+          <a:lstStyle/>
+          <a:p>
+            <a:pPr marL="0" marR="0" lvl="0" indent="0" algn="l" defTabSz="914400" rtl="0" eaLnBrk="0" fontAlgn="base" latinLnBrk="0" hangingPunct="0">
+              <a:lnSpc>
+                <a:spcPct val="100000"/>
+              </a:lnSpc>
+              <a:spcBef>
+                <a:spcPct val="0"/>
+              </a:spcBef>
+              <a:spcAft>
+                <a:spcPct val="0"/>
+              </a:spcAft>
+              <a:buClrTx/>
+              <a:buSzTx/>
+              <a:buFontTx/>
+              <a:buNone/>
+              <a:tabLst/>
+            </a:pPr>
+            <a:r>
+              <a:rPr kumimoji="0" lang="zh-CN" altLang="zh-CN" sz="1800" b="0" i="0" u="none" strike="noStrike" cap="none" normalizeH="0" baseline="0" dirty="0">
+                <a:ln>
+                  <a:noFill/>
+                </a:ln>
+                <a:solidFill>
+                  <a:schemeClr val="tx2">
+                    <a:lumMod val="20000"/>
+                    <a:lumOff val="80000"/>
+                  </a:schemeClr>
+                </a:solidFill>
+                <a:effectLst/>
+                <a:latin typeface="得意黑" pitchFamily="2" charset="-122"/>
+                <a:ea typeface="得意黑" pitchFamily="2" charset="-122"/>
+              </a:rPr>
+              <a:t>词法分析将源代码字符流依据正则规则扫描过滤，通过DFA识别为规范化记号流，是编译的首步处理。</a:t>
+            </a:r>
+          </a:p>
+        </p:txBody>
+      </p:sp>
+      <p:grpSp>
+        <p:nvGrpSpPr>
+          <p:cNvPr id="10" name="组合 9">
+            <a:extLst>
+              <a:ext uri="{FF2B5EF4-FFF2-40B4-BE49-F238E27FC236}">
+                <a16:creationId xmlns:a16="http://schemas.microsoft.com/office/drawing/2014/main" id="{2551A95E-E354-0004-0451-7A1E731DAE39}"/>
+              </a:ext>
+            </a:extLst>
+          </p:cNvPr>
+          <p:cNvGrpSpPr/>
+          <p:nvPr/>
+        </p:nvGrpSpPr>
+        <p:grpSpPr>
+          <a:xfrm>
+            <a:off x="963807" y="2349000"/>
+            <a:ext cx="1440000" cy="2160000"/>
+            <a:chOff x="945717" y="4157223"/>
+            <a:chExt cx="1440000" cy="2160000"/>
+          </a:xfrm>
+        </p:grpSpPr>
+        <p:sp>
+          <p:nvSpPr>
+            <p:cNvPr id="11" name="矩形: 折角 10">
+              <a:extLst>
+                <a:ext uri="{FF2B5EF4-FFF2-40B4-BE49-F238E27FC236}">
+                  <a16:creationId xmlns:a16="http://schemas.microsoft.com/office/drawing/2014/main" id="{85FEBB50-EBCD-12D0-36DA-639301952A33}"/>
+                </a:ext>
+              </a:extLst>
+            </p:cNvPr>
+            <p:cNvSpPr/>
+            <p:nvPr/>
+          </p:nvSpPr>
+          <p:spPr>
+            <a:xfrm rot="10800000" flipH="1">
+              <a:off x="945717" y="4157223"/>
+              <a:ext cx="1440000" cy="2160000"/>
+            </a:xfrm>
+            <a:prstGeom prst="foldedCorner">
+              <a:avLst>
+                <a:gd name="adj" fmla="val 37469"/>
+              </a:avLst>
+            </a:prstGeom>
+            <a:solidFill>
+              <a:schemeClr val="bg1">
+                <a:lumMod val="75000"/>
+              </a:schemeClr>
+            </a:solidFill>
+          </p:spPr>
+          <p:style>
+            <a:lnRef idx="2">
+              <a:schemeClr val="accent1">
+                <a:shade val="15000"/>
+              </a:schemeClr>
+            </a:lnRef>
+            <a:fillRef idx="1">
+              <a:schemeClr val="accent1"/>
+            </a:fillRef>
+            <a:effectRef idx="0">
+              <a:schemeClr val="accent1"/>
+            </a:effectRef>
+            <a:fontRef idx="minor">
+              <a:schemeClr val="lt1"/>
+            </a:fontRef>
+          </p:style>
+          <p:txBody>
+            <a:bodyPr rtlCol="0" anchor="ctr"/>
+            <a:lstStyle/>
+            <a:p>
+              <a:pPr algn="ctr"/>
+              <a:endParaRPr lang="zh-CN" altLang="en-US" dirty="0"/>
+            </a:p>
+          </p:txBody>
+        </p:sp>
+        <p:pic>
+          <p:nvPicPr>
+            <p:cNvPr id="12" name="图片 11">
+              <a:extLst>
+                <a:ext uri="{FF2B5EF4-FFF2-40B4-BE49-F238E27FC236}">
+                  <a16:creationId xmlns:a16="http://schemas.microsoft.com/office/drawing/2014/main" id="{9080A4B6-CD87-DEB0-67DB-7C11AB7AD94D}"/>
+                </a:ext>
+              </a:extLst>
+            </p:cNvPr>
+            <p:cNvPicPr>
+              <a:picLocks noChangeAspect="1"/>
+            </p:cNvPicPr>
+            <p:nvPr/>
+          </p:nvPicPr>
+          <p:blipFill>
+            <a:blip r:embed="rId3"/>
+            <a:stretch>
+              <a:fillRect/>
+            </a:stretch>
+          </p:blipFill>
+          <p:spPr>
+            <a:xfrm>
+              <a:off x="1360917" y="5047639"/>
+              <a:ext cx="609600" cy="609600"/>
+            </a:xfrm>
+            <a:prstGeom prst="rect">
+              <a:avLst/>
+            </a:prstGeom>
+          </p:spPr>
+        </p:pic>
+        <p:sp>
+          <p:nvSpPr>
+            <p:cNvPr id="13" name="文本框 12">
+              <a:extLst>
+                <a:ext uri="{FF2B5EF4-FFF2-40B4-BE49-F238E27FC236}">
+                  <a16:creationId xmlns:a16="http://schemas.microsoft.com/office/drawing/2014/main" id="{990CCC1E-960E-2898-9B24-0B9CF40BE38D}"/>
+                </a:ext>
+              </a:extLst>
+            </p:cNvPr>
+            <p:cNvSpPr txBox="1"/>
+            <p:nvPr/>
+          </p:nvSpPr>
+          <p:spPr>
+            <a:xfrm>
+              <a:off x="1696173" y="4939706"/>
+              <a:ext cx="386080" cy="297517"/>
+            </a:xfrm>
+            <a:prstGeom prst="rect">
+              <a:avLst/>
+            </a:prstGeom>
+            <a:noFill/>
+          </p:spPr>
+          <p:txBody>
+            <a:bodyPr wrap="square" rtlCol="0">
+              <a:spAutoFit/>
+            </a:bodyPr>
+            <a:lstStyle/>
+            <a:p>
+              <a:r>
+                <a:rPr lang="en-US" altLang="zh-CN" sz="2000" baseline="30000" dirty="0">
+                  <a:solidFill>
+                    <a:schemeClr val="bg1">
+                      <a:lumMod val="95000"/>
+                    </a:schemeClr>
+                  </a:solidFill>
+                  <a:latin typeface="得意黑" pitchFamily="50" charset="-122"/>
+                  <a:ea typeface="得意黑" pitchFamily="50" charset="-122"/>
+                </a:rPr>
+                <a:t>[1]</a:t>
+              </a:r>
+              <a:endParaRPr lang="zh-CN" altLang="en-US" sz="2000" baseline="30000" dirty="0">
+                <a:solidFill>
+                  <a:schemeClr val="bg1">
+                    <a:lumMod val="95000"/>
+                  </a:schemeClr>
+                </a:solidFill>
+                <a:latin typeface="得意黑" pitchFamily="50" charset="-122"/>
+                <a:ea typeface="得意黑" pitchFamily="50" charset="-122"/>
+              </a:endParaRPr>
+            </a:p>
+          </p:txBody>
+        </p:sp>
+      </p:grpSp>
+      <p:grpSp>
+        <p:nvGrpSpPr>
+          <p:cNvPr id="20" name="组合 19">
+            <a:extLst>
+              <a:ext uri="{FF2B5EF4-FFF2-40B4-BE49-F238E27FC236}">
+                <a16:creationId xmlns:a16="http://schemas.microsoft.com/office/drawing/2014/main" id="{3CDE86B1-B71E-F1DB-0F1E-99D76D393EC4}"/>
+              </a:ext>
+            </a:extLst>
+          </p:cNvPr>
+          <p:cNvGrpSpPr/>
+          <p:nvPr/>
+        </p:nvGrpSpPr>
+        <p:grpSpPr>
+          <a:xfrm>
+            <a:off x="5472574" y="2349000"/>
+            <a:ext cx="1674824" cy="2160000"/>
+            <a:chOff x="9708790" y="4138888"/>
+            <a:chExt cx="1674824" cy="2160000"/>
+          </a:xfrm>
+        </p:grpSpPr>
+        <p:sp>
+          <p:nvSpPr>
+            <p:cNvPr id="16" name="矩形: 折角 15">
+              <a:extLst>
+                <a:ext uri="{FF2B5EF4-FFF2-40B4-BE49-F238E27FC236}">
+                  <a16:creationId xmlns:a16="http://schemas.microsoft.com/office/drawing/2014/main" id="{C53B4525-9FCE-5503-00A9-0C1B306C73A8}"/>
+                </a:ext>
+              </a:extLst>
+            </p:cNvPr>
+            <p:cNvSpPr/>
+            <p:nvPr/>
+          </p:nvSpPr>
+          <p:spPr>
+            <a:xfrm rot="10800000" flipH="1">
+              <a:off x="9708790" y="4138888"/>
+              <a:ext cx="1440000" cy="2160000"/>
+            </a:xfrm>
+            <a:prstGeom prst="foldedCorner">
+              <a:avLst>
+                <a:gd name="adj" fmla="val 37469"/>
+              </a:avLst>
+            </a:prstGeom>
+            <a:solidFill>
+              <a:schemeClr val="bg1">
+                <a:lumMod val="75000"/>
+              </a:schemeClr>
+            </a:solidFill>
+          </p:spPr>
+          <p:style>
+            <a:lnRef idx="2">
+              <a:schemeClr val="accent1">
+                <a:shade val="15000"/>
+              </a:schemeClr>
+            </a:lnRef>
+            <a:fillRef idx="1">
+              <a:schemeClr val="accent1"/>
+            </a:fillRef>
+            <a:effectRef idx="0">
+              <a:schemeClr val="accent1"/>
+            </a:effectRef>
+            <a:fontRef idx="minor">
+              <a:schemeClr val="lt1"/>
+            </a:fontRef>
+          </p:style>
+          <p:txBody>
+            <a:bodyPr rtlCol="0" anchor="ctr"/>
+            <a:lstStyle/>
+            <a:p>
+              <a:pPr algn="ctr"/>
+              <a:endParaRPr lang="zh-CN" altLang="en-US" dirty="0"/>
+            </a:p>
+          </p:txBody>
+        </p:sp>
+        <p:sp>
+          <p:nvSpPr>
+            <p:cNvPr id="19" name="文本框 18">
+              <a:extLst>
+                <a:ext uri="{FF2B5EF4-FFF2-40B4-BE49-F238E27FC236}">
+                  <a16:creationId xmlns:a16="http://schemas.microsoft.com/office/drawing/2014/main" id="{811A027A-F673-E4EF-C744-432AE84AC4E1}"/>
+                </a:ext>
+              </a:extLst>
+            </p:cNvPr>
+            <p:cNvSpPr txBox="1"/>
+            <p:nvPr/>
+          </p:nvSpPr>
+          <p:spPr>
+            <a:xfrm>
+              <a:off x="9943614" y="4990289"/>
+              <a:ext cx="1440000" cy="646331"/>
+            </a:xfrm>
+            <a:prstGeom prst="rect">
+              <a:avLst/>
+            </a:prstGeom>
+            <a:noFill/>
+          </p:spPr>
+          <p:txBody>
+            <a:bodyPr wrap="square" rtlCol="0">
+              <a:spAutoFit/>
+            </a:bodyPr>
+            <a:lstStyle/>
+            <a:p>
+              <a:r>
+                <a:rPr lang="en-US" altLang="zh-CN" sz="3600" dirty="0">
+                  <a:solidFill>
+                    <a:schemeClr val="tx1">
+                      <a:lumMod val="50000"/>
+                      <a:lumOff val="50000"/>
+                    </a:schemeClr>
+                  </a:solidFill>
+                  <a:latin typeface="得意黑" pitchFamily="2" charset="-122"/>
+                  <a:ea typeface="得意黑" pitchFamily="2" charset="-122"/>
+                </a:rPr>
+                <a:t>Token</a:t>
+              </a:r>
+              <a:endParaRPr lang="zh-CN" altLang="en-US" sz="3600" dirty="0">
+                <a:solidFill>
+                  <a:schemeClr val="tx1">
+                    <a:lumMod val="50000"/>
+                    <a:lumOff val="50000"/>
+                  </a:schemeClr>
+                </a:solidFill>
+                <a:latin typeface="得意黑" pitchFamily="2" charset="-122"/>
+                <a:ea typeface="得意黑" pitchFamily="2" charset="-122"/>
+              </a:endParaRPr>
+            </a:p>
+          </p:txBody>
+        </p:sp>
+      </p:grpSp>
+      <p:grpSp>
+        <p:nvGrpSpPr>
+          <p:cNvPr id="7" name="组合 6">
+            <a:extLst>
+              <a:ext uri="{FF2B5EF4-FFF2-40B4-BE49-F238E27FC236}">
+                <a16:creationId xmlns:a16="http://schemas.microsoft.com/office/drawing/2014/main" id="{3F9C3558-3AF7-656D-65EC-A4733069B1A4}"/>
+              </a:ext>
+            </a:extLst>
+          </p:cNvPr>
+          <p:cNvGrpSpPr/>
+          <p:nvPr/>
+        </p:nvGrpSpPr>
+        <p:grpSpPr>
+          <a:xfrm>
+            <a:off x="4777902" y="1867710"/>
+            <a:ext cx="3397522" cy="3122579"/>
+            <a:chOff x="4777902" y="1867710"/>
+            <a:chExt cx="3397522" cy="3122579"/>
+          </a:xfrm>
+        </p:grpSpPr>
+        <p:sp>
+          <p:nvSpPr>
+            <p:cNvPr id="3" name="矩形: 圆角 2">
+              <a:extLst>
+                <a:ext uri="{FF2B5EF4-FFF2-40B4-BE49-F238E27FC236}">
+                  <a16:creationId xmlns:a16="http://schemas.microsoft.com/office/drawing/2014/main" id="{4C1A8D54-CF33-151C-0A28-FC79AA7B06B2}"/>
+                </a:ext>
+              </a:extLst>
+            </p:cNvPr>
+            <p:cNvSpPr/>
+            <p:nvPr/>
+          </p:nvSpPr>
+          <p:spPr>
+            <a:xfrm>
+              <a:off x="4777902" y="1867710"/>
+              <a:ext cx="2636196" cy="3122579"/>
+            </a:xfrm>
+            <a:prstGeom prst="roundRect">
+              <a:avLst/>
+            </a:prstGeom>
+            <a:solidFill>
+              <a:schemeClr val="tx1">
+                <a:lumMod val="65000"/>
+                <a:lumOff val="35000"/>
+              </a:schemeClr>
+            </a:solidFill>
+          </p:spPr>
+          <p:style>
+            <a:lnRef idx="2">
+              <a:schemeClr val="accent1">
+                <a:shade val="15000"/>
+              </a:schemeClr>
+            </a:lnRef>
+            <a:fillRef idx="1">
+              <a:schemeClr val="accent1"/>
+            </a:fillRef>
+            <a:effectRef idx="0">
+              <a:schemeClr val="accent1"/>
+            </a:effectRef>
+            <a:fontRef idx="minor">
+              <a:schemeClr val="lt1"/>
+            </a:fontRef>
+          </p:style>
+          <p:txBody>
+            <a:bodyPr rtlCol="0" anchor="ctr"/>
+            <a:lstStyle/>
+            <a:p>
+              <a:pPr algn="ctr"/>
+              <a:endParaRPr lang="zh-CN" altLang="en-US" dirty="0"/>
+            </a:p>
+          </p:txBody>
+        </p:sp>
+        <p:sp>
+          <p:nvSpPr>
+            <p:cNvPr id="4" name="文本框 3">
+              <a:extLst>
+                <a:ext uri="{FF2B5EF4-FFF2-40B4-BE49-F238E27FC236}">
+                  <a16:creationId xmlns:a16="http://schemas.microsoft.com/office/drawing/2014/main" id="{0B773225-3281-D183-F7DC-B2DD2ACD31DF}"/>
+                </a:ext>
+              </a:extLst>
+            </p:cNvPr>
+            <p:cNvSpPr txBox="1"/>
+            <p:nvPr/>
+          </p:nvSpPr>
+          <p:spPr>
+            <a:xfrm>
+              <a:off x="4868293" y="3136611"/>
+              <a:ext cx="3307131" cy="584775"/>
+            </a:xfrm>
+            <a:prstGeom prst="rect">
+              <a:avLst/>
+            </a:prstGeom>
+            <a:noFill/>
+          </p:spPr>
+          <p:txBody>
+            <a:bodyPr wrap="square" rtlCol="0">
+              <a:spAutoFit/>
+            </a:bodyPr>
+            <a:lstStyle/>
+            <a:p>
+              <a:r>
+                <a:rPr lang="en-US" altLang="zh-CN" sz="3200" dirty="0">
+                  <a:solidFill>
+                    <a:schemeClr val="tx2">
+                      <a:lumMod val="20000"/>
+                      <a:lumOff val="80000"/>
+                    </a:schemeClr>
+                  </a:solidFill>
+                  <a:latin typeface="得意黑" pitchFamily="2" charset="-122"/>
+                  <a:ea typeface="得意黑" pitchFamily="2" charset="-122"/>
+                </a:rPr>
+                <a:t>Lexical analyzer</a:t>
+              </a:r>
+              <a:endParaRPr lang="zh-CN" altLang="en-US" sz="3200" dirty="0">
+                <a:solidFill>
+                  <a:schemeClr val="tx2">
+                    <a:lumMod val="20000"/>
+                    <a:lumOff val="80000"/>
+                  </a:schemeClr>
+                </a:solidFill>
+                <a:latin typeface="得意黑" pitchFamily="2" charset="-122"/>
+                <a:ea typeface="得意黑" pitchFamily="2" charset="-122"/>
+              </a:endParaRPr>
+            </a:p>
+          </p:txBody>
+        </p:sp>
+      </p:grpSp>
+    </p:spTree>
+    <p:custDataLst>
+      <p:tags r:id="rId1"/>
+    </p:custDataLst>
+    <p:extLst>
+      <p:ext uri="{BB962C8B-B14F-4D97-AF65-F5344CB8AC3E}">
+        <p14:creationId xmlns:p14="http://schemas.microsoft.com/office/powerpoint/2010/main" val="2346133431"/>
+      </p:ext>
+    </p:extLst>
+  </p:cSld>
+  <p:clrMapOvr>
+    <a:masterClrMapping/>
+  </p:clrMapOvr>
+  <mc:AlternateContent xmlns:mc="http://schemas.openxmlformats.org/markup-compatibility/2006">
+    <mc:Choice xmlns:p14="http://schemas.microsoft.com/office/powerpoint/2010/main" Requires="p14">
+      <p:transition spd="slow" p14:dur="2000" advTm="15000"/>
+    </mc:Choice>
+    <mc:Fallback>
+      <p:transition spd="slow" advTm="15000"/>
+    </mc:Fallback>
+  </mc:AlternateContent>
+  <p:timing>
+    <p:tnLst>
+      <p:par>
+        <p:cTn id="1" dur="indefinite" restart="never" nodeType="tmRoot">
+          <p:childTnLst>
+            <p:seq concurrent="1" nextAc="seek">
+              <p:cTn id="2" dur="indefinite" nodeType="mainSeq">
+                <p:childTnLst>
+                  <p:par>
+                    <p:cTn id="3" fill="hold">
+                      <p:stCondLst>
+                        <p:cond delay="indefinite"/>
+                      </p:stCondLst>
+                      <p:childTnLst>
+                        <p:par>
+                          <p:cTn id="4" fill="hold">
+                            <p:stCondLst>
+                              <p:cond delay="0"/>
+                            </p:stCondLst>
+                            <p:childTnLst>
                               <p:par>
-                                <p:cTn id="11" presetID="10" presetClass="entr" presetSubtype="0" fill="hold" grpId="0" nodeType="withEffect">
+                                <p:cTn id="5" presetID="42" presetClass="path" presetSubtype="0" repeatCount="5000" accel="50000" decel="50000" fill="hold" grpId="0" nodeType="clickEffect">
+                                  <p:stCondLst>
+                                    <p:cond delay="0"/>
+                                  </p:stCondLst>
+                                  <p:childTnLst>
+                                    <p:animMotion origin="layout" path="M 2.08333E-7 0 L -1.36367 0 " pathEditMode="relative" rAng="0" ptsTypes="AA">
+                                      <p:cBhvr>
+                                        <p:cTn id="6" dur="250" fill="hold"/>
+                                        <p:tgtEl>
+                                          <p:spTgt spid="2"/>
+                                        </p:tgtEl>
+                                        <p:attrNameLst>
+                                          <p:attrName>ppt_x</p:attrName>
+                                          <p:attrName>ppt_y</p:attrName>
+                                        </p:attrNameLst>
+                                      </p:cBhvr>
+                                      <p:rCtr x="-68190" y="0"/>
+                                    </p:animMotion>
+                                  </p:childTnLst>
+                                </p:cTn>
+                              </p:par>
+                            </p:childTnLst>
+                          </p:cTn>
+                        </p:par>
+                        <p:par>
+                          <p:cTn id="7" fill="hold">
+                            <p:stCondLst>
+                              <p:cond delay="1250"/>
+                            </p:stCondLst>
+                            <p:childTnLst>
+                              <p:par>
+                                <p:cTn id="8" presetID="42" presetClass="path" presetSubtype="0" accel="50000" decel="50000" fill="hold" grpId="0" nodeType="afterEffect">
+                                  <p:stCondLst>
+                                    <p:cond delay="0"/>
+                                  </p:stCondLst>
+                                  <p:childTnLst>
+                                    <p:animMotion origin="layout" path="M -1.66667E-6 0 L -0.88476 0 " pathEditMode="relative" rAng="0" ptsTypes="AA">
+                                      <p:cBhvr>
+                                        <p:cTn id="9" dur="250" fill="hold"/>
+                                        <p:tgtEl>
+                                          <p:spTgt spid="5"/>
+                                        </p:tgtEl>
+                                        <p:attrNameLst>
+                                          <p:attrName>ppt_x</p:attrName>
+                                          <p:attrName>ppt_y</p:attrName>
+                                        </p:attrNameLst>
+                                      </p:cBhvr>
+                                      <p:rCtr x="-44245" y="0"/>
+                                    </p:animMotion>
+                                  </p:childTnLst>
+                                </p:cTn>
+                              </p:par>
+                            </p:childTnLst>
+                          </p:cTn>
+                        </p:par>
+                        <p:par>
+                          <p:cTn id="10" fill="hold">
+                            <p:stCondLst>
+                              <p:cond delay="1500"/>
+                            </p:stCondLst>
+                            <p:childTnLst>
+                              <p:par>
+                                <p:cTn id="11" presetID="10" presetClass="entr" presetSubtype="0" fill="hold" grpId="0" nodeType="afterEffect">
                                   <p:stCondLst>
                                     <p:cond delay="0"/>
                                   </p:stCondLst>
@@ -6184,7 +7481,7 @@
                                     </p:set>
                                     <p:animEffect transition="in" filter="fade">
                                       <p:cBhvr>
-                                        <p:cTn id="13" dur="500"/>
+                                        <p:cTn id="13" dur="250"/>
                                         <p:tgtEl>
                                           <p:spTgt spid="6"/>
                                         </p:tgtEl>
@@ -6199,18 +7496,903 @@
                         <p:par>
                           <p:cTn id="14" fill="hold">
                             <p:stCondLst>
-                              <p:cond delay="500"/>
+                              <p:cond delay="1750"/>
                             </p:stCondLst>
                             <p:childTnLst>
                               <p:par>
-                                <p:cTn id="15" presetID="10" presetClass="entr" presetSubtype="0" fill="hold" grpId="0" nodeType="afterEffect">
+                                <p:cTn id="15" presetID="10" presetClass="exit" presetSubtype="0" fill="hold" grpId="1" nodeType="afterEffect">
+                                  <p:stCondLst>
+                                    <p:cond delay="0"/>
+                                  </p:stCondLst>
+                                  <p:childTnLst>
+                                    <p:animEffect transition="out" filter="fade">
+                                      <p:cBhvr>
+                                        <p:cTn id="16" dur="250"/>
+                                        <p:tgtEl>
+                                          <p:spTgt spid="5"/>
+                                        </p:tgtEl>
+                                      </p:cBhvr>
+                                    </p:animEffect>
+                                    <p:set>
+                                      <p:cBhvr>
+                                        <p:cTn id="17" dur="1" fill="hold">
+                                          <p:stCondLst>
+                                            <p:cond delay="249"/>
+                                          </p:stCondLst>
+                                        </p:cTn>
+                                        <p:tgtEl>
+                                          <p:spTgt spid="5"/>
+                                        </p:tgtEl>
+                                        <p:attrNameLst>
+                                          <p:attrName>style.visibility</p:attrName>
+                                        </p:attrNameLst>
+                                      </p:cBhvr>
+                                      <p:to>
+                                        <p:strVal val="hidden"/>
+                                      </p:to>
+                                    </p:set>
+                                  </p:childTnLst>
+                                </p:cTn>
+                              </p:par>
+                            </p:childTnLst>
+                          </p:cTn>
+                        </p:par>
+                        <p:par>
+                          <p:cTn id="18" fill="hold">
+                            <p:stCondLst>
+                              <p:cond delay="2000"/>
+                            </p:stCondLst>
+                            <p:childTnLst>
+                              <p:par>
+                                <p:cTn id="19" presetID="42" presetClass="path" presetSubtype="0" accel="50000" decel="50000" fill="hold" grpId="1" nodeType="afterEffect">
+                                  <p:stCondLst>
+                                    <p:cond delay="0"/>
+                                  </p:stCondLst>
+                                  <p:childTnLst>
+                                    <p:animMotion origin="layout" path="M 5E-6 0 L 5E-6 -0.22755 " pathEditMode="relative" rAng="0" ptsTypes="AA">
+                                      <p:cBhvr>
+                                        <p:cTn id="20" dur="500" fill="hold"/>
+                                        <p:tgtEl>
+                                          <p:spTgt spid="6"/>
+                                        </p:tgtEl>
+                                        <p:attrNameLst>
+                                          <p:attrName>ppt_x</p:attrName>
+                                          <p:attrName>ppt_y</p:attrName>
+                                        </p:attrNameLst>
+                                      </p:cBhvr>
+                                      <p:rCtr x="0" y="-11389"/>
+                                    </p:animMotion>
+                                  </p:childTnLst>
+                                </p:cTn>
+                              </p:par>
+                            </p:childTnLst>
+                          </p:cTn>
+                        </p:par>
+                        <p:par>
+                          <p:cTn id="21" fill="hold">
+                            <p:stCondLst>
+                              <p:cond delay="2500"/>
+                            </p:stCondLst>
+                            <p:childTnLst>
+                              <p:par>
+                                <p:cTn id="22" presetID="1" presetClass="entr" presetSubtype="0" fill="hold" grpId="0" nodeType="afterEffect">
+                                  <p:stCondLst>
+                                    <p:cond delay="0"/>
+                                  </p:stCondLst>
+                                  <p:iterate type="wd">
+                                    <p:tmAbs val="10"/>
+                                  </p:iterate>
+                                  <p:childTnLst>
+                                    <p:set>
+                                      <p:cBhvr>
+                                        <p:cTn id="23" dur="1" fill="hold">
+                                          <p:stCondLst>
+                                            <p:cond delay="0"/>
+                                          </p:stCondLst>
+                                        </p:cTn>
+                                        <p:tgtEl>
+                                          <p:spTgt spid="15"/>
+                                        </p:tgtEl>
+                                        <p:attrNameLst>
+                                          <p:attrName>style.visibility</p:attrName>
+                                        </p:attrNameLst>
+                                      </p:cBhvr>
+                                      <p:to>
+                                        <p:strVal val="visible"/>
+                                      </p:to>
+                                    </p:set>
+                                  </p:childTnLst>
+                                </p:cTn>
+                              </p:par>
+                            </p:childTnLst>
+                          </p:cTn>
+                        </p:par>
+                        <p:par>
+                          <p:cTn id="24" fill="hold">
+                            <p:stCondLst>
+                              <p:cond delay="2751"/>
+                            </p:stCondLst>
+                            <p:childTnLst>
+                              <p:par>
+                                <p:cTn id="25" presetID="10" presetClass="exit" presetSubtype="0" fill="hold" grpId="1" nodeType="afterEffect">
+                                  <p:stCondLst>
+                                    <p:cond delay="1500"/>
+                                  </p:stCondLst>
+                                  <p:iterate type="wd">
+                                    <p:tmPct val="0"/>
+                                  </p:iterate>
+                                  <p:childTnLst>
+                                    <p:animEffect transition="out" filter="fade">
+                                      <p:cBhvr>
+                                        <p:cTn id="26" dur="500"/>
+                                        <p:tgtEl>
+                                          <p:spTgt spid="15"/>
+                                        </p:tgtEl>
+                                      </p:cBhvr>
+                                    </p:animEffect>
+                                    <p:set>
+                                      <p:cBhvr>
+                                        <p:cTn id="27" dur="1" fill="hold">
+                                          <p:stCondLst>
+                                            <p:cond delay="499"/>
+                                          </p:stCondLst>
+                                        </p:cTn>
+                                        <p:tgtEl>
+                                          <p:spTgt spid="15"/>
+                                        </p:tgtEl>
+                                        <p:attrNameLst>
+                                          <p:attrName>style.visibility</p:attrName>
+                                        </p:attrNameLst>
+                                      </p:cBhvr>
+                                      <p:to>
+                                        <p:strVal val="hidden"/>
+                                      </p:to>
+                                    </p:set>
+                                  </p:childTnLst>
+                                </p:cTn>
+                              </p:par>
+                              <p:par>
+                                <p:cTn id="28" presetID="10" presetClass="exit" presetSubtype="0" fill="hold" grpId="2" nodeType="withEffect">
+                                  <p:stCondLst>
+                                    <p:cond delay="1500"/>
+                                  </p:stCondLst>
+                                  <p:childTnLst>
+                                    <p:animEffect transition="out" filter="fade">
+                                      <p:cBhvr>
+                                        <p:cTn id="29" dur="500"/>
+                                        <p:tgtEl>
+                                          <p:spTgt spid="6"/>
+                                        </p:tgtEl>
+                                      </p:cBhvr>
+                                    </p:animEffect>
+                                    <p:set>
+                                      <p:cBhvr>
+                                        <p:cTn id="30" dur="1" fill="hold">
+                                          <p:stCondLst>
+                                            <p:cond delay="499"/>
+                                          </p:stCondLst>
+                                        </p:cTn>
+                                        <p:tgtEl>
+                                          <p:spTgt spid="6"/>
+                                        </p:tgtEl>
+                                        <p:attrNameLst>
+                                          <p:attrName>style.visibility</p:attrName>
+                                        </p:attrNameLst>
+                                      </p:cBhvr>
+                                      <p:to>
+                                        <p:strVal val="hidden"/>
+                                      </p:to>
+                                    </p:set>
+                                  </p:childTnLst>
+                                </p:cTn>
+                              </p:par>
+                            </p:childTnLst>
+                          </p:cTn>
+                        </p:par>
+                        <p:par>
+                          <p:cTn id="31" fill="hold">
+                            <p:stCondLst>
+                              <p:cond delay="4751"/>
+                            </p:stCondLst>
+                            <p:childTnLst>
+                              <p:par>
+                                <p:cTn id="32" presetID="1" presetClass="entr" presetSubtype="0" fill="hold" nodeType="afterEffect">
                                   <p:stCondLst>
                                     <p:cond delay="0"/>
                                   </p:stCondLst>
                                   <p:childTnLst>
                                     <p:set>
                                       <p:cBhvr>
-                                        <p:cTn id="16" dur="1" fill="hold">
+                                        <p:cTn id="33" dur="1" fill="hold">
+                                          <p:stCondLst>
+                                            <p:cond delay="0"/>
+                                          </p:stCondLst>
+                                        </p:cTn>
+                                        <p:tgtEl>
+                                          <p:spTgt spid="7"/>
+                                        </p:tgtEl>
+                                        <p:attrNameLst>
+                                          <p:attrName>style.visibility</p:attrName>
+                                        </p:attrNameLst>
+                                      </p:cBhvr>
+                                      <p:to>
+                                        <p:strVal val="visible"/>
+                                      </p:to>
+                                    </p:set>
+                                  </p:childTnLst>
+                                </p:cTn>
+                              </p:par>
+                            </p:childTnLst>
+                          </p:cTn>
+                        </p:par>
+                        <p:par>
+                          <p:cTn id="34" fill="hold">
+                            <p:stCondLst>
+                              <p:cond delay="4751"/>
+                            </p:stCondLst>
+                            <p:childTnLst>
+                              <p:par>
+                                <p:cTn id="35" presetID="1" presetClass="entr" presetSubtype="0" fill="hold" nodeType="afterEffect">
+                                  <p:stCondLst>
+                                    <p:cond delay="0"/>
+                                  </p:stCondLst>
+                                  <p:childTnLst>
+                                    <p:set>
+                                      <p:cBhvr>
+                                        <p:cTn id="36" dur="1" fill="hold">
+                                          <p:stCondLst>
+                                            <p:cond delay="2749"/>
+                                          </p:stCondLst>
+                                        </p:cTn>
+                                        <p:tgtEl>
+                                          <p:spTgt spid="10"/>
+                                        </p:tgtEl>
+                                        <p:attrNameLst>
+                                          <p:attrName>style.visibility</p:attrName>
+                                        </p:attrNameLst>
+                                      </p:cBhvr>
+                                      <p:to>
+                                        <p:strVal val="visible"/>
+                                      </p:to>
+                                    </p:set>
+                                  </p:childTnLst>
+                                </p:cTn>
+                              </p:par>
+                            </p:childTnLst>
+                          </p:cTn>
+                        </p:par>
+                        <p:par>
+                          <p:cTn id="37" fill="hold">
+                            <p:stCondLst>
+                              <p:cond delay="7501"/>
+                            </p:stCondLst>
+                            <p:childTnLst>
+                              <p:par>
+                                <p:cTn id="38" presetID="42" presetClass="path" presetSubtype="0" accel="50000" decel="50000" fill="hold" nodeType="afterEffect">
+                                  <p:stCondLst>
+                                    <p:cond delay="1500"/>
+                                  </p:stCondLst>
+                                  <p:childTnLst>
+                                    <p:animMotion origin="layout" path="M -8.33333E-7 0 L 0.34011 -3.7037E-6 " pathEditMode="relative" rAng="0" ptsTypes="AA">
+                                      <p:cBhvr>
+                                        <p:cTn id="39" dur="250" fill="hold"/>
+                                        <p:tgtEl>
+                                          <p:spTgt spid="10"/>
+                                        </p:tgtEl>
+                                        <p:attrNameLst>
+                                          <p:attrName>ppt_x</p:attrName>
+                                          <p:attrName>ppt_y</p:attrName>
+                                        </p:attrNameLst>
+                                      </p:cBhvr>
+                                      <p:rCtr x="16497" y="-1389"/>
+                                    </p:animMotion>
+                                  </p:childTnLst>
+                                </p:cTn>
+                              </p:par>
+                            </p:childTnLst>
+                          </p:cTn>
+                        </p:par>
+                        <p:par>
+                          <p:cTn id="40" fill="hold">
+                            <p:stCondLst>
+                              <p:cond delay="9251"/>
+                            </p:stCondLst>
+                            <p:childTnLst>
+                              <p:par>
+                                <p:cTn id="41" presetID="1" presetClass="exit" presetSubtype="0" fill="hold" nodeType="afterEffect">
+                                  <p:stCondLst>
+                                    <p:cond delay="0"/>
+                                  </p:stCondLst>
+                                  <p:childTnLst>
+                                    <p:set>
+                                      <p:cBhvr>
+                                        <p:cTn id="42" dur="1" fill="hold">
+                                          <p:stCondLst>
+                                            <p:cond delay="0"/>
+                                          </p:stCondLst>
+                                        </p:cTn>
+                                        <p:tgtEl>
+                                          <p:spTgt spid="10"/>
+                                        </p:tgtEl>
+                                        <p:attrNameLst>
+                                          <p:attrName>style.visibility</p:attrName>
+                                        </p:attrNameLst>
+                                      </p:cBhvr>
+                                      <p:to>
+                                        <p:strVal val="hidden"/>
+                                      </p:to>
+                                    </p:set>
+                                  </p:childTnLst>
+                                </p:cTn>
+                              </p:par>
+                              <p:par>
+                                <p:cTn id="43" presetID="1" presetClass="entr" presetSubtype="0" fill="hold" nodeType="withEffect">
+                                  <p:stCondLst>
+                                    <p:cond delay="0"/>
+                                  </p:stCondLst>
+                                  <p:childTnLst>
+                                    <p:set>
+                                      <p:cBhvr>
+                                        <p:cTn id="44" dur="1" fill="hold">
+                                          <p:stCondLst>
+                                            <p:cond delay="0"/>
+                                          </p:stCondLst>
+                                        </p:cTn>
+                                        <p:tgtEl>
+                                          <p:spTgt spid="20"/>
+                                        </p:tgtEl>
+                                        <p:attrNameLst>
+                                          <p:attrName>style.visibility</p:attrName>
+                                        </p:attrNameLst>
+                                      </p:cBhvr>
+                                      <p:to>
+                                        <p:strVal val="visible"/>
+                                      </p:to>
+                                    </p:set>
+                                  </p:childTnLst>
+                                </p:cTn>
+                              </p:par>
+                              <p:par>
+                                <p:cTn id="45" presetID="42" presetClass="path" presetSubtype="0" accel="50000" decel="50000" fill="hold" nodeType="withEffect">
+                                  <p:stCondLst>
+                                    <p:cond delay="0"/>
+                                  </p:stCondLst>
+                                  <p:childTnLst>
+                                    <p:animMotion origin="layout" path="M 2.08333E-6 0 L 0.32304 0 " pathEditMode="relative" rAng="0" ptsTypes="AA">
+                                      <p:cBhvr>
+                                        <p:cTn id="46" dur="250" fill="hold"/>
+                                        <p:tgtEl>
+                                          <p:spTgt spid="20"/>
+                                        </p:tgtEl>
+                                        <p:attrNameLst>
+                                          <p:attrName>ppt_x</p:attrName>
+                                          <p:attrName>ppt_y</p:attrName>
+                                        </p:attrNameLst>
+                                      </p:cBhvr>
+                                      <p:rCtr x="16146" y="0"/>
+                                    </p:animMotion>
+                                  </p:childTnLst>
+                                </p:cTn>
+                              </p:par>
+                            </p:childTnLst>
+                          </p:cTn>
+                        </p:par>
+                      </p:childTnLst>
+                    </p:cTn>
+                  </p:par>
+                </p:childTnLst>
+              </p:cTn>
+              <p:prevCondLst>
+                <p:cond evt="onPrev" delay="0">
+                  <p:tgtEl>
+                    <p:sldTgt/>
+                  </p:tgtEl>
+                </p:cond>
+              </p:prevCondLst>
+              <p:nextCondLst>
+                <p:cond evt="onNext" delay="0">
+                  <p:tgtEl>
+                    <p:sldTgt/>
+                  </p:tgtEl>
+                </p:cond>
+              </p:nextCondLst>
+            </p:seq>
+          </p:childTnLst>
+        </p:cTn>
+      </p:par>
+    </p:tnLst>
+    <p:bldLst>
+      <p:bldP spid="2" grpId="0" animBg="1"/>
+      <p:bldP spid="5" grpId="0" animBg="1"/>
+      <p:bldP spid="5" grpId="1" animBg="1"/>
+      <p:bldP spid="6" grpId="0"/>
+      <p:bldP spid="6" grpId="1"/>
+      <p:bldP spid="6" grpId="2"/>
+      <p:bldP spid="15" grpId="0"/>
+      <p:bldP spid="15" grpId="1"/>
+    </p:bldLst>
+  </p:timing>
+</p:sld>
+</file>
+
+<file path=ppt/slides/slide4.xml><?xml version="1.0" encoding="utf-8"?>
+<p:sld xmlns:a="http://schemas.openxmlformats.org/drawingml/2006/main" xmlns:r="http://schemas.openxmlformats.org/officeDocument/2006/relationships" xmlns:p="http://schemas.openxmlformats.org/presentationml/2006/main">
+  <p:cSld>
+    <p:spTree>
+      <p:nvGrpSpPr>
+        <p:cNvPr id="1" name=""/>
+        <p:cNvGrpSpPr/>
+        <p:nvPr/>
+      </p:nvGrpSpPr>
+      <p:grpSpPr>
+        <a:xfrm>
+          <a:off x="0" y="0"/>
+          <a:ext cx="0" cy="0"/>
+          <a:chOff x="0" y="0"/>
+          <a:chExt cx="0" cy="0"/>
+        </a:xfrm>
+      </p:grpSpPr>
+      <p:sp>
+        <p:nvSpPr>
+          <p:cNvPr id="4" name="文本框 3">
+            <a:extLst>
+              <a:ext uri="{FF2B5EF4-FFF2-40B4-BE49-F238E27FC236}">
+                <a16:creationId xmlns:a16="http://schemas.microsoft.com/office/drawing/2014/main" id="{CD17BFE6-925C-4EFF-D09E-A49F4EF5C575}"/>
+              </a:ext>
+            </a:extLst>
+          </p:cNvPr>
+          <p:cNvSpPr txBox="1"/>
+          <p:nvPr/>
+        </p:nvSpPr>
+        <p:spPr>
+          <a:xfrm>
+            <a:off x="5704391" y="2488556"/>
+            <a:ext cx="416689" cy="584775"/>
+          </a:xfrm>
+          <a:prstGeom prst="rect">
+            <a:avLst/>
+          </a:prstGeom>
+          <a:noFill/>
+        </p:spPr>
+        <p:txBody>
+          <a:bodyPr wrap="square" rtlCol="0">
+            <a:spAutoFit/>
+          </a:bodyPr>
+          <a:lstStyle/>
+          <a:p>
+            <a:r>
+              <a:rPr lang="en-US" altLang="zh-CN" sz="3200" dirty="0">
+                <a:solidFill>
+                  <a:schemeClr val="tx2">
+                    <a:lumMod val="20000"/>
+                    <a:lumOff val="80000"/>
+                  </a:schemeClr>
+                </a:solidFill>
+                <a:latin typeface="得意黑" pitchFamily="2" charset="-122"/>
+                <a:ea typeface="得意黑" pitchFamily="2" charset="-122"/>
+              </a:rPr>
+              <a:t>D</a:t>
+            </a:r>
+            <a:endParaRPr lang="zh-CN" altLang="en-US" sz="3200" dirty="0">
+              <a:solidFill>
+                <a:schemeClr val="tx2">
+                  <a:lumMod val="20000"/>
+                  <a:lumOff val="80000"/>
+                </a:schemeClr>
+              </a:solidFill>
+              <a:latin typeface="得意黑" pitchFamily="2" charset="-122"/>
+              <a:ea typeface="得意黑" pitchFamily="2" charset="-122"/>
+            </a:endParaRPr>
+          </a:p>
+        </p:txBody>
+      </p:sp>
+      <p:sp>
+        <p:nvSpPr>
+          <p:cNvPr id="5" name="文本框 4">
+            <a:extLst>
+              <a:ext uri="{FF2B5EF4-FFF2-40B4-BE49-F238E27FC236}">
+                <a16:creationId xmlns:a16="http://schemas.microsoft.com/office/drawing/2014/main" id="{1E024B73-572C-54AB-E2AB-FE395671125D}"/>
+              </a:ext>
+            </a:extLst>
+          </p:cNvPr>
+          <p:cNvSpPr txBox="1"/>
+          <p:nvPr/>
+        </p:nvSpPr>
+        <p:spPr>
+          <a:xfrm>
+            <a:off x="5933957" y="2488557"/>
+            <a:ext cx="324091" cy="584775"/>
+          </a:xfrm>
+          <a:prstGeom prst="rect">
+            <a:avLst/>
+          </a:prstGeom>
+          <a:noFill/>
+        </p:spPr>
+        <p:txBody>
+          <a:bodyPr wrap="square" rtlCol="0">
+            <a:spAutoFit/>
+          </a:bodyPr>
+          <a:lstStyle/>
+          <a:p>
+            <a:r>
+              <a:rPr lang="en-US" altLang="zh-CN" sz="3200" dirty="0">
+                <a:solidFill>
+                  <a:schemeClr val="tx2">
+                    <a:lumMod val="20000"/>
+                    <a:lumOff val="80000"/>
+                  </a:schemeClr>
+                </a:solidFill>
+                <a:latin typeface="得意黑" pitchFamily="2" charset="-122"/>
+                <a:ea typeface="得意黑" pitchFamily="2" charset="-122"/>
+              </a:rPr>
+              <a:t>F</a:t>
+            </a:r>
+            <a:endParaRPr lang="zh-CN" altLang="en-US" sz="3200" dirty="0">
+              <a:solidFill>
+                <a:schemeClr val="tx2">
+                  <a:lumMod val="20000"/>
+                  <a:lumOff val="80000"/>
+                </a:schemeClr>
+              </a:solidFill>
+              <a:latin typeface="得意黑" pitchFamily="2" charset="-122"/>
+              <a:ea typeface="得意黑" pitchFamily="2" charset="-122"/>
+            </a:endParaRPr>
+          </a:p>
+        </p:txBody>
+      </p:sp>
+      <p:sp>
+        <p:nvSpPr>
+          <p:cNvPr id="6" name="文本框 5">
+            <a:extLst>
+              <a:ext uri="{FF2B5EF4-FFF2-40B4-BE49-F238E27FC236}">
+                <a16:creationId xmlns:a16="http://schemas.microsoft.com/office/drawing/2014/main" id="{C3756B89-C42C-6301-D66A-0E151476FF7E}"/>
+              </a:ext>
+            </a:extLst>
+          </p:cNvPr>
+          <p:cNvSpPr txBox="1"/>
+          <p:nvPr/>
+        </p:nvSpPr>
+        <p:spPr>
+          <a:xfrm>
+            <a:off x="6121080" y="2488556"/>
+            <a:ext cx="289367" cy="584775"/>
+          </a:xfrm>
+          <a:prstGeom prst="rect">
+            <a:avLst/>
+          </a:prstGeom>
+          <a:noFill/>
+        </p:spPr>
+        <p:txBody>
+          <a:bodyPr wrap="square" rtlCol="0">
+            <a:spAutoFit/>
+          </a:bodyPr>
+          <a:lstStyle/>
+          <a:p>
+            <a:r>
+              <a:rPr lang="en-US" altLang="zh-CN" sz="3200" dirty="0">
+                <a:solidFill>
+                  <a:schemeClr val="tx2">
+                    <a:lumMod val="20000"/>
+                    <a:lumOff val="80000"/>
+                  </a:schemeClr>
+                </a:solidFill>
+                <a:latin typeface="得意黑" pitchFamily="2" charset="-122"/>
+                <a:ea typeface="得意黑" pitchFamily="2" charset="-122"/>
+              </a:rPr>
+              <a:t>A</a:t>
+            </a:r>
+            <a:endParaRPr lang="zh-CN" altLang="en-US" sz="3200" dirty="0">
+              <a:solidFill>
+                <a:schemeClr val="tx2">
+                  <a:lumMod val="20000"/>
+                  <a:lumOff val="80000"/>
+                </a:schemeClr>
+              </a:solidFill>
+              <a:latin typeface="得意黑" pitchFamily="2" charset="-122"/>
+              <a:ea typeface="得意黑" pitchFamily="2" charset="-122"/>
+            </a:endParaRPr>
+          </a:p>
+        </p:txBody>
+      </p:sp>
+      <p:sp>
+        <p:nvSpPr>
+          <p:cNvPr id="10" name="文本框 9">
+            <a:extLst>
+              <a:ext uri="{FF2B5EF4-FFF2-40B4-BE49-F238E27FC236}">
+                <a16:creationId xmlns:a16="http://schemas.microsoft.com/office/drawing/2014/main" id="{46A81416-17C0-ABFA-2022-3FB2EC64D632}"/>
+              </a:ext>
+            </a:extLst>
+          </p:cNvPr>
+          <p:cNvSpPr txBox="1"/>
+          <p:nvPr/>
+        </p:nvSpPr>
+        <p:spPr>
+          <a:xfrm>
+            <a:off x="3947986" y="2486158"/>
+            <a:ext cx="1733308" cy="584775"/>
+          </a:xfrm>
+          <a:prstGeom prst="rect">
+            <a:avLst/>
+          </a:prstGeom>
+          <a:noFill/>
+        </p:spPr>
+        <p:txBody>
+          <a:bodyPr wrap="square">
+            <a:spAutoFit/>
+          </a:bodyPr>
+          <a:lstStyle/>
+          <a:p>
+            <a:r>
+              <a:rPr lang="en-US" altLang="zh-CN" sz="3200" b="0" i="0" dirty="0">
+                <a:solidFill>
+                  <a:schemeClr val="tx2">
+                    <a:lumMod val="20000"/>
+                    <a:lumOff val="80000"/>
+                  </a:schemeClr>
+                </a:solidFill>
+                <a:effectLst/>
+                <a:latin typeface="得意黑" pitchFamily="2" charset="-122"/>
+                <a:ea typeface="得意黑" pitchFamily="2" charset="-122"/>
+              </a:rPr>
+              <a:t>Determine</a:t>
+            </a:r>
+            <a:endParaRPr lang="zh-CN" altLang="en-US" sz="3200" dirty="0">
+              <a:solidFill>
+                <a:schemeClr val="tx2">
+                  <a:lumMod val="20000"/>
+                  <a:lumOff val="80000"/>
+                </a:schemeClr>
+              </a:solidFill>
+              <a:latin typeface="得意黑" pitchFamily="2" charset="-122"/>
+              <a:ea typeface="得意黑" pitchFamily="2" charset="-122"/>
+            </a:endParaRPr>
+          </a:p>
+        </p:txBody>
+      </p:sp>
+      <p:sp>
+        <p:nvSpPr>
+          <p:cNvPr id="3" name="文本框 2">
+            <a:extLst>
+              <a:ext uri="{FF2B5EF4-FFF2-40B4-BE49-F238E27FC236}">
+                <a16:creationId xmlns:a16="http://schemas.microsoft.com/office/drawing/2014/main" id="{38E03975-4094-7230-F19B-C6870FA92072}"/>
+              </a:ext>
+            </a:extLst>
+          </p:cNvPr>
+          <p:cNvSpPr txBox="1"/>
+          <p:nvPr/>
+        </p:nvSpPr>
+        <p:spPr>
+          <a:xfrm>
+            <a:off x="5933957" y="2488555"/>
+            <a:ext cx="1056290" cy="584775"/>
+          </a:xfrm>
+          <a:prstGeom prst="rect">
+            <a:avLst/>
+          </a:prstGeom>
+          <a:noFill/>
+        </p:spPr>
+        <p:txBody>
+          <a:bodyPr wrap="square" rtlCol="0">
+            <a:spAutoFit/>
+          </a:bodyPr>
+          <a:lstStyle/>
+          <a:p>
+            <a:r>
+              <a:rPr lang="en-US" altLang="zh-CN" sz="3200" dirty="0">
+                <a:solidFill>
+                  <a:schemeClr val="tx2">
+                    <a:lumMod val="20000"/>
+                    <a:lumOff val="80000"/>
+                  </a:schemeClr>
+                </a:solidFill>
+                <a:latin typeface="得意黑" pitchFamily="2" charset="-122"/>
+                <a:ea typeface="得意黑" pitchFamily="2" charset="-122"/>
+              </a:rPr>
+              <a:t>Finite</a:t>
+            </a:r>
+            <a:endParaRPr lang="zh-CN" altLang="en-US" sz="3200" dirty="0">
+              <a:solidFill>
+                <a:schemeClr val="tx2">
+                  <a:lumMod val="20000"/>
+                  <a:lumOff val="80000"/>
+                </a:schemeClr>
+              </a:solidFill>
+              <a:latin typeface="得意黑" pitchFamily="2" charset="-122"/>
+              <a:ea typeface="得意黑" pitchFamily="2" charset="-122"/>
+            </a:endParaRPr>
+          </a:p>
+        </p:txBody>
+      </p:sp>
+      <p:sp>
+        <p:nvSpPr>
+          <p:cNvPr id="7" name="文本框 6">
+            <a:extLst>
+              <a:ext uri="{FF2B5EF4-FFF2-40B4-BE49-F238E27FC236}">
+                <a16:creationId xmlns:a16="http://schemas.microsoft.com/office/drawing/2014/main" id="{82EBB95F-536C-3DA4-BD46-96AA30881314}"/>
+              </a:ext>
+            </a:extLst>
+          </p:cNvPr>
+          <p:cNvSpPr txBox="1"/>
+          <p:nvPr/>
+        </p:nvSpPr>
+        <p:spPr>
+          <a:xfrm>
+            <a:off x="6990247" y="2486158"/>
+            <a:ext cx="1844567" cy="584775"/>
+          </a:xfrm>
+          <a:prstGeom prst="rect">
+            <a:avLst/>
+          </a:prstGeom>
+          <a:noFill/>
+        </p:spPr>
+        <p:txBody>
+          <a:bodyPr wrap="square" rtlCol="0">
+            <a:spAutoFit/>
+          </a:bodyPr>
+          <a:lstStyle/>
+          <a:p>
+            <a:r>
+              <a:rPr lang="en-US" altLang="zh-CN" sz="3200" dirty="0">
+                <a:solidFill>
+                  <a:schemeClr val="tx2">
+                    <a:lumMod val="20000"/>
+                    <a:lumOff val="80000"/>
+                  </a:schemeClr>
+                </a:solidFill>
+                <a:latin typeface="得意黑" pitchFamily="2" charset="-122"/>
+                <a:ea typeface="得意黑" pitchFamily="2" charset="-122"/>
+              </a:rPr>
+              <a:t>Automaton</a:t>
+            </a:r>
+            <a:endParaRPr lang="zh-CN" altLang="en-US" sz="3200" dirty="0">
+              <a:solidFill>
+                <a:schemeClr val="tx2">
+                  <a:lumMod val="20000"/>
+                  <a:lumOff val="80000"/>
+                </a:schemeClr>
+              </a:solidFill>
+              <a:latin typeface="得意黑" pitchFamily="2" charset="-122"/>
+              <a:ea typeface="得意黑" pitchFamily="2" charset="-122"/>
+            </a:endParaRPr>
+          </a:p>
+        </p:txBody>
+      </p:sp>
+      <p:sp>
+        <p:nvSpPr>
+          <p:cNvPr id="8" name="文本框 7">
+            <a:extLst>
+              <a:ext uri="{FF2B5EF4-FFF2-40B4-BE49-F238E27FC236}">
+                <a16:creationId xmlns:a16="http://schemas.microsoft.com/office/drawing/2014/main" id="{67EC7091-45C7-0152-FDB0-CC492A47BB15}"/>
+              </a:ext>
+            </a:extLst>
+          </p:cNvPr>
+          <p:cNvSpPr txBox="1"/>
+          <p:nvPr/>
+        </p:nvSpPr>
+        <p:spPr>
+          <a:xfrm>
+            <a:off x="4977914" y="4273765"/>
+            <a:ext cx="2236171" cy="523220"/>
+          </a:xfrm>
+          <a:prstGeom prst="rect">
+            <a:avLst/>
+          </a:prstGeom>
+          <a:noFill/>
+        </p:spPr>
+        <p:txBody>
+          <a:bodyPr wrap="square" rtlCol="0">
+            <a:spAutoFit/>
+          </a:bodyPr>
+          <a:lstStyle/>
+          <a:p>
+            <a:r>
+              <a:rPr lang="zh-CN" altLang="en-US" sz="2800" dirty="0">
+                <a:solidFill>
+                  <a:schemeClr val="tx2">
+                    <a:lumMod val="20000"/>
+                    <a:lumOff val="80000"/>
+                  </a:schemeClr>
+                </a:solidFill>
+                <a:latin typeface="得意黑" pitchFamily="2" charset="-122"/>
+                <a:ea typeface="得意黑" pitchFamily="2" charset="-122"/>
+              </a:rPr>
+              <a:t>确定有穷自动机</a:t>
+            </a:r>
+          </a:p>
+        </p:txBody>
+      </p:sp>
+    </p:spTree>
+    <p:extLst>
+      <p:ext uri="{BB962C8B-B14F-4D97-AF65-F5344CB8AC3E}">
+        <p14:creationId xmlns:p14="http://schemas.microsoft.com/office/powerpoint/2010/main" val="1007470623"/>
+      </p:ext>
+    </p:extLst>
+  </p:cSld>
+  <p:clrMapOvr>
+    <a:masterClrMapping/>
+  </p:clrMapOvr>
+  <mc:AlternateContent xmlns:mc="http://schemas.openxmlformats.org/markup-compatibility/2006" xmlns:p14="http://schemas.microsoft.com/office/powerpoint/2010/main">
+    <mc:Choice Requires="p14">
+      <p:transition spd="slow" p14:dur="2000" advTm="5000"/>
+    </mc:Choice>
+    <mc:Fallback xmlns="">
+      <p:transition spd="slow" advTm="5000"/>
+    </mc:Fallback>
+  </mc:AlternateContent>
+  <p:timing>
+    <p:tnLst>
+      <p:par>
+        <p:cTn id="1" dur="indefinite" restart="never" nodeType="tmRoot">
+          <p:childTnLst>
+            <p:seq concurrent="1" nextAc="seek">
+              <p:cTn id="2" dur="indefinite" nodeType="mainSeq">
+                <p:childTnLst>
+                  <p:par>
+                    <p:cTn id="3" fill="hold">
+                      <p:stCondLst>
+                        <p:cond delay="indefinite"/>
+                      </p:stCondLst>
+                      <p:childTnLst>
+                        <p:par>
+                          <p:cTn id="4" fill="hold">
+                            <p:stCondLst>
+                              <p:cond delay="0"/>
+                            </p:stCondLst>
+                            <p:childTnLst>
+                              <p:par>
+                                <p:cTn id="5" presetID="1" presetClass="entr" presetSubtype="0" fill="hold" grpId="0" nodeType="clickEffect">
+                                  <p:stCondLst>
+                                    <p:cond delay="0"/>
+                                  </p:stCondLst>
+                                  <p:childTnLst>
+                                    <p:set>
+                                      <p:cBhvr>
+                                        <p:cTn id="6" dur="1" fill="hold">
+                                          <p:stCondLst>
+                                            <p:cond delay="0"/>
+                                          </p:stCondLst>
+                                        </p:cTn>
+                                        <p:tgtEl>
+                                          <p:spTgt spid="4"/>
+                                        </p:tgtEl>
+                                        <p:attrNameLst>
+                                          <p:attrName>style.visibility</p:attrName>
+                                        </p:attrNameLst>
+                                      </p:cBhvr>
+                                      <p:to>
+                                        <p:strVal val="visible"/>
+                                      </p:to>
+                                    </p:set>
+                                  </p:childTnLst>
+                                </p:cTn>
+                              </p:par>
+                            </p:childTnLst>
+                          </p:cTn>
+                        </p:par>
+                      </p:childTnLst>
+                    </p:cTn>
+                  </p:par>
+                  <p:par>
+                    <p:cTn id="7" fill="hold">
+                      <p:stCondLst>
+                        <p:cond delay="indefinite"/>
+                      </p:stCondLst>
+                      <p:childTnLst>
+                        <p:par>
+                          <p:cTn id="8" fill="hold">
+                            <p:stCondLst>
+                              <p:cond delay="0"/>
+                            </p:stCondLst>
+                            <p:childTnLst>
+                              <p:par>
+                                <p:cTn id="9" presetID="1" presetClass="entr" presetSubtype="0" fill="hold" grpId="0" nodeType="clickEffect">
+                                  <p:stCondLst>
+                                    <p:cond delay="0"/>
+                                  </p:stCondLst>
+                                  <p:childTnLst>
+                                    <p:set>
+                                      <p:cBhvr>
+                                        <p:cTn id="10" dur="1" fill="hold">
                                           <p:stCondLst>
                                             <p:cond delay="0"/>
                                           </p:stCondLst>
@@ -6226,32 +8408,42 @@
                                         <p:strVal val="visible"/>
                                       </p:to>
                                     </p:set>
-                                    <p:animEffect transition="in" filter="fade">
-                                      <p:cBhvr>
-                                        <p:cTn id="17" dur="500"/>
-                                        <p:tgtEl>
-                                          <p:spTgt spid="5"/>
-                                        </p:tgtEl>
-                                      </p:cBhvr>
-                                    </p:animEffect>
                                   </p:childTnLst>
                                 </p:cTn>
                               </p:par>
+                            </p:childTnLst>
+                          </p:cTn>
+                        </p:par>
+                      </p:childTnLst>
+                    </p:cTn>
+                  </p:par>
+                  <p:par>
+                    <p:cTn id="11" fill="hold">
+                      <p:stCondLst>
+                        <p:cond delay="indefinite"/>
+                      </p:stCondLst>
+                      <p:childTnLst>
+                        <p:par>
+                          <p:cTn id="12" fill="hold">
+                            <p:stCondLst>
+                              <p:cond delay="0"/>
+                            </p:stCondLst>
+                            <p:childTnLst>
                               <p:par>
-                                <p:cTn id="18" presetID="10" presetClass="entr" presetSubtype="0" fill="hold" nodeType="withEffect">
+                                <p:cTn id="13" presetID="1" presetClass="entr" presetSubtype="0" fill="hold" grpId="0" nodeType="clickEffect">
                                   <p:stCondLst>
                                     <p:cond delay="0"/>
                                   </p:stCondLst>
                                   <p:childTnLst>
                                     <p:set>
                                       <p:cBhvr>
-                                        <p:cTn id="19" dur="1" fill="hold">
+                                        <p:cTn id="14" dur="1" fill="hold">
                                           <p:stCondLst>
                                             <p:cond delay="0"/>
                                           </p:stCondLst>
                                         </p:cTn>
                                         <p:tgtEl>
-                                          <p:spTgt spid="11"/>
+                                          <p:spTgt spid="6"/>
                                         </p:tgtEl>
                                         <p:attrNameLst>
                                           <p:attrName>style.visibility</p:attrName>
@@ -6261,14 +8453,50 @@
                                         <p:strVal val="visible"/>
                                       </p:to>
                                     </p:set>
-                                    <p:animEffect transition="in" filter="fade">
+                                  </p:childTnLst>
+                                </p:cTn>
+                              </p:par>
+                              <p:par>
+                                <p:cTn id="15" presetID="42" presetClass="path" presetSubtype="0" accel="50000" decel="50000" fill="hold" grpId="1" nodeType="withEffect">
+                                  <p:stCondLst>
+                                    <p:cond delay="100"/>
+                                  </p:stCondLst>
+                                  <p:childTnLst>
+                                    <p:animMotion origin="layout" path="M 4.16667E-6 4.44444E-6 L -0.1448 0.00138 " pathEditMode="relative" rAng="0" ptsTypes="AA">
                                       <p:cBhvr>
-                                        <p:cTn id="20" dur="500"/>
+                                        <p:cTn id="16" dur="1500" fill="hold"/>
                                         <p:tgtEl>
-                                          <p:spTgt spid="11"/>
+                                          <p:spTgt spid="4"/>
                                         </p:tgtEl>
+                                        <p:attrNameLst>
+                                          <p:attrName>ppt_x</p:attrName>
+                                          <p:attrName>ppt_y</p:attrName>
+                                        </p:attrNameLst>
                                       </p:cBhvr>
-                                    </p:animEffect>
+                                      <p:rCtr x="-7240" y="69"/>
+                                    </p:animMotion>
+                                  </p:childTnLst>
+                                </p:cTn>
+                              </p:par>
+                              <p:par>
+                                <p:cTn id="17" presetID="42" presetClass="path" presetSubtype="0" accel="50000" decel="50000" fill="hold" grpId="1" nodeType="withEffect">
+                                  <p:stCondLst>
+                                    <p:cond delay="100"/>
+                                  </p:stCondLst>
+                                  <p:childTnLst>
+                                    <p:animMotion origin="layout" path="M -2.29167E-6 4.44444E-6 L 0.07474 0.00138 " pathEditMode="relative" rAng="0" ptsTypes="AA">
+                                      <p:cBhvr>
+                                        <p:cTn id="18" dur="1500" fill="hold"/>
+                                        <p:tgtEl>
+                                          <p:spTgt spid="6"/>
+                                        </p:tgtEl>
+                                        <p:attrNameLst>
+                                          <p:attrName>ppt_x</p:attrName>
+                                          <p:attrName>ppt_y</p:attrName>
+                                        </p:attrNameLst>
+                                      </p:cBhvr>
+                                      <p:rCtr x="3737" y="69"/>
+                                    </p:animMotion>
                                   </p:childTnLst>
                                 </p:cTn>
                               </p:par>
@@ -6276,20 +8504,107 @@
                           </p:cTn>
                         </p:par>
                         <p:par>
-                          <p:cTn id="21" fill="hold">
+                          <p:cTn id="19" fill="hold">
                             <p:stCondLst>
-                              <p:cond delay="1000"/>
+                              <p:cond delay="1600"/>
                             </p:stCondLst>
                             <p:childTnLst>
                               <p:par>
-                                <p:cTn id="22" presetID="10" presetClass="entr" presetSubtype="0" fill="hold" grpId="0" nodeType="afterEffect">
+                                <p:cTn id="20" presetID="1" presetClass="exit" presetSubtype="0" fill="hold" grpId="2" nodeType="afterEffect">
                                   <p:stCondLst>
                                     <p:cond delay="0"/>
                                   </p:stCondLst>
                                   <p:childTnLst>
                                     <p:set>
                                       <p:cBhvr>
+                                        <p:cTn id="21" dur="1" fill="hold">
+                                          <p:stCondLst>
+                                            <p:cond delay="0"/>
+                                          </p:stCondLst>
+                                        </p:cTn>
+                                        <p:tgtEl>
+                                          <p:spTgt spid="4"/>
+                                        </p:tgtEl>
+                                        <p:attrNameLst>
+                                          <p:attrName>style.visibility</p:attrName>
+                                        </p:attrNameLst>
+                                      </p:cBhvr>
+                                      <p:to>
+                                        <p:strVal val="hidden"/>
+                                      </p:to>
+                                    </p:set>
+                                  </p:childTnLst>
+                                </p:cTn>
+                              </p:par>
+                              <p:par>
+                                <p:cTn id="22" presetID="1" presetClass="entr" presetSubtype="0" fill="hold" grpId="0" nodeType="withEffect">
+                                  <p:stCondLst>
+                                    <p:cond delay="0"/>
+                                  </p:stCondLst>
+                                  <p:iterate type="lt">
+                                    <p:tmAbs val="50"/>
+                                  </p:iterate>
+                                  <p:childTnLst>
+                                    <p:set>
+                                      <p:cBhvr>
                                         <p:cTn id="23" dur="1" fill="hold">
+                                          <p:stCondLst>
+                                            <p:cond delay="0"/>
+                                          </p:stCondLst>
+                                        </p:cTn>
+                                        <p:tgtEl>
+                                          <p:spTgt spid="10"/>
+                                        </p:tgtEl>
+                                        <p:attrNameLst>
+                                          <p:attrName>style.visibility</p:attrName>
+                                        </p:attrNameLst>
+                                      </p:cBhvr>
+                                      <p:to>
+                                        <p:strVal val="visible"/>
+                                      </p:to>
+                                    </p:set>
+                                  </p:childTnLst>
+                                </p:cTn>
+                              </p:par>
+                              <p:par>
+                                <p:cTn id="24" presetID="1" presetClass="exit" presetSubtype="0" fill="hold" grpId="1" nodeType="withEffect">
+                                  <p:stCondLst>
+                                    <p:cond delay="0"/>
+                                  </p:stCondLst>
+                                  <p:childTnLst>
+                                    <p:set>
+                                      <p:cBhvr>
+                                        <p:cTn id="25" dur="1" fill="hold">
+                                          <p:stCondLst>
+                                            <p:cond delay="0"/>
+                                          </p:stCondLst>
+                                        </p:cTn>
+                                        <p:tgtEl>
+                                          <p:spTgt spid="5"/>
+                                        </p:tgtEl>
+                                        <p:attrNameLst>
+                                          <p:attrName>style.visibility</p:attrName>
+                                        </p:attrNameLst>
+                                      </p:cBhvr>
+                                      <p:to>
+                                        <p:strVal val="hidden"/>
+                                      </p:to>
+                                    </p:set>
+                                  </p:childTnLst>
+                                </p:cTn>
+                              </p:par>
+                              <p:par>
+                                <p:cTn id="26" presetID="1" presetClass="entr" presetSubtype="0" fill="hold" grpId="0" nodeType="withEffect">
+                                  <p:stCondLst>
+                                    <p:cond delay="0"/>
+                                  </p:stCondLst>
+                                  <p:iterate type="lt">
+                                    <p:tmAbs val="50"/>
+                                  </p:iterate>
+                                  <p:childTnLst>
+                                    <p:set>
+                                      <p:cBhvr>
+                                        <p:cTn id="27" dur="1" fill="hold">
                                           <p:stCondLst>
                                             <p:cond delay="0"/>
                                           </p:stCondLst>
@@ -6305,14 +8620,175 @@
                                         <p:strVal val="visible"/>
                                       </p:to>
                                     </p:set>
+                                  </p:childTnLst>
+                                </p:cTn>
+                              </p:par>
+                              <p:par>
+                                <p:cTn id="28" presetID="1" presetClass="exit" presetSubtype="0" fill="hold" grpId="2" nodeType="withEffect">
+                                  <p:stCondLst>
+                                    <p:cond delay="0"/>
+                                  </p:stCondLst>
+                                  <p:childTnLst>
+                                    <p:set>
+                                      <p:cBhvr>
+                                        <p:cTn id="29" dur="1" fill="hold">
+                                          <p:stCondLst>
+                                            <p:cond delay="0"/>
+                                          </p:stCondLst>
+                                        </p:cTn>
+                                        <p:tgtEl>
+                                          <p:spTgt spid="6"/>
+                                        </p:tgtEl>
+                                        <p:attrNameLst>
+                                          <p:attrName>style.visibility</p:attrName>
+                                        </p:attrNameLst>
+                                      </p:cBhvr>
+                                      <p:to>
+                                        <p:strVal val="hidden"/>
+                                      </p:to>
+                                    </p:set>
+                                  </p:childTnLst>
+                                </p:cTn>
+                              </p:par>
+                              <p:par>
+                                <p:cTn id="30" presetID="1" presetClass="entr" presetSubtype="0" fill="hold" grpId="0" nodeType="withEffect">
+                                  <p:stCondLst>
+                                    <p:cond delay="0"/>
+                                  </p:stCondLst>
+                                  <p:iterate type="lt">
+                                    <p:tmAbs val="50"/>
+                                  </p:iterate>
+                                  <p:childTnLst>
+                                    <p:set>
+                                      <p:cBhvr>
+                                        <p:cTn id="31" dur="1" fill="hold">
+                                          <p:stCondLst>
+                                            <p:cond delay="0"/>
+                                          </p:stCondLst>
+                                        </p:cTn>
+                                        <p:tgtEl>
+                                          <p:spTgt spid="7"/>
+                                        </p:tgtEl>
+                                        <p:attrNameLst>
+                                          <p:attrName>style.visibility</p:attrName>
+                                        </p:attrNameLst>
+                                      </p:cBhvr>
+                                      <p:to>
+                                        <p:strVal val="visible"/>
+                                      </p:to>
+                                    </p:set>
+                                  </p:childTnLst>
+                                </p:cTn>
+                              </p:par>
+                            </p:childTnLst>
+                          </p:cTn>
+                        </p:par>
+                        <p:par>
+                          <p:cTn id="32" fill="hold">
+                            <p:stCondLst>
+                              <p:cond delay="2001"/>
+                            </p:stCondLst>
+                            <p:childTnLst>
+                              <p:par>
+                                <p:cTn id="33" presetID="42" presetClass="entr" presetSubtype="0" fill="hold" grpId="1" nodeType="afterEffect">
+                                  <p:stCondLst>
+                                    <p:cond delay="0"/>
+                                  </p:stCondLst>
+                                  <p:childTnLst>
+                                    <p:set>
+                                      <p:cBhvr>
+                                        <p:cTn id="34" dur="1" fill="hold">
+                                          <p:stCondLst>
+                                            <p:cond delay="0"/>
+                                          </p:stCondLst>
+                                        </p:cTn>
+                                        <p:tgtEl>
+                                          <p:spTgt spid="8"/>
+                                        </p:tgtEl>
+                                        <p:attrNameLst>
+                                          <p:attrName>style.visibility</p:attrName>
+                                        </p:attrNameLst>
+                                      </p:cBhvr>
+                                      <p:to>
+                                        <p:strVal val="visible"/>
+                                      </p:to>
+                                    </p:set>
                                     <p:animEffect transition="in" filter="fade">
                                       <p:cBhvr>
-                                        <p:cTn id="24" dur="500"/>
+                                        <p:cTn id="35" dur="500"/>
                                         <p:tgtEl>
-                                          <p:spTgt spid="3"/>
+                                          <p:spTgt spid="8"/>
                                         </p:tgtEl>
                                       </p:cBhvr>
                                     </p:animEffect>
+                                    <p:anim calcmode="lin" valueType="num">
+                                      <p:cBhvr>
+                                        <p:cTn id="36" dur="500" fill="hold"/>
+                                        <p:tgtEl>
+                                          <p:spTgt spid="8"/>
+                                        </p:tgtEl>
+                                        <p:attrNameLst>
+                                          <p:attrName>ppt_x</p:attrName>
+                                        </p:attrNameLst>
+                                      </p:cBhvr>
+                                      <p:tavLst>
+                                        <p:tav tm="0">
+                                          <p:val>
+                                            <p:strVal val="#ppt_x"/>
+                                          </p:val>
+                                        </p:tav>
+                                        <p:tav tm="100000">
+                                          <p:val>
+                                            <p:strVal val="#ppt_x"/>
+                                          </p:val>
+                                        </p:tav>
+                                      </p:tavLst>
+                                    </p:anim>
+                                    <p:anim calcmode="lin" valueType="num">
+                                      <p:cBhvr>
+                                        <p:cTn id="37" dur="500" fill="hold"/>
+                                        <p:tgtEl>
+                                          <p:spTgt spid="8"/>
+                                        </p:tgtEl>
+                                        <p:attrNameLst>
+                                          <p:attrName>ppt_y</p:attrName>
+                                        </p:attrNameLst>
+                                      </p:cBhvr>
+                                      <p:tavLst>
+                                        <p:tav tm="0">
+                                          <p:val>
+                                            <p:strVal val="#ppt_y+.1"/>
+                                          </p:val>
+                                        </p:tav>
+                                        <p:tav tm="100000">
+                                          <p:val>
+                                            <p:strVal val="#ppt_y"/>
+                                          </p:val>
+                                        </p:tav>
+                                      </p:tavLst>
+                                    </p:anim>
+                                  </p:childTnLst>
+                                </p:cTn>
+                              </p:par>
+                              <p:par>
+                                <p:cTn id="38" presetID="42" presetClass="path" presetSubtype="0" accel="50000" decel="50000" fill="hold" grpId="0" nodeType="withEffect">
+                                  <p:stCondLst>
+                                    <p:cond delay="0"/>
+                                  </p:stCondLst>
+                                  <p:childTnLst>
+                                    <p:animMotion origin="layout" path="M 0 -2.59259E-6 L 0 -0.13472 " pathEditMode="relative" rAng="0" ptsTypes="AA">
+                                      <p:cBhvr>
+                                        <p:cTn id="39" dur="750" fill="hold"/>
+                                        <p:tgtEl>
+                                          <p:spTgt spid="8"/>
+                                        </p:tgtEl>
+                                        <p:attrNameLst>
+                                          <p:attrName>ppt_x</p:attrName>
+                                          <p:attrName>ppt_y</p:attrName>
+                                        </p:attrNameLst>
+                                      </p:cBhvr>
+                                      <p:rCtr x="0" y="-6736"/>
+                                    </p:animMotion>
                                   </p:childTnLst>
                                 </p:cTn>
                               </p:par>
@@ -6345,433 +8821,18 @@
     </p:tnLst>
     <p:bldLst>
       <p:bldP spid="4" grpId="0"/>
-      <p:bldP spid="5" grpId="0" animBg="1"/>
-      <p:bldP spid="6" grpId="0" animBg="1"/>
-      <p:bldP spid="7" grpId="0" animBg="1"/>
+      <p:bldP spid="4" grpId="1"/>
+      <p:bldP spid="4" grpId="2"/>
+      <p:bldP spid="5" grpId="0"/>
+      <p:bldP spid="5" grpId="1"/>
+      <p:bldP spid="6" grpId="0"/>
+      <p:bldP spid="6" grpId="1"/>
+      <p:bldP spid="6" grpId="2"/>
+      <p:bldP spid="10" grpId="0"/>
       <p:bldP spid="3" grpId="0"/>
-    </p:bldLst>
-  </p:timing>
-</p:sld>
-</file>
-
-<file path=ppt/slides/slide3.xml><?xml version="1.0" encoding="utf-8"?>
-<p:sld xmlns:a="http://schemas.openxmlformats.org/drawingml/2006/main" xmlns:r="http://schemas.openxmlformats.org/officeDocument/2006/relationships" xmlns:p="http://schemas.openxmlformats.org/presentationml/2006/main">
-  <p:cSld>
-    <p:spTree>
-      <p:nvGrpSpPr>
-        <p:cNvPr id="1" name=""/>
-        <p:cNvGrpSpPr/>
-        <p:nvPr/>
-      </p:nvGrpSpPr>
-      <p:grpSpPr>
-        <a:xfrm>
-          <a:off x="0" y="0"/>
-          <a:ext cx="0" cy="0"/>
-          <a:chOff x="0" y="0"/>
-          <a:chExt cx="0" cy="0"/>
-        </a:xfrm>
-      </p:grpSpPr>
-      <p:sp>
-        <p:nvSpPr>
-          <p:cNvPr id="4" name="矩形: 圆角 3">
-            <a:extLst>
-              <a:ext uri="{FF2B5EF4-FFF2-40B4-BE49-F238E27FC236}">
-                <a16:creationId xmlns:a16="http://schemas.microsoft.com/office/drawing/2014/main" id="{BB441712-52A0-B264-9A95-A84025739CD1}"/>
-              </a:ext>
-            </a:extLst>
-          </p:cNvPr>
-          <p:cNvSpPr/>
-          <p:nvPr/>
-        </p:nvSpPr>
-        <p:spPr>
-          <a:xfrm>
-            <a:off x="5016000" y="2349000"/>
-            <a:ext cx="2160000" cy="2160000"/>
-          </a:xfrm>
-          <a:prstGeom prst="roundRect">
-            <a:avLst/>
-          </a:prstGeom>
-          <a:solidFill>
-            <a:schemeClr val="bg2">
-              <a:lumMod val="50000"/>
-            </a:schemeClr>
-          </a:solidFill>
-        </p:spPr>
-        <p:style>
-          <a:lnRef idx="2">
-            <a:schemeClr val="accent1">
-              <a:shade val="15000"/>
-            </a:schemeClr>
-          </a:lnRef>
-          <a:fillRef idx="1">
-            <a:schemeClr val="accent1"/>
-          </a:fillRef>
-          <a:effectRef idx="0">
-            <a:schemeClr val="accent1"/>
-          </a:effectRef>
-          <a:fontRef idx="minor">
-            <a:schemeClr val="lt1"/>
-          </a:fontRef>
-        </p:style>
-        <p:txBody>
-          <a:bodyPr rtlCol="0" anchor="ctr"/>
-          <a:lstStyle/>
-          <a:p>
-            <a:pPr algn="ctr"/>
-            <a:r>
-              <a:rPr lang="en-US" altLang="zh-CN" sz="4000" b="1" dirty="0">
-                <a:solidFill>
-                  <a:schemeClr val="bg2">
-                    <a:lumMod val="90000"/>
-                  </a:schemeClr>
-                </a:solidFill>
-                <a:latin typeface="得意黑" pitchFamily="50" charset="-122"/>
-                <a:ea typeface="得意黑" pitchFamily="50" charset="-122"/>
-              </a:rPr>
-              <a:t>Compiler</a:t>
-            </a:r>
-          </a:p>
-        </p:txBody>
-      </p:sp>
-      <p:sp>
-        <p:nvSpPr>
-          <p:cNvPr id="6" name="矩形: 折角 5">
-            <a:extLst>
-              <a:ext uri="{FF2B5EF4-FFF2-40B4-BE49-F238E27FC236}">
-                <a16:creationId xmlns:a16="http://schemas.microsoft.com/office/drawing/2014/main" id="{0CCBECAB-C9AE-F831-941B-A6B0A0D3BFB4}"/>
-              </a:ext>
-            </a:extLst>
-          </p:cNvPr>
-          <p:cNvSpPr/>
-          <p:nvPr/>
-        </p:nvSpPr>
-        <p:spPr>
-          <a:xfrm rot="10800000" flipH="1">
-            <a:off x="1717040" y="2349000"/>
-            <a:ext cx="1440000" cy="2160000"/>
-          </a:xfrm>
-          <a:prstGeom prst="foldedCorner">
-            <a:avLst/>
-          </a:prstGeom>
-          <a:solidFill>
-            <a:schemeClr val="bg1">
-              <a:lumMod val="75000"/>
-            </a:schemeClr>
-          </a:solidFill>
-        </p:spPr>
-        <p:style>
-          <a:lnRef idx="2">
-            <a:schemeClr val="accent1">
-              <a:shade val="15000"/>
-            </a:schemeClr>
-          </a:lnRef>
-          <a:fillRef idx="1">
-            <a:schemeClr val="accent1"/>
-          </a:fillRef>
-          <a:effectRef idx="0">
-            <a:schemeClr val="accent1"/>
-          </a:effectRef>
-          <a:fontRef idx="minor">
-            <a:schemeClr val="lt1"/>
-          </a:fontRef>
-        </p:style>
-        <p:txBody>
-          <a:bodyPr rtlCol="0" anchor="ctr"/>
-          <a:lstStyle/>
-          <a:p>
-            <a:pPr algn="ctr"/>
-            <a:endParaRPr lang="zh-CN" altLang="en-US"/>
-          </a:p>
-        </p:txBody>
-      </p:sp>
-      <p:sp>
-        <p:nvSpPr>
-          <p:cNvPr id="8" name="矩形: 折角 7">
-            <a:extLst>
-              <a:ext uri="{FF2B5EF4-FFF2-40B4-BE49-F238E27FC236}">
-                <a16:creationId xmlns:a16="http://schemas.microsoft.com/office/drawing/2014/main" id="{48B3FE5F-F72B-E1CD-E210-52982BF2FBD2}"/>
-              </a:ext>
-            </a:extLst>
-          </p:cNvPr>
-          <p:cNvSpPr/>
-          <p:nvPr/>
-        </p:nvSpPr>
-        <p:spPr>
-          <a:xfrm rot="10800000" flipH="1">
-            <a:off x="9034961" y="2349000"/>
-            <a:ext cx="1440000" cy="2160000"/>
-          </a:xfrm>
-          <a:prstGeom prst="foldedCorner">
-            <a:avLst/>
-          </a:prstGeom>
-          <a:solidFill>
-            <a:schemeClr val="bg1">
-              <a:lumMod val="75000"/>
-            </a:schemeClr>
-          </a:solidFill>
-        </p:spPr>
-        <p:style>
-          <a:lnRef idx="2">
-            <a:schemeClr val="accent1">
-              <a:shade val="15000"/>
-            </a:schemeClr>
-          </a:lnRef>
-          <a:fillRef idx="1">
-            <a:schemeClr val="accent1"/>
-          </a:fillRef>
-          <a:effectRef idx="0">
-            <a:schemeClr val="accent1"/>
-          </a:effectRef>
-          <a:fontRef idx="minor">
-            <a:schemeClr val="lt1"/>
-          </a:fontRef>
-        </p:style>
-        <p:txBody>
-          <a:bodyPr rtlCol="0" anchor="ctr"/>
-          <a:lstStyle/>
-          <a:p>
-            <a:pPr algn="ctr"/>
-            <a:endParaRPr lang="zh-CN" altLang="en-US"/>
-          </a:p>
-        </p:txBody>
-      </p:sp>
-    </p:spTree>
-    <p:extLst>
-      <p:ext uri="{BB962C8B-B14F-4D97-AF65-F5344CB8AC3E}">
-        <p14:creationId xmlns:p14="http://schemas.microsoft.com/office/powerpoint/2010/main" val="2951529660"/>
-      </p:ext>
-    </p:extLst>
-  </p:cSld>
-  <p:clrMapOvr>
-    <a:masterClrMapping/>
-  </p:clrMapOvr>
-</p:sld>
-</file>
-
-<file path=ppt/slides/slide4.xml><?xml version="1.0" encoding="utf-8"?>
-<p:sld xmlns:a="http://schemas.openxmlformats.org/drawingml/2006/main" xmlns:r="http://schemas.openxmlformats.org/officeDocument/2006/relationships" xmlns:p="http://schemas.openxmlformats.org/presentationml/2006/main">
-  <p:cSld>
-    <p:spTree>
-      <p:nvGrpSpPr>
-        <p:cNvPr id="1" name=""/>
-        <p:cNvGrpSpPr/>
-        <p:nvPr/>
-      </p:nvGrpSpPr>
-      <p:grpSpPr>
-        <a:xfrm>
-          <a:off x="0" y="0"/>
-          <a:ext cx="0" cy="0"/>
-          <a:chOff x="0" y="0"/>
-          <a:chExt cx="0" cy="0"/>
-        </a:xfrm>
-      </p:grpSpPr>
-      <p:sp>
-        <p:nvSpPr>
-          <p:cNvPr id="3" name="文本框 2">
-            <a:extLst>
-              <a:ext uri="{FF2B5EF4-FFF2-40B4-BE49-F238E27FC236}">
-                <a16:creationId xmlns:a16="http://schemas.microsoft.com/office/drawing/2014/main" id="{1B951DD6-BC4D-03B2-60D7-7CE5AA0AD167}"/>
-              </a:ext>
-            </a:extLst>
-          </p:cNvPr>
-          <p:cNvSpPr txBox="1"/>
-          <p:nvPr/>
-        </p:nvSpPr>
-        <p:spPr>
-          <a:xfrm>
-            <a:off x="3129643" y="2321004"/>
-            <a:ext cx="5932714" cy="2215991"/>
-          </a:xfrm>
-          <a:prstGeom prst="rect">
-            <a:avLst/>
-          </a:prstGeom>
-          <a:noFill/>
-        </p:spPr>
-        <p:txBody>
-          <a:bodyPr wrap="square" rtlCol="0">
-            <a:spAutoFit/>
-          </a:bodyPr>
-          <a:lstStyle/>
-          <a:p>
-            <a:pPr algn="ctr"/>
-            <a:r>
-              <a:rPr lang="zh-CN" altLang="en-US" sz="13800" dirty="0">
-                <a:solidFill>
-                  <a:schemeClr val="bg2">
-                    <a:lumMod val="75000"/>
-                  </a:schemeClr>
-                </a:solidFill>
-                <a:latin typeface="得意黑" pitchFamily="50" charset="-122"/>
-                <a:ea typeface="得意黑" pitchFamily="50" charset="-122"/>
-              </a:rPr>
-              <a:t>词法分析</a:t>
-            </a:r>
-          </a:p>
-        </p:txBody>
-      </p:sp>
-    </p:spTree>
-    <p:extLst>
-      <p:ext uri="{BB962C8B-B14F-4D97-AF65-F5344CB8AC3E}">
-        <p14:creationId xmlns:p14="http://schemas.microsoft.com/office/powerpoint/2010/main" val="1726037712"/>
-      </p:ext>
-    </p:extLst>
-  </p:cSld>
-  <p:clrMapOvr>
-    <a:masterClrMapping/>
-  </p:clrMapOvr>
-  <p:timing>
-    <p:tnLst>
-      <p:par>
-        <p:cTn id="1" dur="indefinite" restart="never" nodeType="tmRoot">
-          <p:childTnLst>
-            <p:seq concurrent="1" nextAc="seek">
-              <p:cTn id="2" dur="indefinite" nodeType="mainSeq">
-                <p:childTnLst>
-                  <p:par>
-                    <p:cTn id="3" fill="hold">
-                      <p:stCondLst>
-                        <p:cond delay="indefinite"/>
-                      </p:stCondLst>
-                      <p:childTnLst>
-                        <p:par>
-                          <p:cTn id="4" fill="hold">
-                            <p:stCondLst>
-                              <p:cond delay="0"/>
-                            </p:stCondLst>
-                            <p:childTnLst>
-                              <p:par>
-                                <p:cTn id="5" presetID="10" presetClass="entr" presetSubtype="0" fill="hold" grpId="0" nodeType="clickEffect">
-                                  <p:stCondLst>
-                                    <p:cond delay="0"/>
-                                  </p:stCondLst>
-                                  <p:childTnLst>
-                                    <p:set>
-                                      <p:cBhvr>
-                                        <p:cTn id="6" dur="1" fill="hold">
-                                          <p:stCondLst>
-                                            <p:cond delay="0"/>
-                                          </p:stCondLst>
-                                        </p:cTn>
-                                        <p:tgtEl>
-                                          <p:spTgt spid="3"/>
-                                        </p:tgtEl>
-                                        <p:attrNameLst>
-                                          <p:attrName>style.visibility</p:attrName>
-                                        </p:attrNameLst>
-                                      </p:cBhvr>
-                                      <p:to>
-                                        <p:strVal val="visible"/>
-                                      </p:to>
-                                    </p:set>
-                                    <p:animEffect transition="in" filter="fade">
-                                      <p:cBhvr>
-                                        <p:cTn id="7" dur="500"/>
-                                        <p:tgtEl>
-                                          <p:spTgt spid="3"/>
-                                        </p:tgtEl>
-                                      </p:cBhvr>
-                                    </p:animEffect>
-                                  </p:childTnLst>
-                                </p:cTn>
-                              </p:par>
-                            </p:childTnLst>
-                          </p:cTn>
-                        </p:par>
-                      </p:childTnLst>
-                    </p:cTn>
-                  </p:par>
-                  <p:par>
-                    <p:cTn id="8" fill="hold">
-                      <p:stCondLst>
-                        <p:cond delay="indefinite"/>
-                      </p:stCondLst>
-                      <p:childTnLst>
-                        <p:par>
-                          <p:cTn id="9" fill="hold">
-                            <p:stCondLst>
-                              <p:cond delay="0"/>
-                            </p:stCondLst>
-                            <p:childTnLst>
-                              <p:par>
-                                <p:cTn id="10" presetID="6" presetClass="emph" presetSubtype="0" fill="hold" grpId="1" nodeType="clickEffect">
-                                  <p:stCondLst>
-                                    <p:cond delay="0"/>
-                                  </p:stCondLst>
-                                  <p:childTnLst>
-                                    <p:animScale>
-                                      <p:cBhvr>
-                                        <p:cTn id="11" dur="750" fill="hold"/>
-                                        <p:tgtEl>
-                                          <p:spTgt spid="3"/>
-                                        </p:tgtEl>
-                                      </p:cBhvr>
-                                      <p:by x="50000" y="50000"/>
-                                    </p:animScale>
-                                  </p:childTnLst>
-                                </p:cTn>
-                              </p:par>
-                            </p:childTnLst>
-                          </p:cTn>
-                        </p:par>
-                        <p:par>
-                          <p:cTn id="12" fill="hold">
-                            <p:stCondLst>
-                              <p:cond delay="750"/>
-                            </p:stCondLst>
-                            <p:childTnLst>
-                              <p:par>
-                                <p:cTn id="13" presetID="42" presetClass="path" presetSubtype="0" accel="50000" decel="50000" fill="hold" grpId="2" nodeType="afterEffect">
-                                  <p:stCondLst>
-                                    <p:cond delay="0"/>
-                                  </p:stCondLst>
-                                  <p:childTnLst>
-                                    <p:animMotion origin="layout" path="M 0 0 L -0.37773 -0.40162 " pathEditMode="relative" rAng="0" ptsTypes="AA">
-                                      <p:cBhvr>
-                                        <p:cTn id="14" dur="2750" fill="hold"/>
-                                        <p:tgtEl>
-                                          <p:spTgt spid="3"/>
-                                        </p:tgtEl>
-                                        <p:attrNameLst>
-                                          <p:attrName>ppt_x</p:attrName>
-                                          <p:attrName>ppt_y</p:attrName>
-                                        </p:attrNameLst>
-                                      </p:cBhvr>
-                                      <p:rCtr x="-18893" y="-20093"/>
-                                    </p:animMotion>
-                                  </p:childTnLst>
-                                </p:cTn>
-                              </p:par>
-                            </p:childTnLst>
-                          </p:cTn>
-                        </p:par>
-                      </p:childTnLst>
-                    </p:cTn>
-                  </p:par>
-                </p:childTnLst>
-              </p:cTn>
-              <p:prevCondLst>
-                <p:cond evt="onPrev" delay="0">
-                  <p:tgtEl>
-                    <p:sldTgt/>
-                  </p:tgtEl>
-                </p:cond>
-              </p:prevCondLst>
-              <p:nextCondLst>
-                <p:cond evt="onNext" delay="0">
-                  <p:tgtEl>
-                    <p:sldTgt/>
-                  </p:tgtEl>
-                </p:cond>
-              </p:nextCondLst>
-            </p:seq>
-          </p:childTnLst>
-        </p:cTn>
-      </p:par>
-    </p:tnLst>
-    <p:bldLst>
-      <p:bldP spid="3" grpId="0"/>
-      <p:bldP spid="3" grpId="1"/>
-      <p:bldP spid="3" grpId="2"/>
+      <p:bldP spid="7" grpId="0"/>
+      <p:bldP spid="8" grpId="0"/>
+      <p:bldP spid="8" grpId="1"/>
     </p:bldLst>
   </p:timing>
 </p:sld>
@@ -6976,6 +9037,14 @@
   <p:clrMapOvr>
     <a:masterClrMapping/>
   </p:clrMapOvr>
+  <mc:AlternateContent xmlns:mc="http://schemas.openxmlformats.org/markup-compatibility/2006" xmlns:p14="http://schemas.microsoft.com/office/powerpoint/2010/main">
+    <mc:Choice Requires="p14">
+      <p:transition spd="slow" p14:dur="2000" advTm="1000"/>
+    </mc:Choice>
+    <mc:Fallback xmlns="">
+      <p:transition spd="slow" advTm="1000"/>
+    </mc:Fallback>
+  </mc:AlternateContent>
   <p:timing>
     <p:tnLst>
       <p:par>
@@ -7102,6 +9171,24 @@
     </p:bldLst>
   </p:timing>
 </p:sld>
+</file>
+
+<file path=ppt/tags/tag1.xml><?xml version="1.0" encoding="utf-8"?>
+<p:tagLst xmlns:a="http://schemas.openxmlformats.org/drawingml/2006/main" xmlns:r="http://schemas.openxmlformats.org/officeDocument/2006/relationships" xmlns:p="http://schemas.openxmlformats.org/presentationml/2006/main">
+  <p:tag name="TIMING" val="|1.6|1.1|1.3|0.9|1.2"/>
+</p:tagLst>
+</file>
+
+<file path=ppt/tags/tag2.xml><?xml version="1.0" encoding="utf-8"?>
+<p:tagLst xmlns:a="http://schemas.openxmlformats.org/drawingml/2006/main" xmlns:r="http://schemas.openxmlformats.org/officeDocument/2006/relationships" xmlns:p="http://schemas.openxmlformats.org/presentationml/2006/main">
+  <p:tag name="TIMING" val="|1|0.9"/>
+</p:tagLst>
+</file>
+
+<file path=ppt/tags/tag3.xml><?xml version="1.0" encoding="utf-8"?>
+<p:tagLst xmlns:a="http://schemas.openxmlformats.org/drawingml/2006/main" xmlns:r="http://schemas.openxmlformats.org/officeDocument/2006/relationships" xmlns:p="http://schemas.openxmlformats.org/presentationml/2006/main">
+  <p:tag name="TIMING" val="|0.8|2.3"/>
+</p:tagLst>
 </file>
 
 <file path=ppt/theme/theme1.xml><?xml version="1.0" encoding="utf-8"?>
